--- a/docs/presentacion/PrintWatch_YOLO11.pptx
+++ b/docs/presentacion/PrintWatch_YOLO11.pptx
@@ -11,10 +11,9 @@
     <p:sldId id="259" r:id="rId5"/>
     <p:sldId id="260" r:id="rId6"/>
     <p:sldId id="261" r:id="rId7"/>
-    <p:sldId id="262" r:id="rId8"/>
   </p:sldIdLst>
   <p:notesMasterIdLst>
-    <p:notesMasterId r:id="rId9"/>
+    <p:notesMasterId r:id="rId8"/>
   </p:notesMasterIdLst>
   <p:sldSz cx="12192000" cy="6858000"/>
   <p:notesSz cx="6858000" cy="12192000"/>
@@ -113,27 +112,22 @@
   <p:extLst>
     <p:ext uri="{521415D9-36F7-43E2-AB2F-B90AF26B5E84}">
       <p14:sectionLst xmlns:p14="http://schemas.microsoft.com/office/powerpoint/2010/main">
-        <p14:section name="Portada" id="{e06441e4-d12b-0dac-8a7e-fb30af7a218b}">
+        <p14:section name="Portada" id="{284843d3-4642-467f-cde3-24282e9f1e83}">
           <p14:sldIdLst>
             <p14:sldId id="256"/>
           </p14:sldIdLst>
         </p14:section>
-        <p14:section name="Modelo YOLO11s" id="{5c30b64f-949b-22b7-597d-c55d843d3831}">
+        <p14:section name="Modelo YOLO11s" id="{b79d263f-57d7-e36e-d5e4-b425a00a0432}">
           <p14:sldIdLst>
             <p14:sldId id="257"/>
             <p14:sldId id="258"/>
           </p14:sldIdLst>
         </p14:section>
-        <p14:section name="Preprocesamiento" id="{6b955d39-e86b-3c7c-4a79-b98b6b6c5b4b}">
+        <p14:section name="Datos y entrenamiento" id="{d024e762-a8d1-dd1e-0917-9a66c5b25a6f}">
           <p14:sldIdLst>
             <p14:sldId id="259"/>
-          </p14:sldIdLst>
-        </p14:section>
-        <p14:section name="Datos y entrenamiento" id="{e834c0a8-0e13-076f-db2d-0b379de12f47}">
-          <p14:sldIdLst>
             <p14:sldId id="260"/>
             <p14:sldId id="261"/>
-            <p14:sldId id="262"/>
           </p14:sldIdLst>
         </p14:section>
       </p14:sectionLst>
@@ -2427,7 +2421,7 @@
           <a:p>
             <a:r>
               <a:rPr lang="en-US" dirty="0"/>
-              <a:t>YOLO es un detector de una sola etapa: la misma pasada hacia adelante localiza y clasifica. La imagen se reparte en celdas en tres escalas, cada celda propone una caja y probabilidades de clase, y el NMS limpia los duplicados.</a:t>
+              <a:t>Continuación de la parte de mi compañero: el tensor (1, 3, 640, 640) ya normalizado es lo que entra a la red. YOLO es un detector de una sola etapa: la misma pasada hacia adelante localiza y clasifica. La imagen se reparte en celdas en tres escalas, cada celda propone una caja y probabilidades de clase, y el NMS limpia los duplicados.</a:t>
             </a:r>
             <a:endParaRPr lang="en-US" dirty="0"/>
           </a:p>
@@ -2603,7 +2597,7 @@
           <a:p>
             <a:r>
               <a:rPr lang="en-US" dirty="0"/>
-              <a:t>La cámara entrega 1280 por 720. YOLO espera un cuadrado de 640. El letterbox escala con un único factor s igual a 0.5, que no deforma los defectos, y completa con gris 114 hasta 640 por 640. Luego se reordena a canales-alto-ancho con dimensión de batch y se divide entre 255. No se resta media ni desviación porque la primera BatchNorm ya recentra. 640 es múltiplo de 32 porque el backbone reduce cinco veces por 2, y es el tamaño de preentrenamiento. Ojo: en producción el worker redimensiona directo, y esa diferencia con el entrenamiento está registrada como limitación en el informe.</a:t>
+              <a:t>Combinamos tres datasets públicos de Roboflow Universe: 3612, 1002 y 999 imágenes, 5613 en total, mapeados a nuestras seis clases. Dividimos 70, 15 y 15 por ciento por secuencia de video y no por fotograma, porque frames consecutivos son casi idénticos y, si quedaran repartidos entre entrenamiento y prueba, las métricas saldrían infladas: eso es data leakage. El conjunto de prueba real quedó en 841 imágenes porque la división por secuencia no es exacta.</a:t>
             </a:r>
             <a:endParaRPr lang="en-US" dirty="0"/>
           </a:p>
@@ -2691,7 +2685,7 @@
           <a:p>
             <a:r>
               <a:rPr lang="en-US" dirty="0"/>
-              <a:t>Combinamos tres datasets públicos de Roboflow Universe: 3612, 1002 y 999 imágenes, 5613 en total, mapeados a nuestras seis clases. Dividimos 70, 15 y 15 por ciento por secuencia de video y no por fotograma, porque frames consecutivos son casi idénticos y, si quedaran repartidos entre entrenamiento y prueba, las métricas saldrían infladas: eso es data leakage. El conjunto de prueba real quedó en 841 imágenes porque la división por secuencia no es exacta.</a:t>
+              <a:t>La pérdida combina tres términos. CIoU mide la caja y pesa 7.5, porque localizar con precisión es lo más difícil; da gradiente incluso cuando las cajas no se tocan. BCE clasifica cada clase de forma independiente con peso 0.5. DFL afina los bordes con peso 1.5. YOLO11s ganó un bake-off corto de 15 épocas contra YOLOv8n; el entrenamiento final fue en Colab: hasta 100 épocas, batch 16, 640 píxeles, patience 20, lr inicial 0.01. El optimizador está configurado como auto en Ultralytics: confirmar en args.yaml cuál eligió. La regla base es descenso de gradiente con momentum y decaimiento de pesos; el learning rate tiene warmup y luego decae hasta cerca del 1 por ciento.</a:t>
             </a:r>
             <a:endParaRPr lang="en-US" dirty="0"/>
           </a:p>
@@ -2779,7 +2773,7 @@
           <a:p>
             <a:r>
               <a:rPr lang="en-US" dirty="0"/>
-              <a:t>La pérdida combina tres términos. CIoU mide la caja y pesa 7.5, porque localizar con precisión es lo más difícil; da gradiente incluso cuando las cajas no se tocan. BCE clasifica cada clase de forma independiente con peso 0.5. DFL afina los bordes con peso 1.5. YOLO11s ganó un bake-off corto de 15 épocas contra YOLOv8n; el entrenamiento final fue en Colab: hasta 100 épocas, batch 16, 640 píxeles, patience 20, lr inicial 0.01. El optimizador está configurado como auto en Ultralytics: confirmar en args.yaml cuál eligió. La regla base es descenso de gradiente con momentum y decaimiento de pesos; el learning rate tiene warmup y luego decae hasta cerca del 1 por ciento.</a:t>
+              <a:t>Estas curvas son ilustrativas: el notebook de entrenamiento se guardó sin sus salidas, así que no tenemos las reales. Muestran el patrón sano: la pérdida de train y de validación bajan juntas y el mAP sube y se estabiliza. El learning rate tiene un warmup corto y luego decae casi hasta cero. Si la validación se aplana o sube mientras train sigue bajando, es overfitting, y patience detiene el entrenamiento conservando el mejor checkpoint.</a:t>
             </a:r>
             <a:endParaRPr lang="en-US" dirty="0"/>
           </a:p>
@@ -2803,94 +2797,6 @@
             <a:fld id="{F7021451-1387-4CA6-816F-3879F97B5CBC}" type="slidenum">
               <a:rPr lang="en-US"/>
               <a:t>6</a:t>
-            </a:fld>
-            <a:endParaRPr lang="en-US"/>
-          </a:p>
-        </p:txBody>
-      </p:sp>
-    </p:spTree>
-    <p:extLst>
-      <p:ext uri="{BB962C8B-B14F-4D97-AF65-F5344CB8AC3E}">
-        <p14:creationId xmlns:p14="http://schemas.microsoft.com/office/powerpoint/2010/main" val="1024086991"/>
-      </p:ext>
-    </p:extLst>
-  </p:cSld>
-  <p:clrMapOvr>
-    <a:masterClrMapping/>
-  </p:clrMapOvr>
-</p:notes>
-</file>
-
-<file path=ppt/notesSlides/notesSlide7.xml><?xml version="1.0" encoding="utf-8"?>
-<p:notes xmlns:a="http://schemas.openxmlformats.org/drawingml/2006/main" xmlns:r="http://schemas.openxmlformats.org/officeDocument/2006/relationships" xmlns:p="http://schemas.openxmlformats.org/presentationml/2006/main">
-  <p:cSld>
-    <p:spTree>
-      <p:nvGrpSpPr>
-        <p:cNvPr id="1" name=""/>
-        <p:cNvGrpSpPr/>
-        <p:nvPr/>
-      </p:nvGrpSpPr>
-      <p:grpSpPr>
-        <a:xfrm>
-          <a:off x="0" y="0"/>
-          <a:ext cx="0" cy="0"/>
-          <a:chOff x="0" y="0"/>
-          <a:chExt cx="0" cy="0"/>
-        </a:xfrm>
-      </p:grpSpPr>
-      <p:sp>
-        <p:nvSpPr>
-          <p:cNvPr id="2" name="Slide Image Placeholder 1"/>
-          <p:cNvSpPr>
-            <a:spLocks noGrp="1" noRot="1" noChangeAspect="1"/>
-          </p:cNvSpPr>
-          <p:nvPr>
-            <p:ph type="sldImg"/>
-          </p:nvPr>
-        </p:nvSpPr>
-        <p:spPr/>
-      </p:sp>
-      <p:sp>
-        <p:nvSpPr>
-          <p:cNvPr id="3" name="Notes Placeholder 2"/>
-          <p:cNvSpPr>
-            <a:spLocks noGrp="1"/>
-          </p:cNvSpPr>
-          <p:nvPr>
-            <p:ph type="body" idx="1"/>
-          </p:nvPr>
-        </p:nvSpPr>
-        <p:spPr/>
-        <p:txBody>
-          <a:bodyPr/>
-          <a:lstStyle/>
-          <a:p>
-            <a:r>
-              <a:rPr lang="en-US" dirty="0"/>
-              <a:t>Estas curvas son ilustrativas: el notebook de entrenamiento se guardó sin sus salidas, así que no tenemos las reales. Muestran el patrón sano: la pérdida de train y de validación bajan juntas y el mAP sube y se estabiliza. El learning rate tiene un warmup corto y luego decae casi hasta cero. Si la validación se aplana o sube mientras train sigue bajando, es overfitting, y patience detiene el entrenamiento conservando el mejor checkpoint.</a:t>
-            </a:r>
-            <a:endParaRPr lang="en-US" dirty="0"/>
-          </a:p>
-        </p:txBody>
-      </p:sp>
-      <p:sp>
-        <p:nvSpPr>
-          <p:cNvPr id="4" name="Slide Number Placeholder 3"/>
-          <p:cNvSpPr>
-            <a:spLocks noGrp="1"/>
-          </p:cNvSpPr>
-          <p:nvPr>
-            <p:ph type="sldNum" sz="quarter" idx="10"/>
-          </p:nvPr>
-        </p:nvSpPr>
-        <p:spPr/>
-        <p:txBody>
-          <a:bodyPr/>
-          <a:lstStyle/>
-          <a:p>
-            <a:fld id="{F7021451-1387-4CA6-816F-3879F97B5CBC}" type="slidenum">
-              <a:rPr lang="en-US"/>
-              <a:t>7</a:t>
             </a:fld>
             <a:endParaRPr lang="en-US"/>
           </a:p>
@@ -5567,7 +5473,7 @@
                   <a:schemeClr val="tx1"/>
                 </a:solidFill>
               </a:rPr>
-              <a:t>Preprocesamiento de la imagen</a:t>
+              <a:t>Dataset y división 70 / 15 / 15</a:t>
             </a:r>
             <a:endParaRPr lang="en-US" sz="3000" dirty="0"/>
           </a:p>
@@ -5582,11 +5488,288 @@
         <p:spPr>
           <a:xfrm>
             <a:off x="822960" y="1371600"/>
-            <a:ext cx="1874520" cy="2651760"/>
+            <a:ext cx="7232904" cy="914400"/>
+          </a:xfrm>
+          <a:prstGeom prst="rect">
+            <a:avLst/>
+          </a:prstGeom>
+          <a:solidFill>
+            <a:schemeClr val="accent1"/>
+          </a:solidFill>
+          <a:ln w="25400">
+            <a:solidFill>
+              <a:schemeClr val="bg1"/>
+            </a:solidFill>
+            <a:prstDash val="solid"/>
+          </a:ln>
+        </p:spPr>
+      </p:sp>
+      <p:sp>
+        <p:nvSpPr>
+          <p:cNvPr id="5" name="Text 2"/>
+          <p:cNvSpPr txBox="1"/>
+          <p:nvPr/>
+        </p:nvSpPr>
+        <p:spPr>
+          <a:xfrm>
+            <a:off x="822960" y="1371600"/>
+            <a:ext cx="7232904" cy="914400"/>
+          </a:xfrm>
+          <a:prstGeom prst="rect">
+            <a:avLst/>
+          </a:prstGeom>
+          <a:noFill/>
+          <a:ln/>
+        </p:spPr>
+        <p:txBody>
+          <a:bodyPr wrap="square" lIns="0" tIns="0" rIns="0" bIns="0" rtlCol="0" anchor="ctr"/>
+          <a:lstStyle/>
+          <a:p>
+            <a:pPr algn="ctr" indent="0" marL="0">
+              <a:buNone/>
+            </a:pPr>
+            <a:r>
+              <a:rPr lang="en-US" sz="1800" b="1" dirty="0">
+                <a:solidFill>
+                  <a:schemeClr val="tx1"/>
+                </a:solidFill>
+              </a:rPr>
+              <a:t>Entrenamiento · 70 %</a:t>
+            </a:r>
+            <a:endParaRPr lang="en-US" sz="1400" dirty="0"/>
+          </a:p>
+          <a:p>
+            <a:pPr algn="ctr" indent="0" marL="0">
+              <a:buNone/>
+            </a:pPr>
+            <a:r>
+              <a:rPr lang="en-US" sz="1400" dirty="0">
+                <a:solidFill>
+                  <a:schemeClr val="tx1"/>
+                </a:solidFill>
+              </a:rPr>
+              <a:t>≈ 3 929 imágenes</a:t>
+            </a:r>
+            <a:endParaRPr lang="en-US" sz="1400" dirty="0"/>
+          </a:p>
+        </p:txBody>
+      </p:sp>
+      <p:sp>
+        <p:nvSpPr>
+          <p:cNvPr id="6" name="Shape 3"/>
+          <p:cNvSpPr/>
+          <p:nvPr/>
+        </p:nvSpPr>
+        <p:spPr>
+          <a:xfrm>
+            <a:off x="8055864" y="1371600"/>
+            <a:ext cx="1549908" cy="914400"/>
+          </a:xfrm>
+          <a:prstGeom prst="rect">
+            <a:avLst/>
+          </a:prstGeom>
+          <a:solidFill>
+            <a:schemeClr val="accent3"/>
+          </a:solidFill>
+          <a:ln w="25400">
+            <a:solidFill>
+              <a:schemeClr val="bg1"/>
+            </a:solidFill>
+            <a:prstDash val="solid"/>
+          </a:ln>
+        </p:spPr>
+      </p:sp>
+      <p:sp>
+        <p:nvSpPr>
+          <p:cNvPr id="7" name="Text 4"/>
+          <p:cNvSpPr txBox="1"/>
+          <p:nvPr/>
+        </p:nvSpPr>
+        <p:spPr>
+          <a:xfrm>
+            <a:off x="8055864" y="1371600"/>
+            <a:ext cx="1549908" cy="914400"/>
+          </a:xfrm>
+          <a:prstGeom prst="rect">
+            <a:avLst/>
+          </a:prstGeom>
+          <a:noFill/>
+          <a:ln/>
+        </p:spPr>
+        <p:txBody>
+          <a:bodyPr wrap="square" lIns="0" tIns="0" rIns="0" bIns="0" rtlCol="0" anchor="ctr"/>
+          <a:lstStyle/>
+          <a:p>
+            <a:pPr algn="ctr" indent="0" marL="0">
+              <a:buNone/>
+            </a:pPr>
+            <a:r>
+              <a:rPr lang="en-US" sz="1800" b="1" dirty="0">
+                <a:solidFill>
+                  <a:schemeClr val="bg1"/>
+                </a:solidFill>
+              </a:rPr>
+              <a:t>Val · 15 %</a:t>
+            </a:r>
+            <a:endParaRPr lang="en-US" sz="1400" dirty="0"/>
+          </a:p>
+          <a:p>
+            <a:pPr algn="ctr" indent="0" marL="0">
+              <a:buNone/>
+            </a:pPr>
+            <a:r>
+              <a:rPr lang="en-US" sz="1400" dirty="0">
+                <a:solidFill>
+                  <a:schemeClr val="bg1"/>
+                </a:solidFill>
+              </a:rPr>
+              <a:t>≈ 842</a:t>
+            </a:r>
+            <a:endParaRPr lang="en-US" sz="1400" dirty="0"/>
+          </a:p>
+        </p:txBody>
+      </p:sp>
+      <p:sp>
+        <p:nvSpPr>
+          <p:cNvPr id="8" name="Shape 5"/>
+          <p:cNvSpPr/>
+          <p:nvPr/>
+        </p:nvSpPr>
+        <p:spPr>
+          <a:xfrm>
+            <a:off x="9605772" y="1371600"/>
+            <a:ext cx="1549908" cy="914400"/>
+          </a:xfrm>
+          <a:prstGeom prst="rect">
+            <a:avLst/>
+          </a:prstGeom>
+          <a:solidFill>
+            <a:schemeClr val="accent4"/>
+          </a:solidFill>
+          <a:ln w="25400">
+            <a:solidFill>
+              <a:schemeClr val="bg1"/>
+            </a:solidFill>
+            <a:prstDash val="solid"/>
+          </a:ln>
+        </p:spPr>
+      </p:sp>
+      <p:sp>
+        <p:nvSpPr>
+          <p:cNvPr id="9" name="Text 6"/>
+          <p:cNvSpPr txBox="1"/>
+          <p:nvPr/>
+        </p:nvSpPr>
+        <p:spPr>
+          <a:xfrm>
+            <a:off x="9605772" y="1371600"/>
+            <a:ext cx="1549908" cy="914400"/>
+          </a:xfrm>
+          <a:prstGeom prst="rect">
+            <a:avLst/>
+          </a:prstGeom>
+          <a:noFill/>
+          <a:ln/>
+        </p:spPr>
+        <p:txBody>
+          <a:bodyPr wrap="square" lIns="0" tIns="0" rIns="0" bIns="0" rtlCol="0" anchor="ctr"/>
+          <a:lstStyle/>
+          <a:p>
+            <a:pPr algn="ctr" indent="0" marL="0">
+              <a:buNone/>
+            </a:pPr>
+            <a:r>
+              <a:rPr lang="en-US" sz="1800" b="1" dirty="0">
+                <a:solidFill>
+                  <a:schemeClr val="bg1"/>
+                </a:solidFill>
+              </a:rPr>
+              <a:t>Test · 15 %</a:t>
+            </a:r>
+            <a:endParaRPr lang="en-US" sz="1400" dirty="0"/>
+          </a:p>
+          <a:p>
+            <a:pPr algn="ctr" indent="0" marL="0">
+              <a:buNone/>
+            </a:pPr>
+            <a:r>
+              <a:rPr lang="en-US" sz="1400" dirty="0">
+                <a:solidFill>
+                  <a:schemeClr val="bg1"/>
+                </a:solidFill>
+              </a:rPr>
+              <a:t>841 (real)</a:t>
+            </a:r>
+            <a:endParaRPr lang="en-US" sz="1400" dirty="0"/>
+          </a:p>
+        </p:txBody>
+      </p:sp>
+      <p:sp>
+        <p:nvSpPr>
+          <p:cNvPr id="10" name="Text 7"/>
+          <p:cNvSpPr txBox="1"/>
+          <p:nvPr/>
+        </p:nvSpPr>
+        <p:spPr>
+          <a:xfrm>
+            <a:off x="822960" y="2377440"/>
+            <a:ext cx="10332720" cy="320040"/>
+          </a:xfrm>
+          <a:prstGeom prst="rect">
+            <a:avLst/>
+          </a:prstGeom>
+          <a:noFill/>
+          <a:ln/>
+        </p:spPr>
+        <p:txBody>
+          <a:bodyPr wrap="square" lIns="0" tIns="0" rIns="0" bIns="0" rtlCol="0" anchor="t"/>
+          <a:lstStyle/>
+          <a:p>
+            <a:pPr indent="0" marL="0">
+              <a:buNone/>
+            </a:pPr>
+            <a:r>
+              <a:rPr lang="en-US" sz="1300" dirty="0">
+                <a:solidFill>
+                  <a:schemeClr val="tx2"/>
+                </a:solidFill>
+              </a:rPr>
+              <a:t>5 613 imágenes de 3 datasets de Roboflow Universe · semilla 42 · el test real es de 841 porque la división por secuencia no es exacta</a:t>
+            </a:r>
+            <a:endParaRPr lang="en-US" sz="1300" dirty="0"/>
+          </a:p>
+        </p:txBody>
+      </p:sp>
+      <p:graphicFrame>
+        <p:nvGraphicFramePr>
+          <p:cNvPr id="11" name="Chart 0" descr=""/>
+          <p:cNvGraphicFramePr/>
+          <p:nvPr/>
+        </p:nvGraphicFramePr>
+        <p:xfrm>
+          <a:off x="731520" y="2834640"/>
+          <a:ext cx="5852160" cy="3291840"/>
+        </p:xfrm>
+        <a:graphic xmlns:a="http://schemas.openxmlformats.org/drawingml/2006/main">
+          <a:graphicData uri="http://schemas.openxmlformats.org/drawingml/2006/chart">
+            <c:chart xmlns:c="http://schemas.openxmlformats.org/drawingml/2006/chart" r:id="rId1"/>
+          </a:graphicData>
+        </a:graphic>
+      </p:graphicFrame>
+      <p:sp>
+        <p:nvSpPr>
+          <p:cNvPr id="12" name="Shape 8"/>
+          <p:cNvSpPr/>
+          <p:nvPr/>
+        </p:nvSpPr>
+        <p:spPr>
+          <a:xfrm>
+            <a:off x="6858000" y="2880360"/>
+            <a:ext cx="4297680" cy="3200400"/>
           </a:xfrm>
           <a:prstGeom prst="roundRect">
             <a:avLst>
-              <a:gd name="adj" fmla="val 5854"/>
+              <a:gd name="adj" fmla="val 3429"/>
             </a:avLst>
           </a:prstGeom>
           <a:solidFill>
@@ -5609,39 +5792,50 @@
       </p:sp>
       <p:sp>
         <p:nvSpPr>
-          <p:cNvPr id="5" name="Shape 2"/>
-          <p:cNvSpPr/>
-          <p:nvPr/>
-        </p:nvSpPr>
-        <p:spPr>
-          <a:xfrm>
-            <a:off x="960120" y="1508760"/>
-            <a:ext cx="457200" cy="457200"/>
-          </a:xfrm>
-          <a:prstGeom prst="ellipse">
-            <a:avLst/>
-          </a:prstGeom>
-          <a:solidFill>
-            <a:schemeClr val="accent2"/>
-          </a:solidFill>
-          <a:ln w="6350">
-            <a:solidFill>
-              <a:schemeClr val="accent2"/>
-            </a:solidFill>
-            <a:prstDash val="solid"/>
-          </a:ln>
-        </p:spPr>
-      </p:sp>
-      <p:sp>
-        <p:nvSpPr>
-          <p:cNvPr id="6" name="Text 3"/>
+          <p:cNvPr id="13" name="Text 9"/>
           <p:cNvSpPr txBox="1"/>
           <p:nvPr/>
         </p:nvSpPr>
         <p:spPr>
           <a:xfrm>
-            <a:off x="960120" y="1508760"/>
-            <a:ext cx="457200" cy="457200"/>
+            <a:off x="7086600" y="3017520"/>
+            <a:ext cx="3931920" cy="365760"/>
+          </a:xfrm>
+          <a:prstGeom prst="rect">
+            <a:avLst/>
+          </a:prstGeom>
+          <a:noFill/>
+          <a:ln/>
+        </p:spPr>
+        <p:txBody>
+          <a:bodyPr wrap="square" lIns="0" tIns="0" rIns="0" bIns="0" rtlCol="0" anchor="t"/>
+          <a:lstStyle/>
+          <a:p>
+            <a:pPr indent="0" marL="0">
+              <a:buNone/>
+            </a:pPr>
+            <a:r>
+              <a:rPr lang="en-US" sz="1800" b="1" dirty="0">
+                <a:solidFill>
+                  <a:schemeClr val="accent2"/>
+                </a:solidFill>
+              </a:rPr>
+              <a:t>División por secuencia de video</a:t>
+            </a:r>
+            <a:endParaRPr lang="en-US" sz="1800" dirty="0"/>
+          </a:p>
+        </p:txBody>
+      </p:sp>
+      <p:sp>
+        <p:nvSpPr>
+          <p:cNvPr id="14" name="Text 10"/>
+          <p:cNvSpPr txBox="1"/>
+          <p:nvPr/>
+        </p:nvSpPr>
+        <p:spPr>
+          <a:xfrm>
+            <a:off x="7086600" y="3520440"/>
+            <a:ext cx="822960" cy="310896"/>
           </a:xfrm>
           <a:prstGeom prst="rect">
             <a:avLst/>
@@ -5653,31 +5847,331 @@
           <a:bodyPr wrap="square" lIns="0" tIns="0" rIns="0" bIns="0" rtlCol="0" anchor="ctr"/>
           <a:lstStyle/>
           <a:p>
-            <a:pPr algn="ctr" indent="0" marL="0">
+            <a:pPr indent="0" marL="0">
               <a:buNone/>
             </a:pPr>
             <a:r>
-              <a:rPr lang="en-US" sz="1800" b="1" dirty="0">
-                <a:solidFill>
-                  <a:schemeClr val="bg1"/>
-                </a:solidFill>
-              </a:rPr>
-              <a:t>1</a:t>
-            </a:r>
-            <a:endParaRPr lang="en-US" sz="1800" dirty="0"/>
+              <a:rPr lang="en-US" sz="1200" dirty="0">
+                <a:solidFill>
+                  <a:schemeClr val="tx2"/>
+                </a:solidFill>
+              </a:rPr>
+              <a:t>Video 1</a:t>
+            </a:r>
+            <a:endParaRPr lang="en-US" sz="1200" dirty="0"/>
           </a:p>
         </p:txBody>
       </p:sp>
       <p:sp>
         <p:nvSpPr>
-          <p:cNvPr id="7" name="Text 4"/>
+          <p:cNvPr id="15" name="Shape 11"/>
+          <p:cNvSpPr/>
+          <p:nvPr/>
+        </p:nvSpPr>
+        <p:spPr>
+          <a:xfrm>
+            <a:off x="7863840" y="3538728"/>
+            <a:ext cx="201168" cy="274320"/>
+          </a:xfrm>
+          <a:prstGeom prst="rect">
+            <a:avLst/>
+          </a:prstGeom>
+          <a:solidFill>
+            <a:schemeClr val="accent1"/>
+          </a:solidFill>
+          <a:ln w="6350">
+            <a:solidFill>
+              <a:schemeClr val="accent1"/>
+            </a:solidFill>
+            <a:prstDash val="solid"/>
+          </a:ln>
+        </p:spPr>
+      </p:sp>
+      <p:sp>
+        <p:nvSpPr>
+          <p:cNvPr id="16" name="Shape 12"/>
+          <p:cNvSpPr/>
+          <p:nvPr/>
+        </p:nvSpPr>
+        <p:spPr>
+          <a:xfrm>
+            <a:off x="8119872" y="3538728"/>
+            <a:ext cx="201168" cy="274320"/>
+          </a:xfrm>
+          <a:prstGeom prst="rect">
+            <a:avLst/>
+          </a:prstGeom>
+          <a:solidFill>
+            <a:schemeClr val="accent1"/>
+          </a:solidFill>
+          <a:ln w="6350">
+            <a:solidFill>
+              <a:schemeClr val="accent1"/>
+            </a:solidFill>
+            <a:prstDash val="solid"/>
+          </a:ln>
+        </p:spPr>
+      </p:sp>
+      <p:sp>
+        <p:nvSpPr>
+          <p:cNvPr id="17" name="Shape 13"/>
+          <p:cNvSpPr/>
+          <p:nvPr/>
+        </p:nvSpPr>
+        <p:spPr>
+          <a:xfrm>
+            <a:off x="8375904" y="3538728"/>
+            <a:ext cx="201168" cy="274320"/>
+          </a:xfrm>
+          <a:prstGeom prst="rect">
+            <a:avLst/>
+          </a:prstGeom>
+          <a:solidFill>
+            <a:schemeClr val="accent1"/>
+          </a:solidFill>
+          <a:ln w="6350">
+            <a:solidFill>
+              <a:schemeClr val="accent1"/>
+            </a:solidFill>
+            <a:prstDash val="solid"/>
+          </a:ln>
+        </p:spPr>
+      </p:sp>
+      <p:sp>
+        <p:nvSpPr>
+          <p:cNvPr id="18" name="Shape 14"/>
+          <p:cNvSpPr/>
+          <p:nvPr/>
+        </p:nvSpPr>
+        <p:spPr>
+          <a:xfrm>
+            <a:off x="8631936" y="3538728"/>
+            <a:ext cx="201168" cy="274320"/>
+          </a:xfrm>
+          <a:prstGeom prst="rect">
+            <a:avLst/>
+          </a:prstGeom>
+          <a:solidFill>
+            <a:schemeClr val="accent1"/>
+          </a:solidFill>
+          <a:ln w="6350">
+            <a:solidFill>
+              <a:schemeClr val="accent1"/>
+            </a:solidFill>
+            <a:prstDash val="solid"/>
+          </a:ln>
+        </p:spPr>
+      </p:sp>
+      <p:sp>
+        <p:nvSpPr>
+          <p:cNvPr id="19" name="Shape 15"/>
+          <p:cNvSpPr/>
+          <p:nvPr/>
+        </p:nvSpPr>
+        <p:spPr>
+          <a:xfrm>
+            <a:off x="8887968" y="3538728"/>
+            <a:ext cx="201168" cy="274320"/>
+          </a:xfrm>
+          <a:prstGeom prst="rect">
+            <a:avLst/>
+          </a:prstGeom>
+          <a:solidFill>
+            <a:schemeClr val="accent1"/>
+          </a:solidFill>
+          <a:ln w="6350">
+            <a:solidFill>
+              <a:schemeClr val="accent1"/>
+            </a:solidFill>
+            <a:prstDash val="solid"/>
+          </a:ln>
+        </p:spPr>
+      </p:sp>
+      <p:sp>
+        <p:nvSpPr>
+          <p:cNvPr id="20" name="Shape 16"/>
+          <p:cNvSpPr/>
+          <p:nvPr/>
+        </p:nvSpPr>
+        <p:spPr>
+          <a:xfrm>
+            <a:off x="9144000" y="3538728"/>
+            <a:ext cx="201168" cy="274320"/>
+          </a:xfrm>
+          <a:prstGeom prst="rect">
+            <a:avLst/>
+          </a:prstGeom>
+          <a:solidFill>
+            <a:schemeClr val="accent1"/>
+          </a:solidFill>
+          <a:ln w="6350">
+            <a:solidFill>
+              <a:schemeClr val="accent1"/>
+            </a:solidFill>
+            <a:prstDash val="solid"/>
+          </a:ln>
+        </p:spPr>
+      </p:sp>
+      <p:sp>
+        <p:nvSpPr>
+          <p:cNvPr id="21" name="Shape 17"/>
+          <p:cNvSpPr/>
+          <p:nvPr/>
+        </p:nvSpPr>
+        <p:spPr>
+          <a:xfrm>
+            <a:off x="9400032" y="3538728"/>
+            <a:ext cx="201168" cy="274320"/>
+          </a:xfrm>
+          <a:prstGeom prst="rect">
+            <a:avLst/>
+          </a:prstGeom>
+          <a:solidFill>
+            <a:schemeClr val="accent1"/>
+          </a:solidFill>
+          <a:ln w="6350">
+            <a:solidFill>
+              <a:schemeClr val="accent1"/>
+            </a:solidFill>
+            <a:prstDash val="solid"/>
+          </a:ln>
+        </p:spPr>
+      </p:sp>
+      <p:sp>
+        <p:nvSpPr>
+          <p:cNvPr id="22" name="Shape 18"/>
+          <p:cNvSpPr/>
+          <p:nvPr/>
+        </p:nvSpPr>
+        <p:spPr>
+          <a:xfrm>
+            <a:off x="9656064" y="3538728"/>
+            <a:ext cx="201168" cy="274320"/>
+          </a:xfrm>
+          <a:prstGeom prst="rect">
+            <a:avLst/>
+          </a:prstGeom>
+          <a:solidFill>
+            <a:schemeClr val="accent1"/>
+          </a:solidFill>
+          <a:ln w="6350">
+            <a:solidFill>
+              <a:schemeClr val="accent1"/>
+            </a:solidFill>
+            <a:prstDash val="solid"/>
+          </a:ln>
+        </p:spPr>
+      </p:sp>
+      <p:sp>
+        <p:nvSpPr>
+          <p:cNvPr id="23" name="Shape 19"/>
+          <p:cNvSpPr/>
+          <p:nvPr/>
+        </p:nvSpPr>
+        <p:spPr>
+          <a:xfrm>
+            <a:off x="9912096" y="3538728"/>
+            <a:ext cx="201168" cy="274320"/>
+          </a:xfrm>
+          <a:prstGeom prst="rect">
+            <a:avLst/>
+          </a:prstGeom>
+          <a:solidFill>
+            <a:schemeClr val="accent1"/>
+          </a:solidFill>
+          <a:ln w="6350">
+            <a:solidFill>
+              <a:schemeClr val="accent1"/>
+            </a:solidFill>
+            <a:prstDash val="solid"/>
+          </a:ln>
+        </p:spPr>
+      </p:sp>
+      <p:sp>
+        <p:nvSpPr>
+          <p:cNvPr id="24" name="Shape 20"/>
+          <p:cNvSpPr/>
+          <p:nvPr/>
+        </p:nvSpPr>
+        <p:spPr>
+          <a:xfrm>
+            <a:off x="10168128" y="3538728"/>
+            <a:ext cx="201168" cy="274320"/>
+          </a:xfrm>
+          <a:prstGeom prst="rect">
+            <a:avLst/>
+          </a:prstGeom>
+          <a:solidFill>
+            <a:schemeClr val="accent1"/>
+          </a:solidFill>
+          <a:ln w="6350">
+            <a:solidFill>
+              <a:schemeClr val="accent1"/>
+            </a:solidFill>
+            <a:prstDash val="solid"/>
+          </a:ln>
+        </p:spPr>
+      </p:sp>
+      <p:sp>
+        <p:nvSpPr>
+          <p:cNvPr id="25" name="Shape 21"/>
+          <p:cNvSpPr/>
+          <p:nvPr/>
+        </p:nvSpPr>
+        <p:spPr>
+          <a:xfrm>
+            <a:off x="10424160" y="3538728"/>
+            <a:ext cx="201168" cy="274320"/>
+          </a:xfrm>
+          <a:prstGeom prst="rect">
+            <a:avLst/>
+          </a:prstGeom>
+          <a:solidFill>
+            <a:schemeClr val="accent1"/>
+          </a:solidFill>
+          <a:ln w="6350">
+            <a:solidFill>
+              <a:schemeClr val="accent1"/>
+            </a:solidFill>
+            <a:prstDash val="solid"/>
+          </a:ln>
+        </p:spPr>
+      </p:sp>
+      <p:sp>
+        <p:nvSpPr>
+          <p:cNvPr id="26" name="Shape 22"/>
+          <p:cNvSpPr/>
+          <p:nvPr/>
+        </p:nvSpPr>
+        <p:spPr>
+          <a:xfrm>
+            <a:off x="10680192" y="3538728"/>
+            <a:ext cx="201168" cy="274320"/>
+          </a:xfrm>
+          <a:prstGeom prst="rect">
+            <a:avLst/>
+          </a:prstGeom>
+          <a:solidFill>
+            <a:schemeClr val="accent1"/>
+          </a:solidFill>
+          <a:ln w="6350">
+            <a:solidFill>
+              <a:schemeClr val="accent1"/>
+            </a:solidFill>
+            <a:prstDash val="solid"/>
+          </a:ln>
+        </p:spPr>
+      </p:sp>
+      <p:sp>
+        <p:nvSpPr>
+          <p:cNvPr id="27" name="Text 23"/>
           <p:cNvSpPr txBox="1"/>
           <p:nvPr/>
         </p:nvSpPr>
         <p:spPr>
           <a:xfrm>
-            <a:off x="1508760" y="1508760"/>
-            <a:ext cx="1097280" cy="457200"/>
+            <a:off x="7086600" y="3931920"/>
+            <a:ext cx="822960" cy="310896"/>
           </a:xfrm>
           <a:prstGeom prst="rect">
             <a:avLst/>
@@ -5693,27 +6187,327 @@
               <a:buNone/>
             </a:pPr>
             <a:r>
-              <a:rPr lang="en-US" sz="1800" b="1" dirty="0">
-                <a:solidFill>
-                  <a:schemeClr val="tx1"/>
-                </a:solidFill>
-              </a:rPr>
-              <a:t>Captura</a:t>
-            </a:r>
-            <a:endParaRPr lang="en-US" sz="1800" dirty="0"/>
+              <a:rPr lang="en-US" sz="1200" dirty="0">
+                <a:solidFill>
+                  <a:schemeClr val="tx2"/>
+                </a:solidFill>
+              </a:rPr>
+              <a:t>Video 2</a:t>
+            </a:r>
+            <a:endParaRPr lang="en-US" sz="1200" dirty="0"/>
           </a:p>
         </p:txBody>
       </p:sp>
       <p:sp>
         <p:nvSpPr>
-          <p:cNvPr id="8" name="Text 5"/>
+          <p:cNvPr id="28" name="Shape 24"/>
+          <p:cNvSpPr/>
+          <p:nvPr/>
+        </p:nvSpPr>
+        <p:spPr>
+          <a:xfrm>
+            <a:off x="7863840" y="3950208"/>
+            <a:ext cx="201168" cy="274320"/>
+          </a:xfrm>
+          <a:prstGeom prst="rect">
+            <a:avLst/>
+          </a:prstGeom>
+          <a:solidFill>
+            <a:schemeClr val="accent1"/>
+          </a:solidFill>
+          <a:ln w="6350">
+            <a:solidFill>
+              <a:schemeClr val="accent1"/>
+            </a:solidFill>
+            <a:prstDash val="solid"/>
+          </a:ln>
+        </p:spPr>
+      </p:sp>
+      <p:sp>
+        <p:nvSpPr>
+          <p:cNvPr id="29" name="Shape 25"/>
+          <p:cNvSpPr/>
+          <p:nvPr/>
+        </p:nvSpPr>
+        <p:spPr>
+          <a:xfrm>
+            <a:off x="8119872" y="3950208"/>
+            <a:ext cx="201168" cy="274320"/>
+          </a:xfrm>
+          <a:prstGeom prst="rect">
+            <a:avLst/>
+          </a:prstGeom>
+          <a:solidFill>
+            <a:schemeClr val="accent1"/>
+          </a:solidFill>
+          <a:ln w="6350">
+            <a:solidFill>
+              <a:schemeClr val="accent1"/>
+            </a:solidFill>
+            <a:prstDash val="solid"/>
+          </a:ln>
+        </p:spPr>
+      </p:sp>
+      <p:sp>
+        <p:nvSpPr>
+          <p:cNvPr id="30" name="Shape 26"/>
+          <p:cNvSpPr/>
+          <p:nvPr/>
+        </p:nvSpPr>
+        <p:spPr>
+          <a:xfrm>
+            <a:off x="8375904" y="3950208"/>
+            <a:ext cx="201168" cy="274320"/>
+          </a:xfrm>
+          <a:prstGeom prst="rect">
+            <a:avLst/>
+          </a:prstGeom>
+          <a:solidFill>
+            <a:schemeClr val="accent1"/>
+          </a:solidFill>
+          <a:ln w="6350">
+            <a:solidFill>
+              <a:schemeClr val="accent1"/>
+            </a:solidFill>
+            <a:prstDash val="solid"/>
+          </a:ln>
+        </p:spPr>
+      </p:sp>
+      <p:sp>
+        <p:nvSpPr>
+          <p:cNvPr id="31" name="Shape 27"/>
+          <p:cNvSpPr/>
+          <p:nvPr/>
+        </p:nvSpPr>
+        <p:spPr>
+          <a:xfrm>
+            <a:off x="8631936" y="3950208"/>
+            <a:ext cx="201168" cy="274320"/>
+          </a:xfrm>
+          <a:prstGeom prst="rect">
+            <a:avLst/>
+          </a:prstGeom>
+          <a:solidFill>
+            <a:schemeClr val="accent1"/>
+          </a:solidFill>
+          <a:ln w="6350">
+            <a:solidFill>
+              <a:schemeClr val="accent1"/>
+            </a:solidFill>
+            <a:prstDash val="solid"/>
+          </a:ln>
+        </p:spPr>
+      </p:sp>
+      <p:sp>
+        <p:nvSpPr>
+          <p:cNvPr id="32" name="Shape 28"/>
+          <p:cNvSpPr/>
+          <p:nvPr/>
+        </p:nvSpPr>
+        <p:spPr>
+          <a:xfrm>
+            <a:off x="8887968" y="3950208"/>
+            <a:ext cx="201168" cy="274320"/>
+          </a:xfrm>
+          <a:prstGeom prst="rect">
+            <a:avLst/>
+          </a:prstGeom>
+          <a:solidFill>
+            <a:schemeClr val="accent1"/>
+          </a:solidFill>
+          <a:ln w="6350">
+            <a:solidFill>
+              <a:schemeClr val="accent1"/>
+            </a:solidFill>
+            <a:prstDash val="solid"/>
+          </a:ln>
+        </p:spPr>
+      </p:sp>
+      <p:sp>
+        <p:nvSpPr>
+          <p:cNvPr id="33" name="Shape 29"/>
+          <p:cNvSpPr/>
+          <p:nvPr/>
+        </p:nvSpPr>
+        <p:spPr>
+          <a:xfrm>
+            <a:off x="9144000" y="3950208"/>
+            <a:ext cx="201168" cy="274320"/>
+          </a:xfrm>
+          <a:prstGeom prst="rect">
+            <a:avLst/>
+          </a:prstGeom>
+          <a:solidFill>
+            <a:schemeClr val="accent1"/>
+          </a:solidFill>
+          <a:ln w="6350">
+            <a:solidFill>
+              <a:schemeClr val="accent1"/>
+            </a:solidFill>
+            <a:prstDash val="solid"/>
+          </a:ln>
+        </p:spPr>
+      </p:sp>
+      <p:sp>
+        <p:nvSpPr>
+          <p:cNvPr id="34" name="Shape 30"/>
+          <p:cNvSpPr/>
+          <p:nvPr/>
+        </p:nvSpPr>
+        <p:spPr>
+          <a:xfrm>
+            <a:off x="9400032" y="3950208"/>
+            <a:ext cx="201168" cy="274320"/>
+          </a:xfrm>
+          <a:prstGeom prst="rect">
+            <a:avLst/>
+          </a:prstGeom>
+          <a:solidFill>
+            <a:schemeClr val="accent1"/>
+          </a:solidFill>
+          <a:ln w="6350">
+            <a:solidFill>
+              <a:schemeClr val="accent1"/>
+            </a:solidFill>
+            <a:prstDash val="solid"/>
+          </a:ln>
+        </p:spPr>
+      </p:sp>
+      <p:sp>
+        <p:nvSpPr>
+          <p:cNvPr id="35" name="Shape 31"/>
+          <p:cNvSpPr/>
+          <p:nvPr/>
+        </p:nvSpPr>
+        <p:spPr>
+          <a:xfrm>
+            <a:off x="9656064" y="3950208"/>
+            <a:ext cx="201168" cy="274320"/>
+          </a:xfrm>
+          <a:prstGeom prst="rect">
+            <a:avLst/>
+          </a:prstGeom>
+          <a:solidFill>
+            <a:schemeClr val="accent1"/>
+          </a:solidFill>
+          <a:ln w="6350">
+            <a:solidFill>
+              <a:schemeClr val="accent1"/>
+            </a:solidFill>
+            <a:prstDash val="solid"/>
+          </a:ln>
+        </p:spPr>
+      </p:sp>
+      <p:sp>
+        <p:nvSpPr>
+          <p:cNvPr id="36" name="Shape 32"/>
+          <p:cNvSpPr/>
+          <p:nvPr/>
+        </p:nvSpPr>
+        <p:spPr>
+          <a:xfrm>
+            <a:off x="9912096" y="3950208"/>
+            <a:ext cx="201168" cy="274320"/>
+          </a:xfrm>
+          <a:prstGeom prst="rect">
+            <a:avLst/>
+          </a:prstGeom>
+          <a:solidFill>
+            <a:schemeClr val="accent1"/>
+          </a:solidFill>
+          <a:ln w="6350">
+            <a:solidFill>
+              <a:schemeClr val="accent1"/>
+            </a:solidFill>
+            <a:prstDash val="solid"/>
+          </a:ln>
+        </p:spPr>
+      </p:sp>
+      <p:sp>
+        <p:nvSpPr>
+          <p:cNvPr id="37" name="Shape 33"/>
+          <p:cNvSpPr/>
+          <p:nvPr/>
+        </p:nvSpPr>
+        <p:spPr>
+          <a:xfrm>
+            <a:off x="10168128" y="3950208"/>
+            <a:ext cx="201168" cy="274320"/>
+          </a:xfrm>
+          <a:prstGeom prst="rect">
+            <a:avLst/>
+          </a:prstGeom>
+          <a:solidFill>
+            <a:schemeClr val="accent1"/>
+          </a:solidFill>
+          <a:ln w="6350">
+            <a:solidFill>
+              <a:schemeClr val="accent1"/>
+            </a:solidFill>
+            <a:prstDash val="solid"/>
+          </a:ln>
+        </p:spPr>
+      </p:sp>
+      <p:sp>
+        <p:nvSpPr>
+          <p:cNvPr id="38" name="Shape 34"/>
+          <p:cNvSpPr/>
+          <p:nvPr/>
+        </p:nvSpPr>
+        <p:spPr>
+          <a:xfrm>
+            <a:off x="10424160" y="3950208"/>
+            <a:ext cx="201168" cy="274320"/>
+          </a:xfrm>
+          <a:prstGeom prst="rect">
+            <a:avLst/>
+          </a:prstGeom>
+          <a:solidFill>
+            <a:schemeClr val="accent1"/>
+          </a:solidFill>
+          <a:ln w="6350">
+            <a:solidFill>
+              <a:schemeClr val="accent1"/>
+            </a:solidFill>
+            <a:prstDash val="solid"/>
+          </a:ln>
+        </p:spPr>
+      </p:sp>
+      <p:sp>
+        <p:nvSpPr>
+          <p:cNvPr id="39" name="Shape 35"/>
+          <p:cNvSpPr/>
+          <p:nvPr/>
+        </p:nvSpPr>
+        <p:spPr>
+          <a:xfrm>
+            <a:off x="10680192" y="3950208"/>
+            <a:ext cx="201168" cy="274320"/>
+          </a:xfrm>
+          <a:prstGeom prst="rect">
+            <a:avLst/>
+          </a:prstGeom>
+          <a:solidFill>
+            <a:schemeClr val="accent1"/>
+          </a:solidFill>
+          <a:ln w="6350">
+            <a:solidFill>
+              <a:schemeClr val="accent1"/>
+            </a:solidFill>
+            <a:prstDash val="solid"/>
+          </a:ln>
+        </p:spPr>
+      </p:sp>
+      <p:sp>
+        <p:nvSpPr>
+          <p:cNvPr id="40" name="Text 36"/>
           <p:cNvSpPr txBox="1"/>
           <p:nvPr/>
         </p:nvSpPr>
         <p:spPr>
           <a:xfrm>
-            <a:off x="914400" y="2194560"/>
-            <a:ext cx="1691640" cy="731520"/>
+            <a:off x="7086600" y="4343400"/>
+            <a:ext cx="822960" cy="310896"/>
           </a:xfrm>
           <a:prstGeom prst="rect">
             <a:avLst/>
@@ -5725,31 +6519,331 @@
           <a:bodyPr wrap="square" lIns="0" tIns="0" rIns="0" bIns="0" rtlCol="0" anchor="ctr"/>
           <a:lstStyle/>
           <a:p>
-            <a:pPr algn="ctr" indent="0" marL="0">
+            <a:pPr indent="0" marL="0">
               <a:buNone/>
             </a:pPr>
             <a:r>
-              <a:rPr lang="en-US" sz="2400" b="1" dirty="0">
-                <a:solidFill>
-                  <a:schemeClr val="accent2"/>
-                </a:solidFill>
-              </a:rPr>
-              <a:t>1280 × 720</a:t>
-            </a:r>
-            <a:endParaRPr lang="en-US" sz="2400" dirty="0"/>
+              <a:rPr lang="en-US" sz="1200" dirty="0">
+                <a:solidFill>
+                  <a:schemeClr val="tx2"/>
+                </a:solidFill>
+              </a:rPr>
+              <a:t>Video 3</a:t>
+            </a:r>
+            <a:endParaRPr lang="en-US" sz="1200" dirty="0"/>
           </a:p>
         </p:txBody>
       </p:sp>
       <p:sp>
         <p:nvSpPr>
-          <p:cNvPr id="9" name="Text 6"/>
+          <p:cNvPr id="41" name="Shape 37"/>
+          <p:cNvSpPr/>
+          <p:nvPr/>
+        </p:nvSpPr>
+        <p:spPr>
+          <a:xfrm>
+            <a:off x="7863840" y="4361688"/>
+            <a:ext cx="201168" cy="274320"/>
+          </a:xfrm>
+          <a:prstGeom prst="rect">
+            <a:avLst/>
+          </a:prstGeom>
+          <a:solidFill>
+            <a:schemeClr val="accent3"/>
+          </a:solidFill>
+          <a:ln w="6350">
+            <a:solidFill>
+              <a:schemeClr val="accent3"/>
+            </a:solidFill>
+            <a:prstDash val="solid"/>
+          </a:ln>
+        </p:spPr>
+      </p:sp>
+      <p:sp>
+        <p:nvSpPr>
+          <p:cNvPr id="42" name="Shape 38"/>
+          <p:cNvSpPr/>
+          <p:nvPr/>
+        </p:nvSpPr>
+        <p:spPr>
+          <a:xfrm>
+            <a:off x="8119872" y="4361688"/>
+            <a:ext cx="201168" cy="274320"/>
+          </a:xfrm>
+          <a:prstGeom prst="rect">
+            <a:avLst/>
+          </a:prstGeom>
+          <a:solidFill>
+            <a:schemeClr val="accent3"/>
+          </a:solidFill>
+          <a:ln w="6350">
+            <a:solidFill>
+              <a:schemeClr val="accent3"/>
+            </a:solidFill>
+            <a:prstDash val="solid"/>
+          </a:ln>
+        </p:spPr>
+      </p:sp>
+      <p:sp>
+        <p:nvSpPr>
+          <p:cNvPr id="43" name="Shape 39"/>
+          <p:cNvSpPr/>
+          <p:nvPr/>
+        </p:nvSpPr>
+        <p:spPr>
+          <a:xfrm>
+            <a:off x="8375904" y="4361688"/>
+            <a:ext cx="201168" cy="274320"/>
+          </a:xfrm>
+          <a:prstGeom prst="rect">
+            <a:avLst/>
+          </a:prstGeom>
+          <a:solidFill>
+            <a:schemeClr val="accent3"/>
+          </a:solidFill>
+          <a:ln w="6350">
+            <a:solidFill>
+              <a:schemeClr val="accent3"/>
+            </a:solidFill>
+            <a:prstDash val="solid"/>
+          </a:ln>
+        </p:spPr>
+      </p:sp>
+      <p:sp>
+        <p:nvSpPr>
+          <p:cNvPr id="44" name="Shape 40"/>
+          <p:cNvSpPr/>
+          <p:nvPr/>
+        </p:nvSpPr>
+        <p:spPr>
+          <a:xfrm>
+            <a:off x="8631936" y="4361688"/>
+            <a:ext cx="201168" cy="274320"/>
+          </a:xfrm>
+          <a:prstGeom prst="rect">
+            <a:avLst/>
+          </a:prstGeom>
+          <a:solidFill>
+            <a:schemeClr val="accent3"/>
+          </a:solidFill>
+          <a:ln w="6350">
+            <a:solidFill>
+              <a:schemeClr val="accent3"/>
+            </a:solidFill>
+            <a:prstDash val="solid"/>
+          </a:ln>
+        </p:spPr>
+      </p:sp>
+      <p:sp>
+        <p:nvSpPr>
+          <p:cNvPr id="45" name="Shape 41"/>
+          <p:cNvSpPr/>
+          <p:nvPr/>
+        </p:nvSpPr>
+        <p:spPr>
+          <a:xfrm>
+            <a:off x="8887968" y="4361688"/>
+            <a:ext cx="201168" cy="274320"/>
+          </a:xfrm>
+          <a:prstGeom prst="rect">
+            <a:avLst/>
+          </a:prstGeom>
+          <a:solidFill>
+            <a:schemeClr val="accent3"/>
+          </a:solidFill>
+          <a:ln w="6350">
+            <a:solidFill>
+              <a:schemeClr val="accent3"/>
+            </a:solidFill>
+            <a:prstDash val="solid"/>
+          </a:ln>
+        </p:spPr>
+      </p:sp>
+      <p:sp>
+        <p:nvSpPr>
+          <p:cNvPr id="46" name="Shape 42"/>
+          <p:cNvSpPr/>
+          <p:nvPr/>
+        </p:nvSpPr>
+        <p:spPr>
+          <a:xfrm>
+            <a:off x="9144000" y="4361688"/>
+            <a:ext cx="201168" cy="274320"/>
+          </a:xfrm>
+          <a:prstGeom prst="rect">
+            <a:avLst/>
+          </a:prstGeom>
+          <a:solidFill>
+            <a:schemeClr val="accent3"/>
+          </a:solidFill>
+          <a:ln w="6350">
+            <a:solidFill>
+              <a:schemeClr val="accent3"/>
+            </a:solidFill>
+            <a:prstDash val="solid"/>
+          </a:ln>
+        </p:spPr>
+      </p:sp>
+      <p:sp>
+        <p:nvSpPr>
+          <p:cNvPr id="47" name="Shape 43"/>
+          <p:cNvSpPr/>
+          <p:nvPr/>
+        </p:nvSpPr>
+        <p:spPr>
+          <a:xfrm>
+            <a:off x="9400032" y="4361688"/>
+            <a:ext cx="201168" cy="274320"/>
+          </a:xfrm>
+          <a:prstGeom prst="rect">
+            <a:avLst/>
+          </a:prstGeom>
+          <a:solidFill>
+            <a:schemeClr val="accent3"/>
+          </a:solidFill>
+          <a:ln w="6350">
+            <a:solidFill>
+              <a:schemeClr val="accent3"/>
+            </a:solidFill>
+            <a:prstDash val="solid"/>
+          </a:ln>
+        </p:spPr>
+      </p:sp>
+      <p:sp>
+        <p:nvSpPr>
+          <p:cNvPr id="48" name="Shape 44"/>
+          <p:cNvSpPr/>
+          <p:nvPr/>
+        </p:nvSpPr>
+        <p:spPr>
+          <a:xfrm>
+            <a:off x="9656064" y="4361688"/>
+            <a:ext cx="201168" cy="274320"/>
+          </a:xfrm>
+          <a:prstGeom prst="rect">
+            <a:avLst/>
+          </a:prstGeom>
+          <a:solidFill>
+            <a:schemeClr val="accent3"/>
+          </a:solidFill>
+          <a:ln w="6350">
+            <a:solidFill>
+              <a:schemeClr val="accent3"/>
+            </a:solidFill>
+            <a:prstDash val="solid"/>
+          </a:ln>
+        </p:spPr>
+      </p:sp>
+      <p:sp>
+        <p:nvSpPr>
+          <p:cNvPr id="49" name="Shape 45"/>
+          <p:cNvSpPr/>
+          <p:nvPr/>
+        </p:nvSpPr>
+        <p:spPr>
+          <a:xfrm>
+            <a:off x="9912096" y="4361688"/>
+            <a:ext cx="201168" cy="274320"/>
+          </a:xfrm>
+          <a:prstGeom prst="rect">
+            <a:avLst/>
+          </a:prstGeom>
+          <a:solidFill>
+            <a:schemeClr val="accent3"/>
+          </a:solidFill>
+          <a:ln w="6350">
+            <a:solidFill>
+              <a:schemeClr val="accent3"/>
+            </a:solidFill>
+            <a:prstDash val="solid"/>
+          </a:ln>
+        </p:spPr>
+      </p:sp>
+      <p:sp>
+        <p:nvSpPr>
+          <p:cNvPr id="50" name="Shape 46"/>
+          <p:cNvSpPr/>
+          <p:nvPr/>
+        </p:nvSpPr>
+        <p:spPr>
+          <a:xfrm>
+            <a:off x="10168128" y="4361688"/>
+            <a:ext cx="201168" cy="274320"/>
+          </a:xfrm>
+          <a:prstGeom prst="rect">
+            <a:avLst/>
+          </a:prstGeom>
+          <a:solidFill>
+            <a:schemeClr val="accent3"/>
+          </a:solidFill>
+          <a:ln w="6350">
+            <a:solidFill>
+              <a:schemeClr val="accent3"/>
+            </a:solidFill>
+            <a:prstDash val="solid"/>
+          </a:ln>
+        </p:spPr>
+      </p:sp>
+      <p:sp>
+        <p:nvSpPr>
+          <p:cNvPr id="51" name="Shape 47"/>
+          <p:cNvSpPr/>
+          <p:nvPr/>
+        </p:nvSpPr>
+        <p:spPr>
+          <a:xfrm>
+            <a:off x="10424160" y="4361688"/>
+            <a:ext cx="201168" cy="274320"/>
+          </a:xfrm>
+          <a:prstGeom prst="rect">
+            <a:avLst/>
+          </a:prstGeom>
+          <a:solidFill>
+            <a:schemeClr val="accent3"/>
+          </a:solidFill>
+          <a:ln w="6350">
+            <a:solidFill>
+              <a:schemeClr val="accent3"/>
+            </a:solidFill>
+            <a:prstDash val="solid"/>
+          </a:ln>
+        </p:spPr>
+      </p:sp>
+      <p:sp>
+        <p:nvSpPr>
+          <p:cNvPr id="52" name="Shape 48"/>
+          <p:cNvSpPr/>
+          <p:nvPr/>
+        </p:nvSpPr>
+        <p:spPr>
+          <a:xfrm>
+            <a:off x="10680192" y="4361688"/>
+            <a:ext cx="201168" cy="274320"/>
+          </a:xfrm>
+          <a:prstGeom prst="rect">
+            <a:avLst/>
+          </a:prstGeom>
+          <a:solidFill>
+            <a:schemeClr val="accent3"/>
+          </a:solidFill>
+          <a:ln w="6350">
+            <a:solidFill>
+              <a:schemeClr val="accent3"/>
+            </a:solidFill>
+            <a:prstDash val="solid"/>
+          </a:ln>
+        </p:spPr>
+      </p:sp>
+      <p:sp>
+        <p:nvSpPr>
+          <p:cNvPr id="53" name="Text 49"/>
           <p:cNvSpPr txBox="1"/>
           <p:nvPr/>
         </p:nvSpPr>
         <p:spPr>
           <a:xfrm>
-            <a:off x="960120" y="3017520"/>
-            <a:ext cx="1600200" cy="822960"/>
+            <a:off x="7086600" y="4846320"/>
+            <a:ext cx="3931920" cy="1143000"/>
           </a:xfrm>
           <a:prstGeom prst="rect">
             <a:avLst/>
@@ -5761,1175 +6855,18 @@
           <a:bodyPr wrap="square" lIns="0" tIns="0" rIns="0" bIns="0" rtlCol="0" anchor="t"/>
           <a:lstStyle/>
           <a:p>
-            <a:pPr algn="ctr" indent="0" marL="0">
-              <a:buNone/>
-            </a:pPr>
-            <a:r>
-              <a:rPr lang="en-US" sz="1500" dirty="0">
-                <a:solidFill>
-                  <a:schemeClr val="tx2"/>
-                </a:solidFill>
-              </a:rPr>
-              <a:t>enteros 0 a 255, 3 canales</a:t>
-            </a:r>
-            <a:endParaRPr lang="en-US" sz="1500" dirty="0"/>
-          </a:p>
-        </p:txBody>
-      </p:sp>
-      <p:sp>
-        <p:nvSpPr>
-          <p:cNvPr id="10" name="Shape 7"/>
-          <p:cNvSpPr/>
-          <p:nvPr/>
-        </p:nvSpPr>
-        <p:spPr>
-          <a:xfrm>
-            <a:off x="2724912" y="2560320"/>
-            <a:ext cx="182880" cy="0"/>
-          </a:xfrm>
-          <a:prstGeom prst="line">
-            <a:avLst/>
-          </a:prstGeom>
-          <a:noFill/>
-          <a:ln w="28575">
-            <a:solidFill>
-              <a:schemeClr val="accent2"/>
-            </a:solidFill>
-            <a:prstDash val="solid"/>
-            <a:tailEnd type="triangle"/>
-          </a:ln>
-        </p:spPr>
-      </p:sp>
-      <p:sp>
-        <p:nvSpPr>
-          <p:cNvPr id="11" name="Shape 8"/>
-          <p:cNvSpPr/>
-          <p:nvPr/>
-        </p:nvSpPr>
-        <p:spPr>
-          <a:xfrm>
-            <a:off x="2935224" y="1371600"/>
-            <a:ext cx="1874520" cy="2651760"/>
-          </a:xfrm>
-          <a:prstGeom prst="roundRect">
-            <a:avLst>
-              <a:gd name="adj" fmla="val 5854"/>
-            </a:avLst>
-          </a:prstGeom>
-          <a:solidFill>
-            <a:schemeClr val="bg1"/>
-          </a:solidFill>
-          <a:ln w="15875">
-            <a:solidFill>
-              <a:schemeClr val="accent1"/>
-            </a:solidFill>
-            <a:prstDash val="solid"/>
-          </a:ln>
-          <a:effectLst>
-            <a:outerShdw sx="100000" sy="100000" kx="0" ky="0" algn="bl" rotWithShape="0" blurRad="76200" dist="25400" dir="5400000">
-              <a:srgbClr val="000000">
-                <a:alpha val="12000"/>
-              </a:srgbClr>
-            </a:outerShdw>
-          </a:effectLst>
-        </p:spPr>
-      </p:sp>
-      <p:sp>
-        <p:nvSpPr>
-          <p:cNvPr id="12" name="Shape 9"/>
-          <p:cNvSpPr/>
-          <p:nvPr/>
-        </p:nvSpPr>
-        <p:spPr>
-          <a:xfrm>
-            <a:off x="3072384" y="1508760"/>
-            <a:ext cx="457200" cy="457200"/>
-          </a:xfrm>
-          <a:prstGeom prst="ellipse">
-            <a:avLst/>
-          </a:prstGeom>
-          <a:solidFill>
-            <a:schemeClr val="accent2"/>
-          </a:solidFill>
-          <a:ln w="6350">
-            <a:solidFill>
-              <a:schemeClr val="accent2"/>
-            </a:solidFill>
-            <a:prstDash val="solid"/>
-          </a:ln>
-        </p:spPr>
-      </p:sp>
-      <p:sp>
-        <p:nvSpPr>
-          <p:cNvPr id="13" name="Text 10"/>
-          <p:cNvSpPr txBox="1"/>
-          <p:nvPr/>
-        </p:nvSpPr>
-        <p:spPr>
-          <a:xfrm>
-            <a:off x="3072384" y="1508760"/>
-            <a:ext cx="457200" cy="457200"/>
-          </a:xfrm>
-          <a:prstGeom prst="rect">
-            <a:avLst/>
-          </a:prstGeom>
-          <a:noFill/>
-          <a:ln/>
-        </p:spPr>
-        <p:txBody>
-          <a:bodyPr wrap="square" lIns="0" tIns="0" rIns="0" bIns="0" rtlCol="0" anchor="ctr"/>
-          <a:lstStyle/>
-          <a:p>
-            <a:pPr algn="ctr" indent="0" marL="0">
-              <a:buNone/>
-            </a:pPr>
-            <a:r>
-              <a:rPr lang="en-US" sz="1800" b="1" dirty="0">
-                <a:solidFill>
-                  <a:schemeClr val="bg1"/>
-                </a:solidFill>
-              </a:rPr>
-              <a:t>2</a:t>
-            </a:r>
-            <a:endParaRPr lang="en-US" sz="1800" dirty="0"/>
-          </a:p>
-        </p:txBody>
-      </p:sp>
-      <p:sp>
-        <p:nvSpPr>
-          <p:cNvPr id="14" name="Text 11"/>
-          <p:cNvSpPr txBox="1"/>
-          <p:nvPr/>
-        </p:nvSpPr>
-        <p:spPr>
-          <a:xfrm>
-            <a:off x="3621024" y="1508760"/>
-            <a:ext cx="1097280" cy="457200"/>
-          </a:xfrm>
-          <a:prstGeom prst="rect">
-            <a:avLst/>
-          </a:prstGeom>
-          <a:noFill/>
-          <a:ln/>
-        </p:spPr>
-        <p:txBody>
-          <a:bodyPr wrap="square" lIns="0" tIns="0" rIns="0" bIns="0" rtlCol="0" anchor="ctr"/>
-          <a:lstStyle/>
-          <a:p>
             <a:pPr indent="0" marL="0">
               <a:buNone/>
             </a:pPr>
             <a:r>
-              <a:rPr lang="en-US" sz="1800" b="1" dirty="0">
+              <a:rPr lang="en-US" sz="1600" dirty="0">
                 <a:solidFill>
                   <a:schemeClr val="tx1"/>
                 </a:solidFill>
               </a:rPr>
-              <a:t>Letterbox</a:t>
-            </a:r>
-            <a:endParaRPr lang="en-US" sz="1800" dirty="0"/>
-          </a:p>
-        </p:txBody>
-      </p:sp>
-      <p:sp>
-        <p:nvSpPr>
-          <p:cNvPr id="15" name="Text 12"/>
-          <p:cNvSpPr txBox="1"/>
-          <p:nvPr/>
-        </p:nvSpPr>
-        <p:spPr>
-          <a:xfrm>
-            <a:off x="3026664" y="2194560"/>
-            <a:ext cx="1691640" cy="731520"/>
-          </a:xfrm>
-          <a:prstGeom prst="rect">
-            <a:avLst/>
-          </a:prstGeom>
-          <a:noFill/>
-          <a:ln/>
-        </p:spPr>
-        <p:txBody>
-          <a:bodyPr wrap="square" lIns="0" tIns="0" rIns="0" bIns="0" rtlCol="0" anchor="ctr"/>
-          <a:lstStyle/>
-          <a:p>
-            <a:pPr algn="ctr" indent="0" marL="0">
-              <a:buNone/>
-            </a:pPr>
-            <a:r>
-              <a:rPr lang="en-US" sz="2400" b="1" dirty="0">
-                <a:solidFill>
-                  <a:schemeClr val="accent2"/>
-                </a:solidFill>
-              </a:rPr>
-              <a:t>s = 0.5</a:t>
-            </a:r>
-            <a:endParaRPr lang="en-US" sz="2400" dirty="0"/>
-          </a:p>
-        </p:txBody>
-      </p:sp>
-      <p:sp>
-        <p:nvSpPr>
-          <p:cNvPr id="16" name="Text 13"/>
-          <p:cNvSpPr txBox="1"/>
-          <p:nvPr/>
-        </p:nvSpPr>
-        <p:spPr>
-          <a:xfrm>
-            <a:off x="3072384" y="3017520"/>
-            <a:ext cx="1600200" cy="822960"/>
-          </a:xfrm>
-          <a:prstGeom prst="rect">
-            <a:avLst/>
-          </a:prstGeom>
-          <a:noFill/>
-          <a:ln/>
-        </p:spPr>
-        <p:txBody>
-          <a:bodyPr wrap="square" lIns="0" tIns="0" rIns="0" bIns="0" rtlCol="0" anchor="t"/>
-          <a:lstStyle/>
-          <a:p>
-            <a:pPr algn="ctr" indent="0" marL="0">
-              <a:buNone/>
-            </a:pPr>
-            <a:r>
-              <a:rPr lang="en-US" sz="1500" dirty="0">
-                <a:solidFill>
-                  <a:schemeClr val="tx2"/>
-                </a:solidFill>
-              </a:rPr>
-              <a:t>640 × 360 sin deformar</a:t>
-            </a:r>
-            <a:endParaRPr lang="en-US" sz="1500" dirty="0"/>
-          </a:p>
-        </p:txBody>
-      </p:sp>
-      <p:sp>
-        <p:nvSpPr>
-          <p:cNvPr id="17" name="Shape 14"/>
-          <p:cNvSpPr/>
-          <p:nvPr/>
-        </p:nvSpPr>
-        <p:spPr>
-          <a:xfrm>
-            <a:off x="4837176" y="2560320"/>
-            <a:ext cx="182880" cy="0"/>
-          </a:xfrm>
-          <a:prstGeom prst="line">
-            <a:avLst/>
-          </a:prstGeom>
-          <a:noFill/>
-          <a:ln w="28575">
-            <a:solidFill>
-              <a:schemeClr val="accent2"/>
-            </a:solidFill>
-            <a:prstDash val="solid"/>
-            <a:tailEnd type="triangle"/>
-          </a:ln>
-        </p:spPr>
-      </p:sp>
-      <p:sp>
-        <p:nvSpPr>
-          <p:cNvPr id="18" name="Shape 15"/>
-          <p:cNvSpPr/>
-          <p:nvPr/>
-        </p:nvSpPr>
-        <p:spPr>
-          <a:xfrm>
-            <a:off x="5047488" y="1371600"/>
-            <a:ext cx="1874520" cy="2651760"/>
-          </a:xfrm>
-          <a:prstGeom prst="roundRect">
-            <a:avLst>
-              <a:gd name="adj" fmla="val 5854"/>
-            </a:avLst>
-          </a:prstGeom>
-          <a:solidFill>
-            <a:schemeClr val="bg1"/>
-          </a:solidFill>
-          <a:ln w="15875">
-            <a:solidFill>
-              <a:schemeClr val="accent1"/>
-            </a:solidFill>
-            <a:prstDash val="solid"/>
-          </a:ln>
-          <a:effectLst>
-            <a:outerShdw sx="100000" sy="100000" kx="0" ky="0" algn="bl" rotWithShape="0" blurRad="76200" dist="25400" dir="5400000">
-              <a:srgbClr val="000000">
-                <a:alpha val="12000"/>
-              </a:srgbClr>
-            </a:outerShdw>
-          </a:effectLst>
-        </p:spPr>
-      </p:sp>
-      <p:sp>
-        <p:nvSpPr>
-          <p:cNvPr id="19" name="Shape 16"/>
-          <p:cNvSpPr/>
-          <p:nvPr/>
-        </p:nvSpPr>
-        <p:spPr>
-          <a:xfrm>
-            <a:off x="5184648" y="1508760"/>
-            <a:ext cx="457200" cy="457200"/>
-          </a:xfrm>
-          <a:prstGeom prst="ellipse">
-            <a:avLst/>
-          </a:prstGeom>
-          <a:solidFill>
-            <a:schemeClr val="accent2"/>
-          </a:solidFill>
-          <a:ln w="6350">
-            <a:solidFill>
-              <a:schemeClr val="accent2"/>
-            </a:solidFill>
-            <a:prstDash val="solid"/>
-          </a:ln>
-        </p:spPr>
-      </p:sp>
-      <p:sp>
-        <p:nvSpPr>
-          <p:cNvPr id="20" name="Text 17"/>
-          <p:cNvSpPr txBox="1"/>
-          <p:nvPr/>
-        </p:nvSpPr>
-        <p:spPr>
-          <a:xfrm>
-            <a:off x="5184648" y="1508760"/>
-            <a:ext cx="457200" cy="457200"/>
-          </a:xfrm>
-          <a:prstGeom prst="rect">
-            <a:avLst/>
-          </a:prstGeom>
-          <a:noFill/>
-          <a:ln/>
-        </p:spPr>
-        <p:txBody>
-          <a:bodyPr wrap="square" lIns="0" tIns="0" rIns="0" bIns="0" rtlCol="0" anchor="ctr"/>
-          <a:lstStyle/>
-          <a:p>
-            <a:pPr algn="ctr" indent="0" marL="0">
-              <a:buNone/>
-            </a:pPr>
-            <a:r>
-              <a:rPr lang="en-US" sz="1800" b="1" dirty="0">
-                <a:solidFill>
-                  <a:schemeClr val="bg1"/>
-                </a:solidFill>
-              </a:rPr>
-              <a:t>3</a:t>
-            </a:r>
-            <a:endParaRPr lang="en-US" sz="1800" dirty="0"/>
-          </a:p>
-        </p:txBody>
-      </p:sp>
-      <p:sp>
-        <p:nvSpPr>
-          <p:cNvPr id="21" name="Text 18"/>
-          <p:cNvSpPr txBox="1"/>
-          <p:nvPr/>
-        </p:nvSpPr>
-        <p:spPr>
-          <a:xfrm>
-            <a:off x="5733288" y="1508760"/>
-            <a:ext cx="1097280" cy="457200"/>
-          </a:xfrm>
-          <a:prstGeom prst="rect">
-            <a:avLst/>
-          </a:prstGeom>
-          <a:noFill/>
-          <a:ln/>
-        </p:spPr>
-        <p:txBody>
-          <a:bodyPr wrap="square" lIns="0" tIns="0" rIns="0" bIns="0" rtlCol="0" anchor="ctr"/>
-          <a:lstStyle/>
-          <a:p>
-            <a:pPr indent="0" marL="0">
-              <a:buNone/>
-            </a:pPr>
-            <a:r>
-              <a:rPr lang="en-US" sz="1800" b="1" dirty="0">
-                <a:solidFill>
-                  <a:schemeClr val="tx1"/>
-                </a:solidFill>
-              </a:rPr>
-              <a:t>Relleno</a:t>
-            </a:r>
-            <a:endParaRPr lang="en-US" sz="1800" dirty="0"/>
-          </a:p>
-        </p:txBody>
-      </p:sp>
-      <p:sp>
-        <p:nvSpPr>
-          <p:cNvPr id="22" name="Text 19"/>
-          <p:cNvSpPr txBox="1"/>
-          <p:nvPr/>
-        </p:nvSpPr>
-        <p:spPr>
-          <a:xfrm>
-            <a:off x="5138928" y="2194560"/>
-            <a:ext cx="1691640" cy="731520"/>
-          </a:xfrm>
-          <a:prstGeom prst="rect">
-            <a:avLst/>
-          </a:prstGeom>
-          <a:noFill/>
-          <a:ln/>
-        </p:spPr>
-        <p:txBody>
-          <a:bodyPr wrap="square" lIns="0" tIns="0" rIns="0" bIns="0" rtlCol="0" anchor="ctr"/>
-          <a:lstStyle/>
-          <a:p>
-            <a:pPr algn="ctr" indent="0" marL="0">
-              <a:buNone/>
-            </a:pPr>
-            <a:r>
-              <a:rPr lang="en-US" sz="2400" b="1" dirty="0">
-                <a:solidFill>
-                  <a:schemeClr val="accent2"/>
-                </a:solidFill>
-              </a:rPr>
-              <a:t>gris 114</a:t>
-            </a:r>
-            <a:endParaRPr lang="en-US" sz="2400" dirty="0"/>
-          </a:p>
-        </p:txBody>
-      </p:sp>
-      <p:sp>
-        <p:nvSpPr>
-          <p:cNvPr id="23" name="Text 20"/>
-          <p:cNvSpPr txBox="1"/>
-          <p:nvPr/>
-        </p:nvSpPr>
-        <p:spPr>
-          <a:xfrm>
-            <a:off x="5184648" y="3017520"/>
-            <a:ext cx="1600200" cy="822960"/>
-          </a:xfrm>
-          <a:prstGeom prst="rect">
-            <a:avLst/>
-          </a:prstGeom>
-          <a:noFill/>
-          <a:ln/>
-        </p:spPr>
-        <p:txBody>
-          <a:bodyPr wrap="square" lIns="0" tIns="0" rIns="0" bIns="0" rtlCol="0" anchor="t"/>
-          <a:lstStyle/>
-          <a:p>
-            <a:pPr algn="ctr" indent="0" marL="0">
-              <a:buNone/>
-            </a:pPr>
-            <a:r>
-              <a:rPr lang="en-US" sz="1500" dirty="0">
-                <a:solidFill>
-                  <a:schemeClr val="tx2"/>
-                </a:solidFill>
-              </a:rPr>
-              <a:t>hasta 640 × 640</a:t>
-            </a:r>
-            <a:endParaRPr lang="en-US" sz="1500" dirty="0"/>
-          </a:p>
-        </p:txBody>
-      </p:sp>
-      <p:sp>
-        <p:nvSpPr>
-          <p:cNvPr id="24" name="Shape 21"/>
-          <p:cNvSpPr/>
-          <p:nvPr/>
-        </p:nvSpPr>
-        <p:spPr>
-          <a:xfrm>
-            <a:off x="6949440" y="2560320"/>
-            <a:ext cx="182880" cy="0"/>
-          </a:xfrm>
-          <a:prstGeom prst="line">
-            <a:avLst/>
-          </a:prstGeom>
-          <a:noFill/>
-          <a:ln w="28575">
-            <a:solidFill>
-              <a:schemeClr val="accent2"/>
-            </a:solidFill>
-            <a:prstDash val="solid"/>
-            <a:tailEnd type="triangle"/>
-          </a:ln>
-        </p:spPr>
-      </p:sp>
-      <p:sp>
-        <p:nvSpPr>
-          <p:cNvPr id="25" name="Shape 22"/>
-          <p:cNvSpPr/>
-          <p:nvPr/>
-        </p:nvSpPr>
-        <p:spPr>
-          <a:xfrm>
-            <a:off x="7159752" y="1371600"/>
-            <a:ext cx="1874520" cy="2651760"/>
-          </a:xfrm>
-          <a:prstGeom prst="roundRect">
-            <a:avLst>
-              <a:gd name="adj" fmla="val 5854"/>
-            </a:avLst>
-          </a:prstGeom>
-          <a:solidFill>
-            <a:schemeClr val="bg1"/>
-          </a:solidFill>
-          <a:ln w="15875">
-            <a:solidFill>
-              <a:schemeClr val="accent1"/>
-            </a:solidFill>
-            <a:prstDash val="solid"/>
-          </a:ln>
-          <a:effectLst>
-            <a:outerShdw sx="100000" sy="100000" kx="0" ky="0" algn="bl" rotWithShape="0" blurRad="76200" dist="25400" dir="5400000">
-              <a:srgbClr val="000000">
-                <a:alpha val="12000"/>
-              </a:srgbClr>
-            </a:outerShdw>
-          </a:effectLst>
-        </p:spPr>
-      </p:sp>
-      <p:sp>
-        <p:nvSpPr>
-          <p:cNvPr id="26" name="Shape 23"/>
-          <p:cNvSpPr/>
-          <p:nvPr/>
-        </p:nvSpPr>
-        <p:spPr>
-          <a:xfrm>
-            <a:off x="7296912" y="1508760"/>
-            <a:ext cx="457200" cy="457200"/>
-          </a:xfrm>
-          <a:prstGeom prst="ellipse">
-            <a:avLst/>
-          </a:prstGeom>
-          <a:solidFill>
-            <a:schemeClr val="accent2"/>
-          </a:solidFill>
-          <a:ln w="6350">
-            <a:solidFill>
-              <a:schemeClr val="accent2"/>
-            </a:solidFill>
-            <a:prstDash val="solid"/>
-          </a:ln>
-        </p:spPr>
-      </p:sp>
-      <p:sp>
-        <p:nvSpPr>
-          <p:cNvPr id="27" name="Text 24"/>
-          <p:cNvSpPr txBox="1"/>
-          <p:nvPr/>
-        </p:nvSpPr>
-        <p:spPr>
-          <a:xfrm>
-            <a:off x="7296912" y="1508760"/>
-            <a:ext cx="457200" cy="457200"/>
-          </a:xfrm>
-          <a:prstGeom prst="rect">
-            <a:avLst/>
-          </a:prstGeom>
-          <a:noFill/>
-          <a:ln/>
-        </p:spPr>
-        <p:txBody>
-          <a:bodyPr wrap="square" lIns="0" tIns="0" rIns="0" bIns="0" rtlCol="0" anchor="ctr"/>
-          <a:lstStyle/>
-          <a:p>
-            <a:pPr algn="ctr" indent="0" marL="0">
-              <a:buNone/>
-            </a:pPr>
-            <a:r>
-              <a:rPr lang="en-US" sz="1800" b="1" dirty="0">
-                <a:solidFill>
-                  <a:schemeClr val="bg1"/>
-                </a:solidFill>
-              </a:rPr>
-              <a:t>4</a:t>
-            </a:r>
-            <a:endParaRPr lang="en-US" sz="1800" dirty="0"/>
-          </a:p>
-        </p:txBody>
-      </p:sp>
-      <p:sp>
-        <p:nvSpPr>
-          <p:cNvPr id="28" name="Text 25"/>
-          <p:cNvSpPr txBox="1"/>
-          <p:nvPr/>
-        </p:nvSpPr>
-        <p:spPr>
-          <a:xfrm>
-            <a:off x="7845552" y="1508760"/>
-            <a:ext cx="1097280" cy="457200"/>
-          </a:xfrm>
-          <a:prstGeom prst="rect">
-            <a:avLst/>
-          </a:prstGeom>
-          <a:noFill/>
-          <a:ln/>
-        </p:spPr>
-        <p:txBody>
-          <a:bodyPr wrap="square" lIns="0" tIns="0" rIns="0" bIns="0" rtlCol="0" anchor="ctr"/>
-          <a:lstStyle/>
-          <a:p>
-            <a:pPr indent="0" marL="0">
-              <a:buNone/>
-            </a:pPr>
-            <a:r>
-              <a:rPr lang="en-US" sz="1800" b="1" dirty="0">
-                <a:solidFill>
-                  <a:schemeClr val="tx1"/>
-                </a:solidFill>
-              </a:rPr>
-              <a:t>Tensor</a:t>
-            </a:r>
-            <a:endParaRPr lang="en-US" sz="1800" dirty="0"/>
-          </a:p>
-        </p:txBody>
-      </p:sp>
-      <p:sp>
-        <p:nvSpPr>
-          <p:cNvPr id="29" name="Text 26"/>
-          <p:cNvSpPr txBox="1"/>
-          <p:nvPr/>
-        </p:nvSpPr>
-        <p:spPr>
-          <a:xfrm>
-            <a:off x="7251192" y="2194560"/>
-            <a:ext cx="1691640" cy="731520"/>
-          </a:xfrm>
-          <a:prstGeom prst="rect">
-            <a:avLst/>
-          </a:prstGeom>
-          <a:noFill/>
-          <a:ln/>
-        </p:spPr>
-        <p:txBody>
-          <a:bodyPr wrap="square" lIns="0" tIns="0" rIns="0" bIns="0" rtlCol="0" anchor="ctr"/>
-          <a:lstStyle/>
-          <a:p>
-            <a:pPr algn="ctr" indent="0" marL="0">
-              <a:buNone/>
-            </a:pPr>
-            <a:r>
-              <a:rPr lang="en-US" sz="1700" b="1" dirty="0">
-                <a:solidFill>
-                  <a:schemeClr val="accent2"/>
-                </a:solidFill>
-              </a:rPr>
-              <a:t>(1, 3, 640, 640)</a:t>
-            </a:r>
-            <a:endParaRPr lang="en-US" sz="1700" dirty="0"/>
-          </a:p>
-        </p:txBody>
-      </p:sp>
-      <p:sp>
-        <p:nvSpPr>
-          <p:cNvPr id="30" name="Text 27"/>
-          <p:cNvSpPr txBox="1"/>
-          <p:nvPr/>
-        </p:nvSpPr>
-        <p:spPr>
-          <a:xfrm>
-            <a:off x="7296912" y="3017520"/>
-            <a:ext cx="1600200" cy="822960"/>
-          </a:xfrm>
-          <a:prstGeom prst="rect">
-            <a:avLst/>
-          </a:prstGeom>
-          <a:noFill/>
-          <a:ln/>
-        </p:spPr>
-        <p:txBody>
-          <a:bodyPr wrap="square" lIns="0" tIns="0" rIns="0" bIns="0" rtlCol="0" anchor="t"/>
-          <a:lstStyle/>
-          <a:p>
-            <a:pPr algn="ctr" indent="0" marL="0">
-              <a:buNone/>
-            </a:pPr>
-            <a:r>
-              <a:rPr lang="en-US" sz="1500" dirty="0">
-                <a:solidFill>
-                  <a:schemeClr val="tx2"/>
-                </a:solidFill>
-              </a:rPr>
-              <a:t>HWC → CHW + batch</a:t>
-            </a:r>
-            <a:endParaRPr lang="en-US" sz="1500" dirty="0"/>
-          </a:p>
-        </p:txBody>
-      </p:sp>
-      <p:sp>
-        <p:nvSpPr>
-          <p:cNvPr id="31" name="Shape 28"/>
-          <p:cNvSpPr/>
-          <p:nvPr/>
-        </p:nvSpPr>
-        <p:spPr>
-          <a:xfrm>
-            <a:off x="9061704" y="2560320"/>
-            <a:ext cx="182880" cy="0"/>
-          </a:xfrm>
-          <a:prstGeom prst="line">
-            <a:avLst/>
-          </a:prstGeom>
-          <a:noFill/>
-          <a:ln w="28575">
-            <a:solidFill>
-              <a:schemeClr val="accent2"/>
-            </a:solidFill>
-            <a:prstDash val="solid"/>
-            <a:tailEnd type="triangle"/>
-          </a:ln>
-        </p:spPr>
-      </p:sp>
-      <p:sp>
-        <p:nvSpPr>
-          <p:cNvPr id="32" name="Shape 29"/>
-          <p:cNvSpPr/>
-          <p:nvPr/>
-        </p:nvSpPr>
-        <p:spPr>
-          <a:xfrm>
-            <a:off x="9272016" y="1371600"/>
-            <a:ext cx="1874520" cy="2651760"/>
-          </a:xfrm>
-          <a:prstGeom prst="roundRect">
-            <a:avLst>
-              <a:gd name="adj" fmla="val 5854"/>
-            </a:avLst>
-          </a:prstGeom>
-          <a:solidFill>
-            <a:schemeClr val="bg1"/>
-          </a:solidFill>
-          <a:ln w="15875">
-            <a:solidFill>
-              <a:schemeClr val="accent1"/>
-            </a:solidFill>
-            <a:prstDash val="solid"/>
-          </a:ln>
-          <a:effectLst>
-            <a:outerShdw sx="100000" sy="100000" kx="0" ky="0" algn="bl" rotWithShape="0" blurRad="76200" dist="25400" dir="5400000">
-              <a:srgbClr val="000000">
-                <a:alpha val="12000"/>
-              </a:srgbClr>
-            </a:outerShdw>
-          </a:effectLst>
-        </p:spPr>
-      </p:sp>
-      <p:sp>
-        <p:nvSpPr>
-          <p:cNvPr id="33" name="Shape 30"/>
-          <p:cNvSpPr/>
-          <p:nvPr/>
-        </p:nvSpPr>
-        <p:spPr>
-          <a:xfrm>
-            <a:off x="9409176" y="1508760"/>
-            <a:ext cx="457200" cy="457200"/>
-          </a:xfrm>
-          <a:prstGeom prst="ellipse">
-            <a:avLst/>
-          </a:prstGeom>
-          <a:solidFill>
-            <a:schemeClr val="accent2"/>
-          </a:solidFill>
-          <a:ln w="6350">
-            <a:solidFill>
-              <a:schemeClr val="accent2"/>
-            </a:solidFill>
-            <a:prstDash val="solid"/>
-          </a:ln>
-        </p:spPr>
-      </p:sp>
-      <p:sp>
-        <p:nvSpPr>
-          <p:cNvPr id="34" name="Text 31"/>
-          <p:cNvSpPr txBox="1"/>
-          <p:nvPr/>
-        </p:nvSpPr>
-        <p:spPr>
-          <a:xfrm>
-            <a:off x="9409176" y="1508760"/>
-            <a:ext cx="457200" cy="457200"/>
-          </a:xfrm>
-          <a:prstGeom prst="rect">
-            <a:avLst/>
-          </a:prstGeom>
-          <a:noFill/>
-          <a:ln/>
-        </p:spPr>
-        <p:txBody>
-          <a:bodyPr wrap="square" lIns="0" tIns="0" rIns="0" bIns="0" rtlCol="0" anchor="ctr"/>
-          <a:lstStyle/>
-          <a:p>
-            <a:pPr algn="ctr" indent="0" marL="0">
-              <a:buNone/>
-            </a:pPr>
-            <a:r>
-              <a:rPr lang="en-US" sz="1800" b="1" dirty="0">
-                <a:solidFill>
-                  <a:schemeClr val="bg1"/>
-                </a:solidFill>
-              </a:rPr>
-              <a:t>5</a:t>
-            </a:r>
-            <a:endParaRPr lang="en-US" sz="1800" dirty="0"/>
-          </a:p>
-        </p:txBody>
-      </p:sp>
-      <p:sp>
-        <p:nvSpPr>
-          <p:cNvPr id="35" name="Text 32"/>
-          <p:cNvSpPr txBox="1"/>
-          <p:nvPr/>
-        </p:nvSpPr>
-        <p:spPr>
-          <a:xfrm>
-            <a:off x="9957816" y="1508760"/>
-            <a:ext cx="1097280" cy="457200"/>
-          </a:xfrm>
-          <a:prstGeom prst="rect">
-            <a:avLst/>
-          </a:prstGeom>
-          <a:noFill/>
-          <a:ln/>
-        </p:spPr>
-        <p:txBody>
-          <a:bodyPr wrap="square" lIns="0" tIns="0" rIns="0" bIns="0" rtlCol="0" anchor="ctr"/>
-          <a:lstStyle/>
-          <a:p>
-            <a:pPr indent="0" marL="0">
-              <a:buNone/>
-            </a:pPr>
-            <a:r>
-              <a:rPr lang="en-US" sz="1800" b="1" dirty="0">
-                <a:solidFill>
-                  <a:schemeClr val="tx1"/>
-                </a:solidFill>
-              </a:rPr>
-              <a:t>Escala</a:t>
-            </a:r>
-            <a:endParaRPr lang="en-US" sz="1800" dirty="0"/>
-          </a:p>
-        </p:txBody>
-      </p:sp>
-      <p:sp>
-        <p:nvSpPr>
-          <p:cNvPr id="36" name="Text 33"/>
-          <p:cNvSpPr txBox="1"/>
-          <p:nvPr/>
-        </p:nvSpPr>
-        <p:spPr>
-          <a:xfrm>
-            <a:off x="9363456" y="2194560"/>
-            <a:ext cx="1691640" cy="731520"/>
-          </a:xfrm>
-          <a:prstGeom prst="rect">
-            <a:avLst/>
-          </a:prstGeom>
-          <a:noFill/>
-          <a:ln/>
-        </p:spPr>
-        <p:txBody>
-          <a:bodyPr wrap="square" lIns="0" tIns="0" rIns="0" bIns="0" rtlCol="0" anchor="ctr"/>
-          <a:lstStyle/>
-          <a:p>
-            <a:pPr algn="ctr" indent="0" marL="0">
-              <a:buNone/>
-            </a:pPr>
-            <a:r>
-              <a:rPr lang="en-US" sz="2400" b="1" dirty="0">
-                <a:solidFill>
-                  <a:schemeClr val="accent2"/>
-                </a:solidFill>
-              </a:rPr>
-              <a:t>x / 255</a:t>
-            </a:r>
-            <a:endParaRPr lang="en-US" sz="2400" dirty="0"/>
-          </a:p>
-        </p:txBody>
-      </p:sp>
-      <p:sp>
-        <p:nvSpPr>
-          <p:cNvPr id="37" name="Text 34"/>
-          <p:cNvSpPr txBox="1"/>
-          <p:nvPr/>
-        </p:nvSpPr>
-        <p:spPr>
-          <a:xfrm>
-            <a:off x="9409176" y="3017520"/>
-            <a:ext cx="1600200" cy="822960"/>
-          </a:xfrm>
-          <a:prstGeom prst="rect">
-            <a:avLst/>
-          </a:prstGeom>
-          <a:noFill/>
-          <a:ln/>
-        </p:spPr>
-        <p:txBody>
-          <a:bodyPr wrap="square" lIns="0" tIns="0" rIns="0" bIns="0" rtlCol="0" anchor="t"/>
-          <a:lstStyle/>
-          <a:p>
-            <a:pPr algn="ctr" indent="0" marL="0">
-              <a:buNone/>
-            </a:pPr>
-            <a:r>
-              <a:rPr lang="en-US" sz="1500" dirty="0">
-                <a:solidFill>
-                  <a:schemeClr val="tx2"/>
-                </a:solidFill>
-              </a:rPr>
-              <a:t>rango [0, 1]</a:t>
-            </a:r>
-            <a:endParaRPr lang="en-US" sz="1500" dirty="0"/>
-          </a:p>
-        </p:txBody>
-      </p:sp>
-      <p:sp>
-        <p:nvSpPr>
-          <p:cNvPr id="38" name="Shape 35"/>
-          <p:cNvSpPr/>
-          <p:nvPr/>
-        </p:nvSpPr>
-        <p:spPr>
-          <a:xfrm>
-            <a:off x="822960" y="4297680"/>
-            <a:ext cx="3291840" cy="1737360"/>
-          </a:xfrm>
-          <a:prstGeom prst="roundRect">
-            <a:avLst>
-              <a:gd name="adj" fmla="val 5263"/>
-            </a:avLst>
-          </a:prstGeom>
-          <a:solidFill>
-            <a:schemeClr val="bg2"/>
-          </a:solidFill>
-          <a:ln w="9525">
-            <a:solidFill>
-              <a:schemeClr val="accent1"/>
-            </a:solidFill>
-            <a:prstDash val="solid"/>
-          </a:ln>
-        </p:spPr>
-      </p:sp>
-      <p:sp>
-        <p:nvSpPr>
-          <p:cNvPr id="39" name="Text 36"/>
-          <p:cNvSpPr txBox="1"/>
-          <p:nvPr/>
-        </p:nvSpPr>
-        <p:spPr>
-          <a:xfrm>
-            <a:off x="1005840" y="4389120"/>
-            <a:ext cx="2926080" cy="1554480"/>
-          </a:xfrm>
-          <a:prstGeom prst="rect">
-            <a:avLst/>
-          </a:prstGeom>
-          <a:noFill/>
-          <a:ln/>
-        </p:spPr>
-        <p:txBody>
-          <a:bodyPr wrap="square" lIns="0" tIns="0" rIns="0" bIns="0" rtlCol="0" anchor="ctr"/>
-          <a:lstStyle/>
-          <a:p>
-            <a:pPr indent="0" marL="0">
-              <a:spcAft>
-                <a:spcPts val="600"/>
-              </a:spcAft>
-              <a:buNone/>
-            </a:pPr>
-            <a:r>
-              <a:rPr lang="en-US" sz="1800" b="1" dirty="0">
-                <a:solidFill>
-                  <a:schemeClr val="tx1"/>
-                </a:solidFill>
-              </a:rPr>
-              <a:t>¿Por qué 640?</a:t>
-            </a:r>
-            <a:endParaRPr lang="en-US" sz="1400" dirty="0"/>
-          </a:p>
-          <a:p>
-            <a:pPr indent="0" marL="0">
-              <a:spcAft>
-                <a:spcPts val="600"/>
-              </a:spcAft>
-              <a:buNone/>
-            </a:pPr>
-            <a:r>
-              <a:rPr lang="en-US" sz="1600" dirty="0">
-                <a:solidFill>
-                  <a:schemeClr val="tx2"/>
-                </a:solidFill>
-              </a:rPr>
-              <a:t>Múltiplo de 32 (el backbone reduce 5 veces por 2) y tamaño de preentrenamiento.</a:t>
-            </a:r>
-            <a:endParaRPr lang="en-US" sz="1400" dirty="0"/>
-          </a:p>
-        </p:txBody>
-      </p:sp>
-      <p:sp>
-        <p:nvSpPr>
-          <p:cNvPr id="40" name="Shape 37"/>
-          <p:cNvSpPr/>
-          <p:nvPr/>
-        </p:nvSpPr>
-        <p:spPr>
-          <a:xfrm>
-            <a:off x="4343400" y="4297680"/>
-            <a:ext cx="3291840" cy="1737360"/>
-          </a:xfrm>
-          <a:prstGeom prst="roundRect">
-            <a:avLst>
-              <a:gd name="adj" fmla="val 5263"/>
-            </a:avLst>
-          </a:prstGeom>
-          <a:solidFill>
-            <a:schemeClr val="bg2"/>
-          </a:solidFill>
-          <a:ln w="9525">
-            <a:solidFill>
-              <a:schemeClr val="accent1"/>
-            </a:solidFill>
-            <a:prstDash val="solid"/>
-          </a:ln>
-        </p:spPr>
-      </p:sp>
-      <p:sp>
-        <p:nvSpPr>
-          <p:cNvPr id="41" name="Text 38"/>
-          <p:cNvSpPr txBox="1"/>
-          <p:nvPr/>
-        </p:nvSpPr>
-        <p:spPr>
-          <a:xfrm>
-            <a:off x="4526280" y="4389120"/>
-            <a:ext cx="2926080" cy="1554480"/>
-          </a:xfrm>
-          <a:prstGeom prst="rect">
-            <a:avLst/>
-          </a:prstGeom>
-          <a:noFill/>
-          <a:ln/>
-        </p:spPr>
-        <p:txBody>
-          <a:bodyPr wrap="square" lIns="0" tIns="0" rIns="0" bIns="0" rtlCol="0" anchor="ctr"/>
-          <a:lstStyle/>
-          <a:p>
-            <a:pPr indent="0" marL="0">
-              <a:spcAft>
-                <a:spcPts val="600"/>
-              </a:spcAft>
-              <a:buNone/>
-            </a:pPr>
-            <a:r>
-              <a:rPr lang="en-US" sz="1800" b="1" dirty="0">
-                <a:solidFill>
-                  <a:schemeClr val="tx1"/>
-                </a:solidFill>
-              </a:rPr>
-              <a:t>¿Sin media ni std?</a:t>
-            </a:r>
-            <a:endParaRPr lang="en-US" sz="1400" dirty="0"/>
-          </a:p>
-          <a:p>
-            <a:pPr indent="0" marL="0">
-              <a:spcAft>
-                <a:spcPts val="600"/>
-              </a:spcAft>
-              <a:buNone/>
-            </a:pPr>
-            <a:r>
-              <a:rPr lang="en-US" sz="1600" dirty="0">
-                <a:solidFill>
-                  <a:schemeClr val="tx2"/>
-                </a:solidFill>
-              </a:rPr>
-              <a:t>La primera capa de BatchNorm ya recentra y reescala la entrada.</a:t>
-            </a:r>
-            <a:endParaRPr lang="en-US" sz="1400" dirty="0"/>
-          </a:p>
-        </p:txBody>
-      </p:sp>
-      <p:sp>
-        <p:nvSpPr>
-          <p:cNvPr id="42" name="Shape 39"/>
-          <p:cNvSpPr/>
-          <p:nvPr/>
-        </p:nvSpPr>
-        <p:spPr>
-          <a:xfrm>
-            <a:off x="7863840" y="4297680"/>
-            <a:ext cx="3291840" cy="1737360"/>
-          </a:xfrm>
-          <a:prstGeom prst="roundRect">
-            <a:avLst>
-              <a:gd name="adj" fmla="val 5263"/>
-            </a:avLst>
-          </a:prstGeom>
-          <a:solidFill>
-            <a:srgbClr val="FFF1DC"/>
-          </a:solidFill>
-          <a:ln w="15875">
-            <a:solidFill>
-              <a:schemeClr val="accent5"/>
-            </a:solidFill>
-            <a:prstDash val="solid"/>
-          </a:ln>
-        </p:spPr>
-      </p:sp>
-      <p:sp>
-        <p:nvSpPr>
-          <p:cNvPr id="43" name="Text 40"/>
-          <p:cNvSpPr txBox="1"/>
-          <p:nvPr/>
-        </p:nvSpPr>
-        <p:spPr>
-          <a:xfrm>
-            <a:off x="8046720" y="4389120"/>
-            <a:ext cx="2926080" cy="1554480"/>
-          </a:xfrm>
-          <a:prstGeom prst="rect">
-            <a:avLst/>
-          </a:prstGeom>
-          <a:noFill/>
-          <a:ln/>
-        </p:spPr>
-        <p:txBody>
-          <a:bodyPr wrap="square" lIns="0" tIns="0" rIns="0" bIns="0" rtlCol="0" anchor="ctr"/>
-          <a:lstStyle/>
-          <a:p>
-            <a:pPr indent="0" marL="0">
-              <a:spcAft>
-                <a:spcPts val="600"/>
-              </a:spcAft>
-              <a:buNone/>
-            </a:pPr>
-            <a:r>
-              <a:rPr lang="en-US" sz="1800" b="1" dirty="0">
-                <a:solidFill>
-                  <a:schemeClr val="accent5"/>
-                </a:solidFill>
-              </a:rPr>
-              <a:t>En producción</a:t>
-            </a:r>
-            <a:endParaRPr lang="en-US" sz="1400" dirty="0"/>
-          </a:p>
-          <a:p>
-            <a:pPr indent="0" marL="0">
-              <a:spcAft>
-                <a:spcPts val="600"/>
-              </a:spcAft>
-              <a:buNone/>
-            </a:pPr>
-            <a:r>
-              <a:rPr lang="en-US" sz="1600" dirty="0">
-                <a:solidFill>
-                  <a:schemeClr val="tx1"/>
-                </a:solidFill>
-              </a:rPr>
-              <a:t>El worker redimensiona directo, sin letterbox. Limitación registrada en el informe.</a:t>
-            </a:r>
-            <a:endParaRPr lang="en-US" sz="1400" dirty="0"/>
+              <a:t>Los fotogramas vecinos son casi idénticos: separarlos entre train y test inflaría las métricas (data leakage).</a:t>
+            </a:r>
+            <a:endParaRPr lang="en-US" sz="1600" dirty="0"/>
           </a:p>
         </p:txBody>
       </p:sp>
@@ -6990,7 +6927,7 @@
                   <a:schemeClr val="tx1"/>
                 </a:solidFill>
               </a:rPr>
-              <a:t>Dataset y división 70 / 15 / 15</a:t>
+              <a:t>Entrenamiento y función de pérdida</a:t>
             </a:r>
             <a:endParaRPr lang="en-US" sz="3000" dirty="0"/>
           </a:p>
@@ -7005,288 +6942,11 @@
         <p:spPr>
           <a:xfrm>
             <a:off x="822960" y="1371600"/>
-            <a:ext cx="7232904" cy="914400"/>
-          </a:xfrm>
-          <a:prstGeom prst="rect">
-            <a:avLst/>
-          </a:prstGeom>
-          <a:solidFill>
-            <a:schemeClr val="accent1"/>
-          </a:solidFill>
-          <a:ln w="25400">
-            <a:solidFill>
-              <a:schemeClr val="bg1"/>
-            </a:solidFill>
-            <a:prstDash val="solid"/>
-          </a:ln>
-        </p:spPr>
-      </p:sp>
-      <p:sp>
-        <p:nvSpPr>
-          <p:cNvPr id="5" name="Text 2"/>
-          <p:cNvSpPr txBox="1"/>
-          <p:nvPr/>
-        </p:nvSpPr>
-        <p:spPr>
-          <a:xfrm>
-            <a:off x="822960" y="1371600"/>
-            <a:ext cx="7232904" cy="914400"/>
-          </a:xfrm>
-          <a:prstGeom prst="rect">
-            <a:avLst/>
-          </a:prstGeom>
-          <a:noFill/>
-          <a:ln/>
-        </p:spPr>
-        <p:txBody>
-          <a:bodyPr wrap="square" lIns="0" tIns="0" rIns="0" bIns="0" rtlCol="0" anchor="ctr"/>
-          <a:lstStyle/>
-          <a:p>
-            <a:pPr algn="ctr" indent="0" marL="0">
-              <a:buNone/>
-            </a:pPr>
-            <a:r>
-              <a:rPr lang="en-US" sz="1800" b="1" dirty="0">
-                <a:solidFill>
-                  <a:schemeClr val="tx1"/>
-                </a:solidFill>
-              </a:rPr>
-              <a:t>Entrenamiento · 70 %</a:t>
-            </a:r>
-            <a:endParaRPr lang="en-US" sz="1400" dirty="0"/>
-          </a:p>
-          <a:p>
-            <a:pPr algn="ctr" indent="0" marL="0">
-              <a:buNone/>
-            </a:pPr>
-            <a:r>
-              <a:rPr lang="en-US" sz="1400" dirty="0">
-                <a:solidFill>
-                  <a:schemeClr val="tx1"/>
-                </a:solidFill>
-              </a:rPr>
-              <a:t>≈ 3 929 imágenes</a:t>
-            </a:r>
-            <a:endParaRPr lang="en-US" sz="1400" dirty="0"/>
-          </a:p>
-        </p:txBody>
-      </p:sp>
-      <p:sp>
-        <p:nvSpPr>
-          <p:cNvPr id="6" name="Shape 3"/>
-          <p:cNvSpPr/>
-          <p:nvPr/>
-        </p:nvSpPr>
-        <p:spPr>
-          <a:xfrm>
-            <a:off x="8055864" y="1371600"/>
-            <a:ext cx="1549908" cy="914400"/>
-          </a:xfrm>
-          <a:prstGeom prst="rect">
-            <a:avLst/>
-          </a:prstGeom>
-          <a:solidFill>
-            <a:schemeClr val="accent3"/>
-          </a:solidFill>
-          <a:ln w="25400">
-            <a:solidFill>
-              <a:schemeClr val="bg1"/>
-            </a:solidFill>
-            <a:prstDash val="solid"/>
-          </a:ln>
-        </p:spPr>
-      </p:sp>
-      <p:sp>
-        <p:nvSpPr>
-          <p:cNvPr id="7" name="Text 4"/>
-          <p:cNvSpPr txBox="1"/>
-          <p:nvPr/>
-        </p:nvSpPr>
-        <p:spPr>
-          <a:xfrm>
-            <a:off x="8055864" y="1371600"/>
-            <a:ext cx="1549908" cy="914400"/>
-          </a:xfrm>
-          <a:prstGeom prst="rect">
-            <a:avLst/>
-          </a:prstGeom>
-          <a:noFill/>
-          <a:ln/>
-        </p:spPr>
-        <p:txBody>
-          <a:bodyPr wrap="square" lIns="0" tIns="0" rIns="0" bIns="0" rtlCol="0" anchor="ctr"/>
-          <a:lstStyle/>
-          <a:p>
-            <a:pPr algn="ctr" indent="0" marL="0">
-              <a:buNone/>
-            </a:pPr>
-            <a:r>
-              <a:rPr lang="en-US" sz="1800" b="1" dirty="0">
-                <a:solidFill>
-                  <a:schemeClr val="bg1"/>
-                </a:solidFill>
-              </a:rPr>
-              <a:t>Val · 15 %</a:t>
-            </a:r>
-            <a:endParaRPr lang="en-US" sz="1400" dirty="0"/>
-          </a:p>
-          <a:p>
-            <a:pPr algn="ctr" indent="0" marL="0">
-              <a:buNone/>
-            </a:pPr>
-            <a:r>
-              <a:rPr lang="en-US" sz="1400" dirty="0">
-                <a:solidFill>
-                  <a:schemeClr val="bg1"/>
-                </a:solidFill>
-              </a:rPr>
-              <a:t>≈ 842</a:t>
-            </a:r>
-            <a:endParaRPr lang="en-US" sz="1400" dirty="0"/>
-          </a:p>
-        </p:txBody>
-      </p:sp>
-      <p:sp>
-        <p:nvSpPr>
-          <p:cNvPr id="8" name="Shape 5"/>
-          <p:cNvSpPr/>
-          <p:nvPr/>
-        </p:nvSpPr>
-        <p:spPr>
-          <a:xfrm>
-            <a:off x="9605772" y="1371600"/>
-            <a:ext cx="1549908" cy="914400"/>
-          </a:xfrm>
-          <a:prstGeom prst="rect">
-            <a:avLst/>
-          </a:prstGeom>
-          <a:solidFill>
-            <a:schemeClr val="accent4"/>
-          </a:solidFill>
-          <a:ln w="25400">
-            <a:solidFill>
-              <a:schemeClr val="bg1"/>
-            </a:solidFill>
-            <a:prstDash val="solid"/>
-          </a:ln>
-        </p:spPr>
-      </p:sp>
-      <p:sp>
-        <p:nvSpPr>
-          <p:cNvPr id="9" name="Text 6"/>
-          <p:cNvSpPr txBox="1"/>
-          <p:nvPr/>
-        </p:nvSpPr>
-        <p:spPr>
-          <a:xfrm>
-            <a:off x="9605772" y="1371600"/>
-            <a:ext cx="1549908" cy="914400"/>
-          </a:xfrm>
-          <a:prstGeom prst="rect">
-            <a:avLst/>
-          </a:prstGeom>
-          <a:noFill/>
-          <a:ln/>
-        </p:spPr>
-        <p:txBody>
-          <a:bodyPr wrap="square" lIns="0" tIns="0" rIns="0" bIns="0" rtlCol="0" anchor="ctr"/>
-          <a:lstStyle/>
-          <a:p>
-            <a:pPr algn="ctr" indent="0" marL="0">
-              <a:buNone/>
-            </a:pPr>
-            <a:r>
-              <a:rPr lang="en-US" sz="1800" b="1" dirty="0">
-                <a:solidFill>
-                  <a:schemeClr val="bg1"/>
-                </a:solidFill>
-              </a:rPr>
-              <a:t>Test · 15 %</a:t>
-            </a:r>
-            <a:endParaRPr lang="en-US" sz="1400" dirty="0"/>
-          </a:p>
-          <a:p>
-            <a:pPr algn="ctr" indent="0" marL="0">
-              <a:buNone/>
-            </a:pPr>
-            <a:r>
-              <a:rPr lang="en-US" sz="1400" dirty="0">
-                <a:solidFill>
-                  <a:schemeClr val="bg1"/>
-                </a:solidFill>
-              </a:rPr>
-              <a:t>841 (real)</a:t>
-            </a:r>
-            <a:endParaRPr lang="en-US" sz="1400" dirty="0"/>
-          </a:p>
-        </p:txBody>
-      </p:sp>
-      <p:sp>
-        <p:nvSpPr>
-          <p:cNvPr id="10" name="Text 7"/>
-          <p:cNvSpPr txBox="1"/>
-          <p:nvPr/>
-        </p:nvSpPr>
-        <p:spPr>
-          <a:xfrm>
-            <a:off x="822960" y="2377440"/>
-            <a:ext cx="10332720" cy="320040"/>
-          </a:xfrm>
-          <a:prstGeom prst="rect">
-            <a:avLst/>
-          </a:prstGeom>
-          <a:noFill/>
-          <a:ln/>
-        </p:spPr>
-        <p:txBody>
-          <a:bodyPr wrap="square" lIns="0" tIns="0" rIns="0" bIns="0" rtlCol="0" anchor="t"/>
-          <a:lstStyle/>
-          <a:p>
-            <a:pPr indent="0" marL="0">
-              <a:buNone/>
-            </a:pPr>
-            <a:r>
-              <a:rPr lang="en-US" sz="1300" dirty="0">
-                <a:solidFill>
-                  <a:schemeClr val="tx2"/>
-                </a:solidFill>
-              </a:rPr>
-              <a:t>5 613 imágenes de 3 datasets de Roboflow Universe · semilla 42 · el test real es de 841 porque la división por secuencia no es exacta</a:t>
-            </a:r>
-            <a:endParaRPr lang="en-US" sz="1300" dirty="0"/>
-          </a:p>
-        </p:txBody>
-      </p:sp>
-      <p:graphicFrame>
-        <p:nvGraphicFramePr>
-          <p:cNvPr id="11" name="Chart 0" descr=""/>
-          <p:cNvGraphicFramePr/>
-          <p:nvPr/>
-        </p:nvGraphicFramePr>
-        <p:xfrm>
-          <a:off x="731520" y="2834640"/>
-          <a:ext cx="5852160" cy="3291840"/>
-        </p:xfrm>
-        <a:graphic xmlns:a="http://schemas.openxmlformats.org/drawingml/2006/main">
-          <a:graphicData uri="http://schemas.openxmlformats.org/drawingml/2006/chart">
-            <c:chart xmlns:c="http://schemas.openxmlformats.org/drawingml/2006/chart" r:id="rId1"/>
-          </a:graphicData>
-        </a:graphic>
-      </p:graphicFrame>
-      <p:sp>
-        <p:nvSpPr>
-          <p:cNvPr id="12" name="Shape 8"/>
-          <p:cNvSpPr/>
-          <p:nvPr/>
-        </p:nvSpPr>
-        <p:spPr>
-          <a:xfrm>
-            <a:off x="6858000" y="2880360"/>
-            <a:ext cx="4297680" cy="3200400"/>
+            <a:ext cx="10332720" cy="1143000"/>
           </a:xfrm>
           <a:prstGeom prst="roundRect">
             <a:avLst>
-              <a:gd name="adj" fmla="val 3429"/>
+              <a:gd name="adj" fmla="val 9600"/>
             </a:avLst>
           </a:prstGeom>
           <a:solidFill>
@@ -7309,14 +6969,553 @@
       </p:sp>
       <p:sp>
         <p:nvSpPr>
-          <p:cNvPr id="13" name="Text 9"/>
+          <p:cNvPr id="5" name="Text 2"/>
           <p:cNvSpPr txBox="1"/>
           <p:nvPr/>
         </p:nvSpPr>
         <p:spPr>
           <a:xfrm>
-            <a:off x="7086600" y="3017520"/>
-            <a:ext cx="3931920" cy="365760"/>
+            <a:off x="822960" y="1371600"/>
+            <a:ext cx="10332720" cy="1143000"/>
+          </a:xfrm>
+          <a:prstGeom prst="rect">
+            <a:avLst/>
+          </a:prstGeom>
+          <a:noFill/>
+          <a:ln/>
+        </p:spPr>
+        <p:txBody>
+          <a:bodyPr wrap="square" lIns="0" tIns="0" rIns="0" bIns="0" rtlCol="0" anchor="ctr"/>
+          <a:lstStyle/>
+          <a:p>
+            <a:pPr algn="ctr" indent="0" marL="0">
+              <a:buNone/>
+            </a:pPr>
+            <a:r>
+              <a:rPr lang="en-US" sz="3400" b="1" dirty="0">
+                <a:solidFill>
+                  <a:schemeClr val="tx1"/>
+                </a:solidFill>
+              </a:rPr>
+              <a:t>L = 7.5 · L</a:t>
+            </a:r>
+            <a:pPr algn="ctr" indent="0" marL="0">
+              <a:buNone/>
+            </a:pPr>
+            <a:r>
+              <a:rPr lang="en-US" sz="2200" b="1" baseline="-40000" dirty="0">
+                <a:solidFill>
+                  <a:schemeClr val="tx1"/>
+                </a:solidFill>
+              </a:rPr>
+              <a:t>CIoU</a:t>
+            </a:r>
+            <a:pPr algn="ctr" indent="0" marL="0">
+              <a:buNone/>
+            </a:pPr>
+            <a:r>
+              <a:rPr lang="en-US" sz="3400" b="1" dirty="0">
+                <a:solidFill>
+                  <a:schemeClr val="tx1"/>
+                </a:solidFill>
+              </a:rPr>
+              <a:t> + 0.5 · L</a:t>
+            </a:r>
+            <a:pPr algn="ctr" indent="0" marL="0">
+              <a:buNone/>
+            </a:pPr>
+            <a:r>
+              <a:rPr lang="en-US" sz="2200" b="1" baseline="-40000" dirty="0">
+                <a:solidFill>
+                  <a:schemeClr val="tx1"/>
+                </a:solidFill>
+              </a:rPr>
+              <a:t>BCE</a:t>
+            </a:r>
+            <a:pPr algn="ctr" indent="0" marL="0">
+              <a:buNone/>
+            </a:pPr>
+            <a:r>
+              <a:rPr lang="en-US" sz="3400" b="1" dirty="0">
+                <a:solidFill>
+                  <a:schemeClr val="tx1"/>
+                </a:solidFill>
+              </a:rPr>
+              <a:t> + 1.5 · L</a:t>
+            </a:r>
+            <a:pPr algn="ctr" indent="0" marL="0">
+              <a:buNone/>
+            </a:pPr>
+            <a:r>
+              <a:rPr lang="en-US" sz="2200" b="1" baseline="-40000" dirty="0">
+                <a:solidFill>
+                  <a:schemeClr val="tx1"/>
+                </a:solidFill>
+              </a:rPr>
+              <a:t>DFL</a:t>
+            </a:r>
+            <a:endParaRPr lang="en-US" sz="3400" dirty="0"/>
+          </a:p>
+        </p:txBody>
+      </p:sp>
+      <p:sp>
+        <p:nvSpPr>
+          <p:cNvPr id="6" name="Shape 3"/>
+          <p:cNvSpPr/>
+          <p:nvPr/>
+        </p:nvSpPr>
+        <p:spPr>
+          <a:xfrm>
+            <a:off x="822960" y="2697480"/>
+            <a:ext cx="3291840" cy="1645920"/>
+          </a:xfrm>
+          <a:prstGeom prst="roundRect">
+            <a:avLst>
+              <a:gd name="adj" fmla="val 6667"/>
+            </a:avLst>
+          </a:prstGeom>
+          <a:solidFill>
+            <a:schemeClr val="bg1"/>
+          </a:solidFill>
+          <a:ln w="15875">
+            <a:solidFill>
+              <a:schemeClr val="accent1"/>
+            </a:solidFill>
+            <a:prstDash val="solid"/>
+          </a:ln>
+          <a:effectLst>
+            <a:outerShdw sx="100000" sy="100000" kx="0" ky="0" algn="bl" rotWithShape="0" blurRad="76200" dist="25400" dir="5400000">
+              <a:srgbClr val="000000">
+                <a:alpha val="12000"/>
+              </a:srgbClr>
+            </a:outerShdw>
+          </a:effectLst>
+        </p:spPr>
+      </p:sp>
+      <p:sp>
+        <p:nvSpPr>
+          <p:cNvPr id="7" name="Text 4"/>
+          <p:cNvSpPr txBox="1"/>
+          <p:nvPr/>
+        </p:nvSpPr>
+        <p:spPr>
+          <a:xfrm>
+            <a:off x="914400" y="2697480"/>
+            <a:ext cx="1143000" cy="1645920"/>
+          </a:xfrm>
+          <a:prstGeom prst="rect">
+            <a:avLst/>
+          </a:prstGeom>
+          <a:noFill/>
+          <a:ln/>
+        </p:spPr>
+        <p:txBody>
+          <a:bodyPr wrap="square" lIns="0" tIns="0" rIns="0" bIns="0" rtlCol="0" anchor="ctr"/>
+          <a:lstStyle/>
+          <a:p>
+            <a:pPr algn="ctr" indent="0" marL="0">
+              <a:buNone/>
+            </a:pPr>
+            <a:r>
+              <a:rPr lang="en-US" sz="3800" b="1" dirty="0">
+                <a:solidFill>
+                  <a:schemeClr val="accent2"/>
+                </a:solidFill>
+              </a:rPr>
+              <a:t>7.5</a:t>
+            </a:r>
+            <a:endParaRPr lang="en-US" sz="3800" dirty="0"/>
+          </a:p>
+        </p:txBody>
+      </p:sp>
+      <p:sp>
+        <p:nvSpPr>
+          <p:cNvPr id="8" name="Text 5"/>
+          <p:cNvSpPr txBox="1"/>
+          <p:nvPr/>
+        </p:nvSpPr>
+        <p:spPr>
+          <a:xfrm>
+            <a:off x="2103120" y="2788920"/>
+            <a:ext cx="1920240" cy="1463040"/>
+          </a:xfrm>
+          <a:prstGeom prst="rect">
+            <a:avLst/>
+          </a:prstGeom>
+          <a:noFill/>
+          <a:ln/>
+        </p:spPr>
+        <p:txBody>
+          <a:bodyPr wrap="square" lIns="0" tIns="0" rIns="0" bIns="0" rtlCol="0" anchor="ctr"/>
+          <a:lstStyle/>
+          <a:p>
+            <a:pPr indent="0" marL="0">
+              <a:spcAft>
+                <a:spcPts val="400"/>
+              </a:spcAft>
+              <a:buNone/>
+            </a:pPr>
+            <a:r>
+              <a:rPr lang="en-US" sz="1800" b="1" dirty="0">
+                <a:solidFill>
+                  <a:schemeClr val="tx1"/>
+                </a:solidFill>
+              </a:rPr>
+              <a:t>CIoU · caja</a:t>
+            </a:r>
+            <a:endParaRPr lang="en-US" sz="1400" dirty="0"/>
+          </a:p>
+          <a:p>
+            <a:pPr indent="0" marL="0">
+              <a:spcAft>
+                <a:spcPts val="400"/>
+              </a:spcAft>
+              <a:buNone/>
+            </a:pPr>
+            <a:r>
+              <a:rPr lang="en-US" sz="1400" dirty="0">
+                <a:solidFill>
+                  <a:schemeClr val="tx2"/>
+                </a:solidFill>
+              </a:rPr>
+              <a:t>Superposición, distancia de centros y proporción.</a:t>
+            </a:r>
+            <a:endParaRPr lang="en-US" sz="1400" dirty="0"/>
+          </a:p>
+        </p:txBody>
+      </p:sp>
+      <p:sp>
+        <p:nvSpPr>
+          <p:cNvPr id="9" name="Shape 6"/>
+          <p:cNvSpPr/>
+          <p:nvPr/>
+        </p:nvSpPr>
+        <p:spPr>
+          <a:xfrm>
+            <a:off x="4343400" y="2697480"/>
+            <a:ext cx="3291840" cy="1645920"/>
+          </a:xfrm>
+          <a:prstGeom prst="roundRect">
+            <a:avLst>
+              <a:gd name="adj" fmla="val 6667"/>
+            </a:avLst>
+          </a:prstGeom>
+          <a:solidFill>
+            <a:schemeClr val="bg1"/>
+          </a:solidFill>
+          <a:ln w="15875">
+            <a:solidFill>
+              <a:schemeClr val="accent1"/>
+            </a:solidFill>
+            <a:prstDash val="solid"/>
+          </a:ln>
+          <a:effectLst>
+            <a:outerShdw sx="100000" sy="100000" kx="0" ky="0" algn="bl" rotWithShape="0" blurRad="76200" dist="25400" dir="5400000">
+              <a:srgbClr val="000000">
+                <a:alpha val="12000"/>
+              </a:srgbClr>
+            </a:outerShdw>
+          </a:effectLst>
+        </p:spPr>
+      </p:sp>
+      <p:sp>
+        <p:nvSpPr>
+          <p:cNvPr id="10" name="Text 7"/>
+          <p:cNvSpPr txBox="1"/>
+          <p:nvPr/>
+        </p:nvSpPr>
+        <p:spPr>
+          <a:xfrm>
+            <a:off x="4434840" y="2697480"/>
+            <a:ext cx="1143000" cy="1645920"/>
+          </a:xfrm>
+          <a:prstGeom prst="rect">
+            <a:avLst/>
+          </a:prstGeom>
+          <a:noFill/>
+          <a:ln/>
+        </p:spPr>
+        <p:txBody>
+          <a:bodyPr wrap="square" lIns="0" tIns="0" rIns="0" bIns="0" rtlCol="0" anchor="ctr"/>
+          <a:lstStyle/>
+          <a:p>
+            <a:pPr algn="ctr" indent="0" marL="0">
+              <a:buNone/>
+            </a:pPr>
+            <a:r>
+              <a:rPr lang="en-US" sz="3800" b="1" dirty="0">
+                <a:solidFill>
+                  <a:schemeClr val="accent2"/>
+                </a:solidFill>
+              </a:rPr>
+              <a:t>0.5</a:t>
+            </a:r>
+            <a:endParaRPr lang="en-US" sz="3800" dirty="0"/>
+          </a:p>
+        </p:txBody>
+      </p:sp>
+      <p:sp>
+        <p:nvSpPr>
+          <p:cNvPr id="11" name="Text 8"/>
+          <p:cNvSpPr txBox="1"/>
+          <p:nvPr/>
+        </p:nvSpPr>
+        <p:spPr>
+          <a:xfrm>
+            <a:off x="5623560" y="2788920"/>
+            <a:ext cx="1920240" cy="1463040"/>
+          </a:xfrm>
+          <a:prstGeom prst="rect">
+            <a:avLst/>
+          </a:prstGeom>
+          <a:noFill/>
+          <a:ln/>
+        </p:spPr>
+        <p:txBody>
+          <a:bodyPr wrap="square" lIns="0" tIns="0" rIns="0" bIns="0" rtlCol="0" anchor="ctr"/>
+          <a:lstStyle/>
+          <a:p>
+            <a:pPr indent="0" marL="0">
+              <a:spcAft>
+                <a:spcPts val="400"/>
+              </a:spcAft>
+              <a:buNone/>
+            </a:pPr>
+            <a:r>
+              <a:rPr lang="en-US" sz="1800" b="1" dirty="0">
+                <a:solidFill>
+                  <a:schemeClr val="tx1"/>
+                </a:solidFill>
+              </a:rPr>
+              <a:t>BCE · clase</a:t>
+            </a:r>
+            <a:endParaRPr lang="en-US" sz="1400" dirty="0"/>
+          </a:p>
+          <a:p>
+            <a:pPr indent="0" marL="0">
+              <a:spcAft>
+                <a:spcPts val="400"/>
+              </a:spcAft>
+              <a:buNone/>
+            </a:pPr>
+            <a:r>
+              <a:rPr lang="en-US" sz="1400" dirty="0">
+                <a:solidFill>
+                  <a:schemeClr val="tx2"/>
+                </a:solidFill>
+              </a:rPr>
+              <a:t>Entropía cruzada binaria por clase.</a:t>
+            </a:r>
+            <a:endParaRPr lang="en-US" sz="1400" dirty="0"/>
+          </a:p>
+        </p:txBody>
+      </p:sp>
+      <p:sp>
+        <p:nvSpPr>
+          <p:cNvPr id="12" name="Shape 9"/>
+          <p:cNvSpPr/>
+          <p:nvPr/>
+        </p:nvSpPr>
+        <p:spPr>
+          <a:xfrm>
+            <a:off x="7863840" y="2697480"/>
+            <a:ext cx="3291840" cy="1645920"/>
+          </a:xfrm>
+          <a:prstGeom prst="roundRect">
+            <a:avLst>
+              <a:gd name="adj" fmla="val 6667"/>
+            </a:avLst>
+          </a:prstGeom>
+          <a:solidFill>
+            <a:schemeClr val="bg1"/>
+          </a:solidFill>
+          <a:ln w="15875">
+            <a:solidFill>
+              <a:schemeClr val="accent1"/>
+            </a:solidFill>
+            <a:prstDash val="solid"/>
+          </a:ln>
+          <a:effectLst>
+            <a:outerShdw sx="100000" sy="100000" kx="0" ky="0" algn="bl" rotWithShape="0" blurRad="76200" dist="25400" dir="5400000">
+              <a:srgbClr val="000000">
+                <a:alpha val="12000"/>
+              </a:srgbClr>
+            </a:outerShdw>
+          </a:effectLst>
+        </p:spPr>
+      </p:sp>
+      <p:sp>
+        <p:nvSpPr>
+          <p:cNvPr id="13" name="Text 10"/>
+          <p:cNvSpPr txBox="1"/>
+          <p:nvPr/>
+        </p:nvSpPr>
+        <p:spPr>
+          <a:xfrm>
+            <a:off x="7955280" y="2697480"/>
+            <a:ext cx="1143000" cy="1645920"/>
+          </a:xfrm>
+          <a:prstGeom prst="rect">
+            <a:avLst/>
+          </a:prstGeom>
+          <a:noFill/>
+          <a:ln/>
+        </p:spPr>
+        <p:txBody>
+          <a:bodyPr wrap="square" lIns="0" tIns="0" rIns="0" bIns="0" rtlCol="0" anchor="ctr"/>
+          <a:lstStyle/>
+          <a:p>
+            <a:pPr algn="ctr" indent="0" marL="0">
+              <a:buNone/>
+            </a:pPr>
+            <a:r>
+              <a:rPr lang="en-US" sz="3800" b="1" dirty="0">
+                <a:solidFill>
+                  <a:schemeClr val="accent2"/>
+                </a:solidFill>
+              </a:rPr>
+              <a:t>1.5</a:t>
+            </a:r>
+            <a:endParaRPr lang="en-US" sz="3800" dirty="0"/>
+          </a:p>
+        </p:txBody>
+      </p:sp>
+      <p:sp>
+        <p:nvSpPr>
+          <p:cNvPr id="14" name="Text 11"/>
+          <p:cNvSpPr txBox="1"/>
+          <p:nvPr/>
+        </p:nvSpPr>
+        <p:spPr>
+          <a:xfrm>
+            <a:off x="9144000" y="2788920"/>
+            <a:ext cx="1920240" cy="1463040"/>
+          </a:xfrm>
+          <a:prstGeom prst="rect">
+            <a:avLst/>
+          </a:prstGeom>
+          <a:noFill/>
+          <a:ln/>
+        </p:spPr>
+        <p:txBody>
+          <a:bodyPr wrap="square" lIns="0" tIns="0" rIns="0" bIns="0" rtlCol="0" anchor="ctr"/>
+          <a:lstStyle/>
+          <a:p>
+            <a:pPr indent="0" marL="0">
+              <a:spcAft>
+                <a:spcPts val="400"/>
+              </a:spcAft>
+              <a:buNone/>
+            </a:pPr>
+            <a:r>
+              <a:rPr lang="en-US" sz="1800" b="1" dirty="0">
+                <a:solidFill>
+                  <a:schemeClr val="tx1"/>
+                </a:solidFill>
+              </a:rPr>
+              <a:t>DFL · bordes</a:t>
+            </a:r>
+            <a:endParaRPr lang="en-US" sz="1400" dirty="0"/>
+          </a:p>
+          <a:p>
+            <a:pPr indent="0" marL="0">
+              <a:spcAft>
+                <a:spcPts val="400"/>
+              </a:spcAft>
+              <a:buNone/>
+            </a:pPr>
+            <a:r>
+              <a:rPr lang="en-US" sz="1400" dirty="0">
+                <a:solidFill>
+                  <a:schemeClr val="tx2"/>
+                </a:solidFill>
+              </a:rPr>
+              <a:t>Afina los bordes de la caja.</a:t>
+            </a:r>
+            <a:endParaRPr lang="en-US" sz="1400" dirty="0"/>
+          </a:p>
+        </p:txBody>
+      </p:sp>
+      <p:sp>
+        <p:nvSpPr>
+          <p:cNvPr id="15" name="Shape 12"/>
+          <p:cNvSpPr/>
+          <p:nvPr/>
+        </p:nvSpPr>
+        <p:spPr>
+          <a:xfrm>
+            <a:off x="822960" y="4617720"/>
+            <a:ext cx="1600200" cy="1325880"/>
+          </a:xfrm>
+          <a:prstGeom prst="roundRect">
+            <a:avLst>
+              <a:gd name="adj" fmla="val 8276"/>
+            </a:avLst>
+          </a:prstGeom>
+          <a:solidFill>
+            <a:schemeClr val="bg1"/>
+          </a:solidFill>
+          <a:ln w="15875">
+            <a:solidFill>
+              <a:schemeClr val="accent1"/>
+            </a:solidFill>
+            <a:prstDash val="solid"/>
+          </a:ln>
+          <a:effectLst>
+            <a:outerShdw sx="100000" sy="100000" kx="0" ky="0" algn="bl" rotWithShape="0" blurRad="76200" dist="25400" dir="5400000">
+              <a:srgbClr val="000000">
+                <a:alpha val="12000"/>
+              </a:srgbClr>
+            </a:outerShdw>
+          </a:effectLst>
+        </p:spPr>
+      </p:sp>
+      <p:sp>
+        <p:nvSpPr>
+          <p:cNvPr id="16" name="Text 13"/>
+          <p:cNvSpPr txBox="1"/>
+          <p:nvPr/>
+        </p:nvSpPr>
+        <p:spPr>
+          <a:xfrm>
+            <a:off x="822960" y="4709160"/>
+            <a:ext cx="1600200" cy="685800"/>
+          </a:xfrm>
+          <a:prstGeom prst="rect">
+            <a:avLst/>
+          </a:prstGeom>
+          <a:noFill/>
+          <a:ln/>
+        </p:spPr>
+        <p:txBody>
+          <a:bodyPr wrap="square" lIns="0" tIns="0" rIns="0" bIns="0" rtlCol="0" anchor="ctr"/>
+          <a:lstStyle/>
+          <a:p>
+            <a:pPr algn="ctr" indent="0" marL="0">
+              <a:buNone/>
+            </a:pPr>
+            <a:r>
+              <a:rPr lang="en-US" sz="2600" b="1" dirty="0">
+                <a:solidFill>
+                  <a:schemeClr val="accent2"/>
+                </a:solidFill>
+              </a:rPr>
+              <a:t>100</a:t>
+            </a:r>
+            <a:endParaRPr lang="en-US" sz="2600" dirty="0"/>
+          </a:p>
+        </p:txBody>
+      </p:sp>
+      <p:sp>
+        <p:nvSpPr>
+          <p:cNvPr id="17" name="Text 14"/>
+          <p:cNvSpPr txBox="1"/>
+          <p:nvPr/>
+        </p:nvSpPr>
+        <p:spPr>
+          <a:xfrm>
+            <a:off x="822960" y="5440680"/>
+            <a:ext cx="1600200" cy="320040"/>
           </a:xfrm>
           <a:prstGeom prst="rect">
             <a:avLst/>
@@ -7328,31 +7527,65 @@
           <a:bodyPr wrap="square" lIns="0" tIns="0" rIns="0" bIns="0" rtlCol="0" anchor="t"/>
           <a:lstStyle/>
           <a:p>
-            <a:pPr indent="0" marL="0">
+            <a:pPr algn="ctr" indent="0" marL="0">
               <a:buNone/>
             </a:pPr>
             <a:r>
-              <a:rPr lang="en-US" sz="1800" b="1" dirty="0">
-                <a:solidFill>
-                  <a:schemeClr val="accent2"/>
-                </a:solidFill>
-              </a:rPr>
-              <a:t>División por secuencia de video</a:t>
-            </a:r>
-            <a:endParaRPr lang="en-US" sz="1800" dirty="0"/>
+              <a:rPr lang="en-US" sz="1400" dirty="0">
+                <a:solidFill>
+                  <a:schemeClr val="tx2"/>
+                </a:solidFill>
+              </a:rPr>
+              <a:t>épocas máx.</a:t>
+            </a:r>
+            <a:endParaRPr lang="en-US" sz="1400" dirty="0"/>
           </a:p>
         </p:txBody>
       </p:sp>
       <p:sp>
         <p:nvSpPr>
-          <p:cNvPr id="14" name="Text 10"/>
+          <p:cNvPr id="18" name="Shape 15"/>
+          <p:cNvSpPr/>
+          <p:nvPr/>
+        </p:nvSpPr>
+        <p:spPr>
+          <a:xfrm>
+            <a:off x="2569464" y="4617720"/>
+            <a:ext cx="1600200" cy="1325880"/>
+          </a:xfrm>
+          <a:prstGeom prst="roundRect">
+            <a:avLst>
+              <a:gd name="adj" fmla="val 8276"/>
+            </a:avLst>
+          </a:prstGeom>
+          <a:solidFill>
+            <a:schemeClr val="bg1"/>
+          </a:solidFill>
+          <a:ln w="15875">
+            <a:solidFill>
+              <a:schemeClr val="accent1"/>
+            </a:solidFill>
+            <a:prstDash val="solid"/>
+          </a:ln>
+          <a:effectLst>
+            <a:outerShdw sx="100000" sy="100000" kx="0" ky="0" algn="bl" rotWithShape="0" blurRad="76200" dist="25400" dir="5400000">
+              <a:srgbClr val="000000">
+                <a:alpha val="12000"/>
+              </a:srgbClr>
+            </a:outerShdw>
+          </a:effectLst>
+        </p:spPr>
+      </p:sp>
+      <p:sp>
+        <p:nvSpPr>
+          <p:cNvPr id="19" name="Text 16"/>
           <p:cNvSpPr txBox="1"/>
           <p:nvPr/>
         </p:nvSpPr>
         <p:spPr>
           <a:xfrm>
-            <a:off x="7086600" y="3520440"/>
-            <a:ext cx="822960" cy="310896"/>
+            <a:off x="2569464" y="4709160"/>
+            <a:ext cx="1600200" cy="685800"/>
           </a:xfrm>
           <a:prstGeom prst="rect">
             <a:avLst/>
@@ -7364,331 +7597,101 @@
           <a:bodyPr wrap="square" lIns="0" tIns="0" rIns="0" bIns="0" rtlCol="0" anchor="ctr"/>
           <a:lstStyle/>
           <a:p>
-            <a:pPr indent="0" marL="0">
+            <a:pPr algn="ctr" indent="0" marL="0">
               <a:buNone/>
             </a:pPr>
             <a:r>
-              <a:rPr lang="en-US" sz="1200" dirty="0">
+              <a:rPr lang="en-US" sz="2600" b="1" dirty="0">
+                <a:solidFill>
+                  <a:schemeClr val="accent2"/>
+                </a:solidFill>
+              </a:rPr>
+              <a:t>16</a:t>
+            </a:r>
+            <a:endParaRPr lang="en-US" sz="2600" dirty="0"/>
+          </a:p>
+        </p:txBody>
+      </p:sp>
+      <p:sp>
+        <p:nvSpPr>
+          <p:cNvPr id="20" name="Text 17"/>
+          <p:cNvSpPr txBox="1"/>
+          <p:nvPr/>
+        </p:nvSpPr>
+        <p:spPr>
+          <a:xfrm>
+            <a:off x="2569464" y="5440680"/>
+            <a:ext cx="1600200" cy="320040"/>
+          </a:xfrm>
+          <a:prstGeom prst="rect">
+            <a:avLst/>
+          </a:prstGeom>
+          <a:noFill/>
+          <a:ln/>
+        </p:spPr>
+        <p:txBody>
+          <a:bodyPr wrap="square" lIns="0" tIns="0" rIns="0" bIns="0" rtlCol="0" anchor="t"/>
+          <a:lstStyle/>
+          <a:p>
+            <a:pPr algn="ctr" indent="0" marL="0">
+              <a:buNone/>
+            </a:pPr>
+            <a:r>
+              <a:rPr lang="en-US" sz="1400" dirty="0">
                 <a:solidFill>
                   <a:schemeClr val="tx2"/>
                 </a:solidFill>
               </a:rPr>
-              <a:t>Video 1</a:t>
-            </a:r>
-            <a:endParaRPr lang="en-US" sz="1200" dirty="0"/>
+              <a:t>lote</a:t>
+            </a:r>
+            <a:endParaRPr lang="en-US" sz="1400" dirty="0"/>
           </a:p>
         </p:txBody>
       </p:sp>
       <p:sp>
         <p:nvSpPr>
-          <p:cNvPr id="15" name="Shape 11"/>
-          <p:cNvSpPr/>
-          <p:nvPr/>
-        </p:nvSpPr>
-        <p:spPr>
-          <a:xfrm>
-            <a:off x="7863840" y="3538728"/>
-            <a:ext cx="201168" cy="274320"/>
-          </a:xfrm>
-          <a:prstGeom prst="rect">
-            <a:avLst/>
-          </a:prstGeom>
-          <a:solidFill>
-            <a:schemeClr val="accent1"/>
-          </a:solidFill>
-          <a:ln w="6350">
+          <p:cNvPr id="21" name="Shape 18"/>
+          <p:cNvSpPr/>
+          <p:nvPr/>
+        </p:nvSpPr>
+        <p:spPr>
+          <a:xfrm>
+            <a:off x="4315968" y="4617720"/>
+            <a:ext cx="1600200" cy="1325880"/>
+          </a:xfrm>
+          <a:prstGeom prst="roundRect">
+            <a:avLst>
+              <a:gd name="adj" fmla="val 8276"/>
+            </a:avLst>
+          </a:prstGeom>
+          <a:solidFill>
+            <a:schemeClr val="bg1"/>
+          </a:solidFill>
+          <a:ln w="15875">
             <a:solidFill>
               <a:schemeClr val="accent1"/>
             </a:solidFill>
             <a:prstDash val="solid"/>
           </a:ln>
-        </p:spPr>
-      </p:sp>
-      <p:sp>
-        <p:nvSpPr>
-          <p:cNvPr id="16" name="Shape 12"/>
-          <p:cNvSpPr/>
-          <p:nvPr/>
-        </p:nvSpPr>
-        <p:spPr>
-          <a:xfrm>
-            <a:off x="8119872" y="3538728"/>
-            <a:ext cx="201168" cy="274320"/>
-          </a:xfrm>
-          <a:prstGeom prst="rect">
-            <a:avLst/>
-          </a:prstGeom>
-          <a:solidFill>
-            <a:schemeClr val="accent1"/>
-          </a:solidFill>
-          <a:ln w="6350">
-            <a:solidFill>
-              <a:schemeClr val="accent1"/>
-            </a:solidFill>
-            <a:prstDash val="solid"/>
-          </a:ln>
-        </p:spPr>
-      </p:sp>
-      <p:sp>
-        <p:nvSpPr>
-          <p:cNvPr id="17" name="Shape 13"/>
-          <p:cNvSpPr/>
-          <p:nvPr/>
-        </p:nvSpPr>
-        <p:spPr>
-          <a:xfrm>
-            <a:off x="8375904" y="3538728"/>
-            <a:ext cx="201168" cy="274320"/>
-          </a:xfrm>
-          <a:prstGeom prst="rect">
-            <a:avLst/>
-          </a:prstGeom>
-          <a:solidFill>
-            <a:schemeClr val="accent1"/>
-          </a:solidFill>
-          <a:ln w="6350">
-            <a:solidFill>
-              <a:schemeClr val="accent1"/>
-            </a:solidFill>
-            <a:prstDash val="solid"/>
-          </a:ln>
-        </p:spPr>
-      </p:sp>
-      <p:sp>
-        <p:nvSpPr>
-          <p:cNvPr id="18" name="Shape 14"/>
-          <p:cNvSpPr/>
-          <p:nvPr/>
-        </p:nvSpPr>
-        <p:spPr>
-          <a:xfrm>
-            <a:off x="8631936" y="3538728"/>
-            <a:ext cx="201168" cy="274320"/>
-          </a:xfrm>
-          <a:prstGeom prst="rect">
-            <a:avLst/>
-          </a:prstGeom>
-          <a:solidFill>
-            <a:schemeClr val="accent1"/>
-          </a:solidFill>
-          <a:ln w="6350">
-            <a:solidFill>
-              <a:schemeClr val="accent1"/>
-            </a:solidFill>
-            <a:prstDash val="solid"/>
-          </a:ln>
-        </p:spPr>
-      </p:sp>
-      <p:sp>
-        <p:nvSpPr>
-          <p:cNvPr id="19" name="Shape 15"/>
-          <p:cNvSpPr/>
-          <p:nvPr/>
-        </p:nvSpPr>
-        <p:spPr>
-          <a:xfrm>
-            <a:off x="8887968" y="3538728"/>
-            <a:ext cx="201168" cy="274320"/>
-          </a:xfrm>
-          <a:prstGeom prst="rect">
-            <a:avLst/>
-          </a:prstGeom>
-          <a:solidFill>
-            <a:schemeClr val="accent1"/>
-          </a:solidFill>
-          <a:ln w="6350">
-            <a:solidFill>
-              <a:schemeClr val="accent1"/>
-            </a:solidFill>
-            <a:prstDash val="solid"/>
-          </a:ln>
-        </p:spPr>
-      </p:sp>
-      <p:sp>
-        <p:nvSpPr>
-          <p:cNvPr id="20" name="Shape 16"/>
-          <p:cNvSpPr/>
-          <p:nvPr/>
-        </p:nvSpPr>
-        <p:spPr>
-          <a:xfrm>
-            <a:off x="9144000" y="3538728"/>
-            <a:ext cx="201168" cy="274320"/>
-          </a:xfrm>
-          <a:prstGeom prst="rect">
-            <a:avLst/>
-          </a:prstGeom>
-          <a:solidFill>
-            <a:schemeClr val="accent1"/>
-          </a:solidFill>
-          <a:ln w="6350">
-            <a:solidFill>
-              <a:schemeClr val="accent1"/>
-            </a:solidFill>
-            <a:prstDash val="solid"/>
-          </a:ln>
-        </p:spPr>
-      </p:sp>
-      <p:sp>
-        <p:nvSpPr>
-          <p:cNvPr id="21" name="Shape 17"/>
-          <p:cNvSpPr/>
-          <p:nvPr/>
-        </p:nvSpPr>
-        <p:spPr>
-          <a:xfrm>
-            <a:off x="9400032" y="3538728"/>
-            <a:ext cx="201168" cy="274320"/>
-          </a:xfrm>
-          <a:prstGeom prst="rect">
-            <a:avLst/>
-          </a:prstGeom>
-          <a:solidFill>
-            <a:schemeClr val="accent1"/>
-          </a:solidFill>
-          <a:ln w="6350">
-            <a:solidFill>
-              <a:schemeClr val="accent1"/>
-            </a:solidFill>
-            <a:prstDash val="solid"/>
-          </a:ln>
-        </p:spPr>
-      </p:sp>
-      <p:sp>
-        <p:nvSpPr>
-          <p:cNvPr id="22" name="Shape 18"/>
-          <p:cNvSpPr/>
-          <p:nvPr/>
-        </p:nvSpPr>
-        <p:spPr>
-          <a:xfrm>
-            <a:off x="9656064" y="3538728"/>
-            <a:ext cx="201168" cy="274320"/>
-          </a:xfrm>
-          <a:prstGeom prst="rect">
-            <a:avLst/>
-          </a:prstGeom>
-          <a:solidFill>
-            <a:schemeClr val="accent1"/>
-          </a:solidFill>
-          <a:ln w="6350">
-            <a:solidFill>
-              <a:schemeClr val="accent1"/>
-            </a:solidFill>
-            <a:prstDash val="solid"/>
-          </a:ln>
-        </p:spPr>
-      </p:sp>
-      <p:sp>
-        <p:nvSpPr>
-          <p:cNvPr id="23" name="Shape 19"/>
-          <p:cNvSpPr/>
-          <p:nvPr/>
-        </p:nvSpPr>
-        <p:spPr>
-          <a:xfrm>
-            <a:off x="9912096" y="3538728"/>
-            <a:ext cx="201168" cy="274320"/>
-          </a:xfrm>
-          <a:prstGeom prst="rect">
-            <a:avLst/>
-          </a:prstGeom>
-          <a:solidFill>
-            <a:schemeClr val="accent1"/>
-          </a:solidFill>
-          <a:ln w="6350">
-            <a:solidFill>
-              <a:schemeClr val="accent1"/>
-            </a:solidFill>
-            <a:prstDash val="solid"/>
-          </a:ln>
-        </p:spPr>
-      </p:sp>
-      <p:sp>
-        <p:nvSpPr>
-          <p:cNvPr id="24" name="Shape 20"/>
-          <p:cNvSpPr/>
-          <p:nvPr/>
-        </p:nvSpPr>
-        <p:spPr>
-          <a:xfrm>
-            <a:off x="10168128" y="3538728"/>
-            <a:ext cx="201168" cy="274320"/>
-          </a:xfrm>
-          <a:prstGeom prst="rect">
-            <a:avLst/>
-          </a:prstGeom>
-          <a:solidFill>
-            <a:schemeClr val="accent1"/>
-          </a:solidFill>
-          <a:ln w="6350">
-            <a:solidFill>
-              <a:schemeClr val="accent1"/>
-            </a:solidFill>
-            <a:prstDash val="solid"/>
-          </a:ln>
-        </p:spPr>
-      </p:sp>
-      <p:sp>
-        <p:nvSpPr>
-          <p:cNvPr id="25" name="Shape 21"/>
-          <p:cNvSpPr/>
-          <p:nvPr/>
-        </p:nvSpPr>
-        <p:spPr>
-          <a:xfrm>
-            <a:off x="10424160" y="3538728"/>
-            <a:ext cx="201168" cy="274320"/>
-          </a:xfrm>
-          <a:prstGeom prst="rect">
-            <a:avLst/>
-          </a:prstGeom>
-          <a:solidFill>
-            <a:schemeClr val="accent1"/>
-          </a:solidFill>
-          <a:ln w="6350">
-            <a:solidFill>
-              <a:schemeClr val="accent1"/>
-            </a:solidFill>
-            <a:prstDash val="solid"/>
-          </a:ln>
-        </p:spPr>
-      </p:sp>
-      <p:sp>
-        <p:nvSpPr>
-          <p:cNvPr id="26" name="Shape 22"/>
-          <p:cNvSpPr/>
-          <p:nvPr/>
-        </p:nvSpPr>
-        <p:spPr>
-          <a:xfrm>
-            <a:off x="10680192" y="3538728"/>
-            <a:ext cx="201168" cy="274320"/>
-          </a:xfrm>
-          <a:prstGeom prst="rect">
-            <a:avLst/>
-          </a:prstGeom>
-          <a:solidFill>
-            <a:schemeClr val="accent1"/>
-          </a:solidFill>
-          <a:ln w="6350">
-            <a:solidFill>
-              <a:schemeClr val="accent1"/>
-            </a:solidFill>
-            <a:prstDash val="solid"/>
-          </a:ln>
-        </p:spPr>
-      </p:sp>
-      <p:sp>
-        <p:nvSpPr>
-          <p:cNvPr id="27" name="Text 23"/>
+          <a:effectLst>
+            <a:outerShdw sx="100000" sy="100000" kx="0" ky="0" algn="bl" rotWithShape="0" blurRad="76200" dist="25400" dir="5400000">
+              <a:srgbClr val="000000">
+                <a:alpha val="12000"/>
+              </a:srgbClr>
+            </a:outerShdw>
+          </a:effectLst>
+        </p:spPr>
+      </p:sp>
+      <p:sp>
+        <p:nvSpPr>
+          <p:cNvPr id="22" name="Text 19"/>
           <p:cNvSpPr txBox="1"/>
           <p:nvPr/>
         </p:nvSpPr>
         <p:spPr>
           <a:xfrm>
-            <a:off x="7086600" y="3931920"/>
-            <a:ext cx="822960" cy="310896"/>
+            <a:off x="4315968" y="4709160"/>
+            <a:ext cx="1600200" cy="685800"/>
           </a:xfrm>
           <a:prstGeom prst="rect">
             <a:avLst/>
@@ -7700,331 +7703,101 @@
           <a:bodyPr wrap="square" lIns="0" tIns="0" rIns="0" bIns="0" rtlCol="0" anchor="ctr"/>
           <a:lstStyle/>
           <a:p>
-            <a:pPr indent="0" marL="0">
+            <a:pPr algn="ctr" indent="0" marL="0">
               <a:buNone/>
             </a:pPr>
             <a:r>
-              <a:rPr lang="en-US" sz="1200" dirty="0">
+              <a:rPr lang="en-US" sz="2600" b="1" dirty="0">
+                <a:solidFill>
+                  <a:schemeClr val="accent2"/>
+                </a:solidFill>
+              </a:rPr>
+              <a:t>640 px</a:t>
+            </a:r>
+            <a:endParaRPr lang="en-US" sz="2600" dirty="0"/>
+          </a:p>
+        </p:txBody>
+      </p:sp>
+      <p:sp>
+        <p:nvSpPr>
+          <p:cNvPr id="23" name="Text 20"/>
+          <p:cNvSpPr txBox="1"/>
+          <p:nvPr/>
+        </p:nvSpPr>
+        <p:spPr>
+          <a:xfrm>
+            <a:off x="4315968" y="5440680"/>
+            <a:ext cx="1600200" cy="320040"/>
+          </a:xfrm>
+          <a:prstGeom prst="rect">
+            <a:avLst/>
+          </a:prstGeom>
+          <a:noFill/>
+          <a:ln/>
+        </p:spPr>
+        <p:txBody>
+          <a:bodyPr wrap="square" lIns="0" tIns="0" rIns="0" bIns="0" rtlCol="0" anchor="t"/>
+          <a:lstStyle/>
+          <a:p>
+            <a:pPr algn="ctr" indent="0" marL="0">
+              <a:buNone/>
+            </a:pPr>
+            <a:r>
+              <a:rPr lang="en-US" sz="1400" dirty="0">
                 <a:solidFill>
                   <a:schemeClr val="tx2"/>
                 </a:solidFill>
               </a:rPr>
-              <a:t>Video 2</a:t>
-            </a:r>
-            <a:endParaRPr lang="en-US" sz="1200" dirty="0"/>
+              <a:t>imagen</a:t>
+            </a:r>
+            <a:endParaRPr lang="en-US" sz="1400" dirty="0"/>
           </a:p>
         </p:txBody>
       </p:sp>
       <p:sp>
         <p:nvSpPr>
-          <p:cNvPr id="28" name="Shape 24"/>
-          <p:cNvSpPr/>
-          <p:nvPr/>
-        </p:nvSpPr>
-        <p:spPr>
-          <a:xfrm>
-            <a:off x="7863840" y="3950208"/>
-            <a:ext cx="201168" cy="274320"/>
-          </a:xfrm>
-          <a:prstGeom prst="rect">
-            <a:avLst/>
-          </a:prstGeom>
-          <a:solidFill>
-            <a:schemeClr val="accent1"/>
-          </a:solidFill>
-          <a:ln w="6350">
+          <p:cNvPr id="24" name="Shape 21"/>
+          <p:cNvSpPr/>
+          <p:nvPr/>
+        </p:nvSpPr>
+        <p:spPr>
+          <a:xfrm>
+            <a:off x="6062472" y="4617720"/>
+            <a:ext cx="1600200" cy="1325880"/>
+          </a:xfrm>
+          <a:prstGeom prst="roundRect">
+            <a:avLst>
+              <a:gd name="adj" fmla="val 8276"/>
+            </a:avLst>
+          </a:prstGeom>
+          <a:solidFill>
+            <a:schemeClr val="bg1"/>
+          </a:solidFill>
+          <a:ln w="15875">
             <a:solidFill>
               <a:schemeClr val="accent1"/>
             </a:solidFill>
             <a:prstDash val="solid"/>
           </a:ln>
-        </p:spPr>
-      </p:sp>
-      <p:sp>
-        <p:nvSpPr>
-          <p:cNvPr id="29" name="Shape 25"/>
-          <p:cNvSpPr/>
-          <p:nvPr/>
-        </p:nvSpPr>
-        <p:spPr>
-          <a:xfrm>
-            <a:off x="8119872" y="3950208"/>
-            <a:ext cx="201168" cy="274320"/>
-          </a:xfrm>
-          <a:prstGeom prst="rect">
-            <a:avLst/>
-          </a:prstGeom>
-          <a:solidFill>
-            <a:schemeClr val="accent1"/>
-          </a:solidFill>
-          <a:ln w="6350">
-            <a:solidFill>
-              <a:schemeClr val="accent1"/>
-            </a:solidFill>
-            <a:prstDash val="solid"/>
-          </a:ln>
-        </p:spPr>
-      </p:sp>
-      <p:sp>
-        <p:nvSpPr>
-          <p:cNvPr id="30" name="Shape 26"/>
-          <p:cNvSpPr/>
-          <p:nvPr/>
-        </p:nvSpPr>
-        <p:spPr>
-          <a:xfrm>
-            <a:off x="8375904" y="3950208"/>
-            <a:ext cx="201168" cy="274320"/>
-          </a:xfrm>
-          <a:prstGeom prst="rect">
-            <a:avLst/>
-          </a:prstGeom>
-          <a:solidFill>
-            <a:schemeClr val="accent1"/>
-          </a:solidFill>
-          <a:ln w="6350">
-            <a:solidFill>
-              <a:schemeClr val="accent1"/>
-            </a:solidFill>
-            <a:prstDash val="solid"/>
-          </a:ln>
-        </p:spPr>
-      </p:sp>
-      <p:sp>
-        <p:nvSpPr>
-          <p:cNvPr id="31" name="Shape 27"/>
-          <p:cNvSpPr/>
-          <p:nvPr/>
-        </p:nvSpPr>
-        <p:spPr>
-          <a:xfrm>
-            <a:off x="8631936" y="3950208"/>
-            <a:ext cx="201168" cy="274320"/>
-          </a:xfrm>
-          <a:prstGeom prst="rect">
-            <a:avLst/>
-          </a:prstGeom>
-          <a:solidFill>
-            <a:schemeClr val="accent1"/>
-          </a:solidFill>
-          <a:ln w="6350">
-            <a:solidFill>
-              <a:schemeClr val="accent1"/>
-            </a:solidFill>
-            <a:prstDash val="solid"/>
-          </a:ln>
-        </p:spPr>
-      </p:sp>
-      <p:sp>
-        <p:nvSpPr>
-          <p:cNvPr id="32" name="Shape 28"/>
-          <p:cNvSpPr/>
-          <p:nvPr/>
-        </p:nvSpPr>
-        <p:spPr>
-          <a:xfrm>
-            <a:off x="8887968" y="3950208"/>
-            <a:ext cx="201168" cy="274320"/>
-          </a:xfrm>
-          <a:prstGeom prst="rect">
-            <a:avLst/>
-          </a:prstGeom>
-          <a:solidFill>
-            <a:schemeClr val="accent1"/>
-          </a:solidFill>
-          <a:ln w="6350">
-            <a:solidFill>
-              <a:schemeClr val="accent1"/>
-            </a:solidFill>
-            <a:prstDash val="solid"/>
-          </a:ln>
-        </p:spPr>
-      </p:sp>
-      <p:sp>
-        <p:nvSpPr>
-          <p:cNvPr id="33" name="Shape 29"/>
-          <p:cNvSpPr/>
-          <p:nvPr/>
-        </p:nvSpPr>
-        <p:spPr>
-          <a:xfrm>
-            <a:off x="9144000" y="3950208"/>
-            <a:ext cx="201168" cy="274320"/>
-          </a:xfrm>
-          <a:prstGeom prst="rect">
-            <a:avLst/>
-          </a:prstGeom>
-          <a:solidFill>
-            <a:schemeClr val="accent1"/>
-          </a:solidFill>
-          <a:ln w="6350">
-            <a:solidFill>
-              <a:schemeClr val="accent1"/>
-            </a:solidFill>
-            <a:prstDash val="solid"/>
-          </a:ln>
-        </p:spPr>
-      </p:sp>
-      <p:sp>
-        <p:nvSpPr>
-          <p:cNvPr id="34" name="Shape 30"/>
-          <p:cNvSpPr/>
-          <p:nvPr/>
-        </p:nvSpPr>
-        <p:spPr>
-          <a:xfrm>
-            <a:off x="9400032" y="3950208"/>
-            <a:ext cx="201168" cy="274320"/>
-          </a:xfrm>
-          <a:prstGeom prst="rect">
-            <a:avLst/>
-          </a:prstGeom>
-          <a:solidFill>
-            <a:schemeClr val="accent1"/>
-          </a:solidFill>
-          <a:ln w="6350">
-            <a:solidFill>
-              <a:schemeClr val="accent1"/>
-            </a:solidFill>
-            <a:prstDash val="solid"/>
-          </a:ln>
-        </p:spPr>
-      </p:sp>
-      <p:sp>
-        <p:nvSpPr>
-          <p:cNvPr id="35" name="Shape 31"/>
-          <p:cNvSpPr/>
-          <p:nvPr/>
-        </p:nvSpPr>
-        <p:spPr>
-          <a:xfrm>
-            <a:off x="9656064" y="3950208"/>
-            <a:ext cx="201168" cy="274320"/>
-          </a:xfrm>
-          <a:prstGeom prst="rect">
-            <a:avLst/>
-          </a:prstGeom>
-          <a:solidFill>
-            <a:schemeClr val="accent1"/>
-          </a:solidFill>
-          <a:ln w="6350">
-            <a:solidFill>
-              <a:schemeClr val="accent1"/>
-            </a:solidFill>
-            <a:prstDash val="solid"/>
-          </a:ln>
-        </p:spPr>
-      </p:sp>
-      <p:sp>
-        <p:nvSpPr>
-          <p:cNvPr id="36" name="Shape 32"/>
-          <p:cNvSpPr/>
-          <p:nvPr/>
-        </p:nvSpPr>
-        <p:spPr>
-          <a:xfrm>
-            <a:off x="9912096" y="3950208"/>
-            <a:ext cx="201168" cy="274320"/>
-          </a:xfrm>
-          <a:prstGeom prst="rect">
-            <a:avLst/>
-          </a:prstGeom>
-          <a:solidFill>
-            <a:schemeClr val="accent1"/>
-          </a:solidFill>
-          <a:ln w="6350">
-            <a:solidFill>
-              <a:schemeClr val="accent1"/>
-            </a:solidFill>
-            <a:prstDash val="solid"/>
-          </a:ln>
-        </p:spPr>
-      </p:sp>
-      <p:sp>
-        <p:nvSpPr>
-          <p:cNvPr id="37" name="Shape 33"/>
-          <p:cNvSpPr/>
-          <p:nvPr/>
-        </p:nvSpPr>
-        <p:spPr>
-          <a:xfrm>
-            <a:off x="10168128" y="3950208"/>
-            <a:ext cx="201168" cy="274320"/>
-          </a:xfrm>
-          <a:prstGeom prst="rect">
-            <a:avLst/>
-          </a:prstGeom>
-          <a:solidFill>
-            <a:schemeClr val="accent1"/>
-          </a:solidFill>
-          <a:ln w="6350">
-            <a:solidFill>
-              <a:schemeClr val="accent1"/>
-            </a:solidFill>
-            <a:prstDash val="solid"/>
-          </a:ln>
-        </p:spPr>
-      </p:sp>
-      <p:sp>
-        <p:nvSpPr>
-          <p:cNvPr id="38" name="Shape 34"/>
-          <p:cNvSpPr/>
-          <p:nvPr/>
-        </p:nvSpPr>
-        <p:spPr>
-          <a:xfrm>
-            <a:off x="10424160" y="3950208"/>
-            <a:ext cx="201168" cy="274320"/>
-          </a:xfrm>
-          <a:prstGeom prst="rect">
-            <a:avLst/>
-          </a:prstGeom>
-          <a:solidFill>
-            <a:schemeClr val="accent1"/>
-          </a:solidFill>
-          <a:ln w="6350">
-            <a:solidFill>
-              <a:schemeClr val="accent1"/>
-            </a:solidFill>
-            <a:prstDash val="solid"/>
-          </a:ln>
-        </p:spPr>
-      </p:sp>
-      <p:sp>
-        <p:nvSpPr>
-          <p:cNvPr id="39" name="Shape 35"/>
-          <p:cNvSpPr/>
-          <p:nvPr/>
-        </p:nvSpPr>
-        <p:spPr>
-          <a:xfrm>
-            <a:off x="10680192" y="3950208"/>
-            <a:ext cx="201168" cy="274320"/>
-          </a:xfrm>
-          <a:prstGeom prst="rect">
-            <a:avLst/>
-          </a:prstGeom>
-          <a:solidFill>
-            <a:schemeClr val="accent1"/>
-          </a:solidFill>
-          <a:ln w="6350">
-            <a:solidFill>
-              <a:schemeClr val="accent1"/>
-            </a:solidFill>
-            <a:prstDash val="solid"/>
-          </a:ln>
-        </p:spPr>
-      </p:sp>
-      <p:sp>
-        <p:nvSpPr>
-          <p:cNvPr id="40" name="Text 36"/>
+          <a:effectLst>
+            <a:outerShdw sx="100000" sy="100000" kx="0" ky="0" algn="bl" rotWithShape="0" blurRad="76200" dist="25400" dir="5400000">
+              <a:srgbClr val="000000">
+                <a:alpha val="12000"/>
+              </a:srgbClr>
+            </a:outerShdw>
+          </a:effectLst>
+        </p:spPr>
+      </p:sp>
+      <p:sp>
+        <p:nvSpPr>
+          <p:cNvPr id="25" name="Text 22"/>
           <p:cNvSpPr txBox="1"/>
           <p:nvPr/>
         </p:nvSpPr>
         <p:spPr>
           <a:xfrm>
-            <a:off x="7086600" y="4343400"/>
-            <a:ext cx="822960" cy="310896"/>
+            <a:off x="6062472" y="4709160"/>
+            <a:ext cx="1600200" cy="685800"/>
           </a:xfrm>
           <a:prstGeom prst="rect">
             <a:avLst/>
@@ -8036,331 +7809,31 @@
           <a:bodyPr wrap="square" lIns="0" tIns="0" rIns="0" bIns="0" rtlCol="0" anchor="ctr"/>
           <a:lstStyle/>
           <a:p>
-            <a:pPr indent="0" marL="0">
+            <a:pPr algn="ctr" indent="0" marL="0">
               <a:buNone/>
             </a:pPr>
             <a:r>
-              <a:rPr lang="en-US" sz="1200" dirty="0">
-                <a:solidFill>
-                  <a:schemeClr val="tx2"/>
-                </a:solidFill>
-              </a:rPr>
-              <a:t>Video 3</a:t>
-            </a:r>
-            <a:endParaRPr lang="en-US" sz="1200" dirty="0"/>
+              <a:rPr lang="en-US" sz="2600" b="1" dirty="0">
+                <a:solidFill>
+                  <a:schemeClr val="accent2"/>
+                </a:solidFill>
+              </a:rPr>
+              <a:t>20</a:t>
+            </a:r>
+            <a:endParaRPr lang="en-US" sz="2600" dirty="0"/>
           </a:p>
         </p:txBody>
       </p:sp>
       <p:sp>
         <p:nvSpPr>
-          <p:cNvPr id="41" name="Shape 37"/>
-          <p:cNvSpPr/>
-          <p:nvPr/>
-        </p:nvSpPr>
-        <p:spPr>
-          <a:xfrm>
-            <a:off x="7863840" y="4361688"/>
-            <a:ext cx="201168" cy="274320"/>
-          </a:xfrm>
-          <a:prstGeom prst="rect">
-            <a:avLst/>
-          </a:prstGeom>
-          <a:solidFill>
-            <a:schemeClr val="accent3"/>
-          </a:solidFill>
-          <a:ln w="6350">
-            <a:solidFill>
-              <a:schemeClr val="accent3"/>
-            </a:solidFill>
-            <a:prstDash val="solid"/>
-          </a:ln>
-        </p:spPr>
-      </p:sp>
-      <p:sp>
-        <p:nvSpPr>
-          <p:cNvPr id="42" name="Shape 38"/>
-          <p:cNvSpPr/>
-          <p:nvPr/>
-        </p:nvSpPr>
-        <p:spPr>
-          <a:xfrm>
-            <a:off x="8119872" y="4361688"/>
-            <a:ext cx="201168" cy="274320"/>
-          </a:xfrm>
-          <a:prstGeom prst="rect">
-            <a:avLst/>
-          </a:prstGeom>
-          <a:solidFill>
-            <a:schemeClr val="accent3"/>
-          </a:solidFill>
-          <a:ln w="6350">
-            <a:solidFill>
-              <a:schemeClr val="accent3"/>
-            </a:solidFill>
-            <a:prstDash val="solid"/>
-          </a:ln>
-        </p:spPr>
-      </p:sp>
-      <p:sp>
-        <p:nvSpPr>
-          <p:cNvPr id="43" name="Shape 39"/>
-          <p:cNvSpPr/>
-          <p:nvPr/>
-        </p:nvSpPr>
-        <p:spPr>
-          <a:xfrm>
-            <a:off x="8375904" y="4361688"/>
-            <a:ext cx="201168" cy="274320"/>
-          </a:xfrm>
-          <a:prstGeom prst="rect">
-            <a:avLst/>
-          </a:prstGeom>
-          <a:solidFill>
-            <a:schemeClr val="accent3"/>
-          </a:solidFill>
-          <a:ln w="6350">
-            <a:solidFill>
-              <a:schemeClr val="accent3"/>
-            </a:solidFill>
-            <a:prstDash val="solid"/>
-          </a:ln>
-        </p:spPr>
-      </p:sp>
-      <p:sp>
-        <p:nvSpPr>
-          <p:cNvPr id="44" name="Shape 40"/>
-          <p:cNvSpPr/>
-          <p:nvPr/>
-        </p:nvSpPr>
-        <p:spPr>
-          <a:xfrm>
-            <a:off x="8631936" y="4361688"/>
-            <a:ext cx="201168" cy="274320"/>
-          </a:xfrm>
-          <a:prstGeom prst="rect">
-            <a:avLst/>
-          </a:prstGeom>
-          <a:solidFill>
-            <a:schemeClr val="accent3"/>
-          </a:solidFill>
-          <a:ln w="6350">
-            <a:solidFill>
-              <a:schemeClr val="accent3"/>
-            </a:solidFill>
-            <a:prstDash val="solid"/>
-          </a:ln>
-        </p:spPr>
-      </p:sp>
-      <p:sp>
-        <p:nvSpPr>
-          <p:cNvPr id="45" name="Shape 41"/>
-          <p:cNvSpPr/>
-          <p:nvPr/>
-        </p:nvSpPr>
-        <p:spPr>
-          <a:xfrm>
-            <a:off x="8887968" y="4361688"/>
-            <a:ext cx="201168" cy="274320"/>
-          </a:xfrm>
-          <a:prstGeom prst="rect">
-            <a:avLst/>
-          </a:prstGeom>
-          <a:solidFill>
-            <a:schemeClr val="accent3"/>
-          </a:solidFill>
-          <a:ln w="6350">
-            <a:solidFill>
-              <a:schemeClr val="accent3"/>
-            </a:solidFill>
-            <a:prstDash val="solid"/>
-          </a:ln>
-        </p:spPr>
-      </p:sp>
-      <p:sp>
-        <p:nvSpPr>
-          <p:cNvPr id="46" name="Shape 42"/>
-          <p:cNvSpPr/>
-          <p:nvPr/>
-        </p:nvSpPr>
-        <p:spPr>
-          <a:xfrm>
-            <a:off x="9144000" y="4361688"/>
-            <a:ext cx="201168" cy="274320"/>
-          </a:xfrm>
-          <a:prstGeom prst="rect">
-            <a:avLst/>
-          </a:prstGeom>
-          <a:solidFill>
-            <a:schemeClr val="accent3"/>
-          </a:solidFill>
-          <a:ln w="6350">
-            <a:solidFill>
-              <a:schemeClr val="accent3"/>
-            </a:solidFill>
-            <a:prstDash val="solid"/>
-          </a:ln>
-        </p:spPr>
-      </p:sp>
-      <p:sp>
-        <p:nvSpPr>
-          <p:cNvPr id="47" name="Shape 43"/>
-          <p:cNvSpPr/>
-          <p:nvPr/>
-        </p:nvSpPr>
-        <p:spPr>
-          <a:xfrm>
-            <a:off x="9400032" y="4361688"/>
-            <a:ext cx="201168" cy="274320"/>
-          </a:xfrm>
-          <a:prstGeom prst="rect">
-            <a:avLst/>
-          </a:prstGeom>
-          <a:solidFill>
-            <a:schemeClr val="accent3"/>
-          </a:solidFill>
-          <a:ln w="6350">
-            <a:solidFill>
-              <a:schemeClr val="accent3"/>
-            </a:solidFill>
-            <a:prstDash val="solid"/>
-          </a:ln>
-        </p:spPr>
-      </p:sp>
-      <p:sp>
-        <p:nvSpPr>
-          <p:cNvPr id="48" name="Shape 44"/>
-          <p:cNvSpPr/>
-          <p:nvPr/>
-        </p:nvSpPr>
-        <p:spPr>
-          <a:xfrm>
-            <a:off x="9656064" y="4361688"/>
-            <a:ext cx="201168" cy="274320"/>
-          </a:xfrm>
-          <a:prstGeom prst="rect">
-            <a:avLst/>
-          </a:prstGeom>
-          <a:solidFill>
-            <a:schemeClr val="accent3"/>
-          </a:solidFill>
-          <a:ln w="6350">
-            <a:solidFill>
-              <a:schemeClr val="accent3"/>
-            </a:solidFill>
-            <a:prstDash val="solid"/>
-          </a:ln>
-        </p:spPr>
-      </p:sp>
-      <p:sp>
-        <p:nvSpPr>
-          <p:cNvPr id="49" name="Shape 45"/>
-          <p:cNvSpPr/>
-          <p:nvPr/>
-        </p:nvSpPr>
-        <p:spPr>
-          <a:xfrm>
-            <a:off x="9912096" y="4361688"/>
-            <a:ext cx="201168" cy="274320"/>
-          </a:xfrm>
-          <a:prstGeom prst="rect">
-            <a:avLst/>
-          </a:prstGeom>
-          <a:solidFill>
-            <a:schemeClr val="accent3"/>
-          </a:solidFill>
-          <a:ln w="6350">
-            <a:solidFill>
-              <a:schemeClr val="accent3"/>
-            </a:solidFill>
-            <a:prstDash val="solid"/>
-          </a:ln>
-        </p:spPr>
-      </p:sp>
-      <p:sp>
-        <p:nvSpPr>
-          <p:cNvPr id="50" name="Shape 46"/>
-          <p:cNvSpPr/>
-          <p:nvPr/>
-        </p:nvSpPr>
-        <p:spPr>
-          <a:xfrm>
-            <a:off x="10168128" y="4361688"/>
-            <a:ext cx="201168" cy="274320"/>
-          </a:xfrm>
-          <a:prstGeom prst="rect">
-            <a:avLst/>
-          </a:prstGeom>
-          <a:solidFill>
-            <a:schemeClr val="accent3"/>
-          </a:solidFill>
-          <a:ln w="6350">
-            <a:solidFill>
-              <a:schemeClr val="accent3"/>
-            </a:solidFill>
-            <a:prstDash val="solid"/>
-          </a:ln>
-        </p:spPr>
-      </p:sp>
-      <p:sp>
-        <p:nvSpPr>
-          <p:cNvPr id="51" name="Shape 47"/>
-          <p:cNvSpPr/>
-          <p:nvPr/>
-        </p:nvSpPr>
-        <p:spPr>
-          <a:xfrm>
-            <a:off x="10424160" y="4361688"/>
-            <a:ext cx="201168" cy="274320"/>
-          </a:xfrm>
-          <a:prstGeom prst="rect">
-            <a:avLst/>
-          </a:prstGeom>
-          <a:solidFill>
-            <a:schemeClr val="accent3"/>
-          </a:solidFill>
-          <a:ln w="6350">
-            <a:solidFill>
-              <a:schemeClr val="accent3"/>
-            </a:solidFill>
-            <a:prstDash val="solid"/>
-          </a:ln>
-        </p:spPr>
-      </p:sp>
-      <p:sp>
-        <p:nvSpPr>
-          <p:cNvPr id="52" name="Shape 48"/>
-          <p:cNvSpPr/>
-          <p:nvPr/>
-        </p:nvSpPr>
-        <p:spPr>
-          <a:xfrm>
-            <a:off x="10680192" y="4361688"/>
-            <a:ext cx="201168" cy="274320"/>
-          </a:xfrm>
-          <a:prstGeom prst="rect">
-            <a:avLst/>
-          </a:prstGeom>
-          <a:solidFill>
-            <a:schemeClr val="accent3"/>
-          </a:solidFill>
-          <a:ln w="6350">
-            <a:solidFill>
-              <a:schemeClr val="accent3"/>
-            </a:solidFill>
-            <a:prstDash val="solid"/>
-          </a:ln>
-        </p:spPr>
-      </p:sp>
-      <p:sp>
-        <p:nvSpPr>
-          <p:cNvPr id="53" name="Text 49"/>
+          <p:cNvPr id="26" name="Text 23"/>
           <p:cNvSpPr txBox="1"/>
           <p:nvPr/>
         </p:nvSpPr>
         <p:spPr>
           <a:xfrm>
-            <a:off x="7086600" y="4846320"/>
-            <a:ext cx="3931920" cy="1143000"/>
+            <a:off x="6062472" y="5440680"/>
+            <a:ext cx="1600200" cy="320040"/>
           </a:xfrm>
           <a:prstGeom prst="rect">
             <a:avLst/>
@@ -8372,18 +7845,230 @@
           <a:bodyPr wrap="square" lIns="0" tIns="0" rIns="0" bIns="0" rtlCol="0" anchor="t"/>
           <a:lstStyle/>
           <a:p>
-            <a:pPr indent="0" marL="0">
+            <a:pPr algn="ctr" indent="0" marL="0">
               <a:buNone/>
             </a:pPr>
             <a:r>
-              <a:rPr lang="en-US" sz="1600" dirty="0">
-                <a:solidFill>
-                  <a:schemeClr val="tx1"/>
-                </a:solidFill>
-              </a:rPr>
-              <a:t>Los fotogramas vecinos son casi idénticos: separarlos entre train y test inflaría las métricas (data leakage).</a:t>
-            </a:r>
-            <a:endParaRPr lang="en-US" sz="1600" dirty="0"/>
+              <a:rPr lang="en-US" sz="1400" dirty="0">
+                <a:solidFill>
+                  <a:schemeClr val="tx2"/>
+                </a:solidFill>
+              </a:rPr>
+              <a:t>patience</a:t>
+            </a:r>
+            <a:endParaRPr lang="en-US" sz="1400" dirty="0"/>
+          </a:p>
+        </p:txBody>
+      </p:sp>
+      <p:sp>
+        <p:nvSpPr>
+          <p:cNvPr id="27" name="Shape 24"/>
+          <p:cNvSpPr/>
+          <p:nvPr/>
+        </p:nvSpPr>
+        <p:spPr>
+          <a:xfrm>
+            <a:off x="7808976" y="4617720"/>
+            <a:ext cx="1600200" cy="1325880"/>
+          </a:xfrm>
+          <a:prstGeom prst="roundRect">
+            <a:avLst>
+              <a:gd name="adj" fmla="val 8276"/>
+            </a:avLst>
+          </a:prstGeom>
+          <a:solidFill>
+            <a:schemeClr val="bg1"/>
+          </a:solidFill>
+          <a:ln w="15875">
+            <a:solidFill>
+              <a:schemeClr val="accent1"/>
+            </a:solidFill>
+            <a:prstDash val="solid"/>
+          </a:ln>
+          <a:effectLst>
+            <a:outerShdw sx="100000" sy="100000" kx="0" ky="0" algn="bl" rotWithShape="0" blurRad="76200" dist="25400" dir="5400000">
+              <a:srgbClr val="000000">
+                <a:alpha val="12000"/>
+              </a:srgbClr>
+            </a:outerShdw>
+          </a:effectLst>
+        </p:spPr>
+      </p:sp>
+      <p:sp>
+        <p:nvSpPr>
+          <p:cNvPr id="28" name="Text 25"/>
+          <p:cNvSpPr txBox="1"/>
+          <p:nvPr/>
+        </p:nvSpPr>
+        <p:spPr>
+          <a:xfrm>
+            <a:off x="7808976" y="4709160"/>
+            <a:ext cx="1600200" cy="685800"/>
+          </a:xfrm>
+          <a:prstGeom prst="rect">
+            <a:avLst/>
+          </a:prstGeom>
+          <a:noFill/>
+          <a:ln/>
+        </p:spPr>
+        <p:txBody>
+          <a:bodyPr wrap="square" lIns="0" tIns="0" rIns="0" bIns="0" rtlCol="0" anchor="ctr"/>
+          <a:lstStyle/>
+          <a:p>
+            <a:pPr algn="ctr" indent="0" marL="0">
+              <a:buNone/>
+            </a:pPr>
+            <a:r>
+              <a:rPr lang="en-US" sz="2600" b="1" dirty="0">
+                <a:solidFill>
+                  <a:schemeClr val="accent2"/>
+                </a:solidFill>
+              </a:rPr>
+              <a:t>0.01</a:t>
+            </a:r>
+            <a:endParaRPr lang="en-US" sz="2600" dirty="0"/>
+          </a:p>
+        </p:txBody>
+      </p:sp>
+      <p:sp>
+        <p:nvSpPr>
+          <p:cNvPr id="29" name="Text 26"/>
+          <p:cNvSpPr txBox="1"/>
+          <p:nvPr/>
+        </p:nvSpPr>
+        <p:spPr>
+          <a:xfrm>
+            <a:off x="7808976" y="5440680"/>
+            <a:ext cx="1600200" cy="320040"/>
+          </a:xfrm>
+          <a:prstGeom prst="rect">
+            <a:avLst/>
+          </a:prstGeom>
+          <a:noFill/>
+          <a:ln/>
+        </p:spPr>
+        <p:txBody>
+          <a:bodyPr wrap="square" lIns="0" tIns="0" rIns="0" bIns="0" rtlCol="0" anchor="t"/>
+          <a:lstStyle/>
+          <a:p>
+            <a:pPr algn="ctr" indent="0" marL="0">
+              <a:buNone/>
+            </a:pPr>
+            <a:r>
+              <a:rPr lang="en-US" sz="1400" dirty="0">
+                <a:solidFill>
+                  <a:schemeClr val="tx2"/>
+                </a:solidFill>
+              </a:rPr>
+              <a:t>lr inicial</a:t>
+            </a:r>
+            <a:endParaRPr lang="en-US" sz="1400" dirty="0"/>
+          </a:p>
+        </p:txBody>
+      </p:sp>
+      <p:sp>
+        <p:nvSpPr>
+          <p:cNvPr id="30" name="Shape 27"/>
+          <p:cNvSpPr/>
+          <p:nvPr/>
+        </p:nvSpPr>
+        <p:spPr>
+          <a:xfrm>
+            <a:off x="9555480" y="4617720"/>
+            <a:ext cx="1600200" cy="1325880"/>
+          </a:xfrm>
+          <a:prstGeom prst="roundRect">
+            <a:avLst>
+              <a:gd name="adj" fmla="val 8276"/>
+            </a:avLst>
+          </a:prstGeom>
+          <a:solidFill>
+            <a:schemeClr val="bg1"/>
+          </a:solidFill>
+          <a:ln w="15875">
+            <a:solidFill>
+              <a:schemeClr val="accent1"/>
+            </a:solidFill>
+            <a:prstDash val="solid"/>
+          </a:ln>
+          <a:effectLst>
+            <a:outerShdw sx="100000" sy="100000" kx="0" ky="0" algn="bl" rotWithShape="0" blurRad="76200" dist="25400" dir="5400000">
+              <a:srgbClr val="000000">
+                <a:alpha val="12000"/>
+              </a:srgbClr>
+            </a:outerShdw>
+          </a:effectLst>
+        </p:spPr>
+      </p:sp>
+      <p:sp>
+        <p:nvSpPr>
+          <p:cNvPr id="31" name="Text 28"/>
+          <p:cNvSpPr txBox="1"/>
+          <p:nvPr/>
+        </p:nvSpPr>
+        <p:spPr>
+          <a:xfrm>
+            <a:off x="9555480" y="4709160"/>
+            <a:ext cx="1600200" cy="685800"/>
+          </a:xfrm>
+          <a:prstGeom prst="rect">
+            <a:avLst/>
+          </a:prstGeom>
+          <a:noFill/>
+          <a:ln/>
+        </p:spPr>
+        <p:txBody>
+          <a:bodyPr wrap="square" lIns="0" tIns="0" rIns="0" bIns="0" rtlCol="0" anchor="ctr"/>
+          <a:lstStyle/>
+          <a:p>
+            <a:pPr algn="ctr" indent="0" marL="0">
+              <a:buNone/>
+            </a:pPr>
+            <a:r>
+              <a:rPr lang="en-US" sz="2600" b="1" dirty="0">
+                <a:solidFill>
+                  <a:schemeClr val="accent2"/>
+                </a:solidFill>
+              </a:rPr>
+              <a:t>auto</a:t>
+            </a:r>
+            <a:endParaRPr lang="en-US" sz="2600" dirty="0"/>
+          </a:p>
+        </p:txBody>
+      </p:sp>
+      <p:sp>
+        <p:nvSpPr>
+          <p:cNvPr id="32" name="Text 29"/>
+          <p:cNvSpPr txBox="1"/>
+          <p:nvPr/>
+        </p:nvSpPr>
+        <p:spPr>
+          <a:xfrm>
+            <a:off x="9555480" y="5440680"/>
+            <a:ext cx="1600200" cy="320040"/>
+          </a:xfrm>
+          <a:prstGeom prst="rect">
+            <a:avLst/>
+          </a:prstGeom>
+          <a:noFill/>
+          <a:ln/>
+        </p:spPr>
+        <p:txBody>
+          <a:bodyPr wrap="square" lIns="0" tIns="0" rIns="0" bIns="0" rtlCol="0" anchor="t"/>
+          <a:lstStyle/>
+          <a:p>
+            <a:pPr algn="ctr" indent="0" marL="0">
+              <a:buNone/>
+            </a:pPr>
+            <a:r>
+              <a:rPr lang="en-US" sz="1400" dirty="0">
+                <a:solidFill>
+                  <a:schemeClr val="tx2"/>
+                </a:solidFill>
+              </a:rPr>
+              <a:t>optimizador</a:t>
+            </a:r>
+            <a:endParaRPr lang="en-US" sz="1400" dirty="0"/>
           </a:p>
         </p:txBody>
       </p:sp>
@@ -8398,1208 +8083,6 @@
 <file path=ppt/slides/slide6.xml><?xml version="1.0" encoding="utf-8"?>
 <p:sld xmlns:a="http://schemas.openxmlformats.org/drawingml/2006/main" xmlns:r="http://schemas.openxmlformats.org/officeDocument/2006/relationships" xmlns:p="http://schemas.openxmlformats.org/presentationml/2006/main">
   <p:cSld name="Slide 6">
-    <p:spTree>
-      <p:nvGrpSpPr>
-        <p:cNvPr id="1" name=""/>
-        <p:cNvGrpSpPr/>
-        <p:nvPr/>
-      </p:nvGrpSpPr>
-      <p:grpSpPr>
-        <a:xfrm>
-          <a:off x="0" y="0"/>
-          <a:ext cx="0" cy="0"/>
-          <a:chOff x="0" y="0"/>
-          <a:chExt cx="0" cy="0"/>
-        </a:xfrm>
-      </p:grpSpPr>
-      <p:sp>
-        <p:nvSpPr>
-          <p:cNvPr id="3" name="Text 0"/>
-          <p:cNvSpPr/>
-          <p:nvPr>
-            <p:ph idx="100" type="title" hasCustomPrompt="1"/>
-          </p:nvPr>
-        </p:nvSpPr>
-        <p:spPr>
-          <a:xfrm>
-            <a:off x="1600200" y="182880"/>
-            <a:ext cx="7863840" cy="777240"/>
-          </a:xfrm>
-          <a:prstGeom prst="rect">
-            <a:avLst/>
-          </a:prstGeom>
-          <a:noFill/>
-          <a:ln/>
-        </p:spPr>
-        <p:txBody>
-          <a:bodyPr wrap="square" lIns="0" tIns="0" rIns="0" bIns="0" rtlCol="0" anchor="ctr"/>
-          <a:lstStyle/>
-          <a:p>
-            <a:pPr algn="l" indent="0" marL="0">
-              <a:buNone/>
-            </a:pPr>
-            <a:r>
-              <a:rPr lang="en-US" sz="3000" b="1" dirty="0">
-                <a:solidFill>
-                  <a:schemeClr val="tx1"/>
-                </a:solidFill>
-              </a:rPr>
-              <a:t>Entrenamiento y función de pérdida</a:t>
-            </a:r>
-            <a:endParaRPr lang="en-US" sz="3000" dirty="0"/>
-          </a:p>
-        </p:txBody>
-      </p:sp>
-      <p:sp>
-        <p:nvSpPr>
-          <p:cNvPr id="4" name="Shape 1"/>
-          <p:cNvSpPr/>
-          <p:nvPr/>
-        </p:nvSpPr>
-        <p:spPr>
-          <a:xfrm>
-            <a:off x="822960" y="1371600"/>
-            <a:ext cx="10332720" cy="1143000"/>
-          </a:xfrm>
-          <a:prstGeom prst="roundRect">
-            <a:avLst>
-              <a:gd name="adj" fmla="val 9600"/>
-            </a:avLst>
-          </a:prstGeom>
-          <a:solidFill>
-            <a:schemeClr val="bg1"/>
-          </a:solidFill>
-          <a:ln w="15875">
-            <a:solidFill>
-              <a:schemeClr val="accent1"/>
-            </a:solidFill>
-            <a:prstDash val="solid"/>
-          </a:ln>
-          <a:effectLst>
-            <a:outerShdw sx="100000" sy="100000" kx="0" ky="0" algn="bl" rotWithShape="0" blurRad="76200" dist="25400" dir="5400000">
-              <a:srgbClr val="000000">
-                <a:alpha val="12000"/>
-              </a:srgbClr>
-            </a:outerShdw>
-          </a:effectLst>
-        </p:spPr>
-      </p:sp>
-      <p:sp>
-        <p:nvSpPr>
-          <p:cNvPr id="5" name="Text 2"/>
-          <p:cNvSpPr txBox="1"/>
-          <p:nvPr/>
-        </p:nvSpPr>
-        <p:spPr>
-          <a:xfrm>
-            <a:off x="822960" y="1371600"/>
-            <a:ext cx="10332720" cy="1143000"/>
-          </a:xfrm>
-          <a:prstGeom prst="rect">
-            <a:avLst/>
-          </a:prstGeom>
-          <a:noFill/>
-          <a:ln/>
-        </p:spPr>
-        <p:txBody>
-          <a:bodyPr wrap="square" lIns="0" tIns="0" rIns="0" bIns="0" rtlCol="0" anchor="ctr"/>
-          <a:lstStyle/>
-          <a:p>
-            <a:pPr algn="ctr" indent="0" marL="0">
-              <a:buNone/>
-            </a:pPr>
-            <a:r>
-              <a:rPr lang="en-US" sz="3400" b="1" dirty="0">
-                <a:solidFill>
-                  <a:schemeClr val="tx1"/>
-                </a:solidFill>
-              </a:rPr>
-              <a:t>L = 7.5 · L</a:t>
-            </a:r>
-            <a:pPr algn="ctr" indent="0" marL="0">
-              <a:buNone/>
-            </a:pPr>
-            <a:r>
-              <a:rPr lang="en-US" sz="2200" b="1" baseline="-40000" dirty="0">
-                <a:solidFill>
-                  <a:schemeClr val="tx1"/>
-                </a:solidFill>
-              </a:rPr>
-              <a:t>CIoU</a:t>
-            </a:r>
-            <a:pPr algn="ctr" indent="0" marL="0">
-              <a:buNone/>
-            </a:pPr>
-            <a:r>
-              <a:rPr lang="en-US" sz="3400" b="1" dirty="0">
-                <a:solidFill>
-                  <a:schemeClr val="tx1"/>
-                </a:solidFill>
-              </a:rPr>
-              <a:t> + 0.5 · L</a:t>
-            </a:r>
-            <a:pPr algn="ctr" indent="0" marL="0">
-              <a:buNone/>
-            </a:pPr>
-            <a:r>
-              <a:rPr lang="en-US" sz="2200" b="1" baseline="-40000" dirty="0">
-                <a:solidFill>
-                  <a:schemeClr val="tx1"/>
-                </a:solidFill>
-              </a:rPr>
-              <a:t>BCE</a:t>
-            </a:r>
-            <a:pPr algn="ctr" indent="0" marL="0">
-              <a:buNone/>
-            </a:pPr>
-            <a:r>
-              <a:rPr lang="en-US" sz="3400" b="1" dirty="0">
-                <a:solidFill>
-                  <a:schemeClr val="tx1"/>
-                </a:solidFill>
-              </a:rPr>
-              <a:t> + 1.5 · L</a:t>
-            </a:r>
-            <a:pPr algn="ctr" indent="0" marL="0">
-              <a:buNone/>
-            </a:pPr>
-            <a:r>
-              <a:rPr lang="en-US" sz="2200" b="1" baseline="-40000" dirty="0">
-                <a:solidFill>
-                  <a:schemeClr val="tx1"/>
-                </a:solidFill>
-              </a:rPr>
-              <a:t>DFL</a:t>
-            </a:r>
-            <a:endParaRPr lang="en-US" sz="3400" dirty="0"/>
-          </a:p>
-        </p:txBody>
-      </p:sp>
-      <p:sp>
-        <p:nvSpPr>
-          <p:cNvPr id="6" name="Shape 3"/>
-          <p:cNvSpPr/>
-          <p:nvPr/>
-        </p:nvSpPr>
-        <p:spPr>
-          <a:xfrm>
-            <a:off x="822960" y="2697480"/>
-            <a:ext cx="3291840" cy="1645920"/>
-          </a:xfrm>
-          <a:prstGeom prst="roundRect">
-            <a:avLst>
-              <a:gd name="adj" fmla="val 6667"/>
-            </a:avLst>
-          </a:prstGeom>
-          <a:solidFill>
-            <a:schemeClr val="bg1"/>
-          </a:solidFill>
-          <a:ln w="15875">
-            <a:solidFill>
-              <a:schemeClr val="accent1"/>
-            </a:solidFill>
-            <a:prstDash val="solid"/>
-          </a:ln>
-          <a:effectLst>
-            <a:outerShdw sx="100000" sy="100000" kx="0" ky="0" algn="bl" rotWithShape="0" blurRad="76200" dist="25400" dir="5400000">
-              <a:srgbClr val="000000">
-                <a:alpha val="12000"/>
-              </a:srgbClr>
-            </a:outerShdw>
-          </a:effectLst>
-        </p:spPr>
-      </p:sp>
-      <p:sp>
-        <p:nvSpPr>
-          <p:cNvPr id="7" name="Text 4"/>
-          <p:cNvSpPr txBox="1"/>
-          <p:nvPr/>
-        </p:nvSpPr>
-        <p:spPr>
-          <a:xfrm>
-            <a:off x="914400" y="2697480"/>
-            <a:ext cx="1143000" cy="1645920"/>
-          </a:xfrm>
-          <a:prstGeom prst="rect">
-            <a:avLst/>
-          </a:prstGeom>
-          <a:noFill/>
-          <a:ln/>
-        </p:spPr>
-        <p:txBody>
-          <a:bodyPr wrap="square" lIns="0" tIns="0" rIns="0" bIns="0" rtlCol="0" anchor="ctr"/>
-          <a:lstStyle/>
-          <a:p>
-            <a:pPr algn="ctr" indent="0" marL="0">
-              <a:buNone/>
-            </a:pPr>
-            <a:r>
-              <a:rPr lang="en-US" sz="3800" b="1" dirty="0">
-                <a:solidFill>
-                  <a:schemeClr val="accent2"/>
-                </a:solidFill>
-              </a:rPr>
-              <a:t>7.5</a:t>
-            </a:r>
-            <a:endParaRPr lang="en-US" sz="3800" dirty="0"/>
-          </a:p>
-        </p:txBody>
-      </p:sp>
-      <p:sp>
-        <p:nvSpPr>
-          <p:cNvPr id="8" name="Text 5"/>
-          <p:cNvSpPr txBox="1"/>
-          <p:nvPr/>
-        </p:nvSpPr>
-        <p:spPr>
-          <a:xfrm>
-            <a:off x="2103120" y="2788920"/>
-            <a:ext cx="1920240" cy="1463040"/>
-          </a:xfrm>
-          <a:prstGeom prst="rect">
-            <a:avLst/>
-          </a:prstGeom>
-          <a:noFill/>
-          <a:ln/>
-        </p:spPr>
-        <p:txBody>
-          <a:bodyPr wrap="square" lIns="0" tIns="0" rIns="0" bIns="0" rtlCol="0" anchor="ctr"/>
-          <a:lstStyle/>
-          <a:p>
-            <a:pPr indent="0" marL="0">
-              <a:spcAft>
-                <a:spcPts val="400"/>
-              </a:spcAft>
-              <a:buNone/>
-            </a:pPr>
-            <a:r>
-              <a:rPr lang="en-US" sz="1800" b="1" dirty="0">
-                <a:solidFill>
-                  <a:schemeClr val="tx1"/>
-                </a:solidFill>
-              </a:rPr>
-              <a:t>CIoU · caja</a:t>
-            </a:r>
-            <a:endParaRPr lang="en-US" sz="1400" dirty="0"/>
-          </a:p>
-          <a:p>
-            <a:pPr indent="0" marL="0">
-              <a:spcAft>
-                <a:spcPts val="400"/>
-              </a:spcAft>
-              <a:buNone/>
-            </a:pPr>
-            <a:r>
-              <a:rPr lang="en-US" sz="1400" dirty="0">
-                <a:solidFill>
-                  <a:schemeClr val="tx2"/>
-                </a:solidFill>
-              </a:rPr>
-              <a:t>Superposición, distancia de centros y proporción.</a:t>
-            </a:r>
-            <a:endParaRPr lang="en-US" sz="1400" dirty="0"/>
-          </a:p>
-        </p:txBody>
-      </p:sp>
-      <p:sp>
-        <p:nvSpPr>
-          <p:cNvPr id="9" name="Shape 6"/>
-          <p:cNvSpPr/>
-          <p:nvPr/>
-        </p:nvSpPr>
-        <p:spPr>
-          <a:xfrm>
-            <a:off x="4343400" y="2697480"/>
-            <a:ext cx="3291840" cy="1645920"/>
-          </a:xfrm>
-          <a:prstGeom prst="roundRect">
-            <a:avLst>
-              <a:gd name="adj" fmla="val 6667"/>
-            </a:avLst>
-          </a:prstGeom>
-          <a:solidFill>
-            <a:schemeClr val="bg1"/>
-          </a:solidFill>
-          <a:ln w="15875">
-            <a:solidFill>
-              <a:schemeClr val="accent1"/>
-            </a:solidFill>
-            <a:prstDash val="solid"/>
-          </a:ln>
-          <a:effectLst>
-            <a:outerShdw sx="100000" sy="100000" kx="0" ky="0" algn="bl" rotWithShape="0" blurRad="76200" dist="25400" dir="5400000">
-              <a:srgbClr val="000000">
-                <a:alpha val="12000"/>
-              </a:srgbClr>
-            </a:outerShdw>
-          </a:effectLst>
-        </p:spPr>
-      </p:sp>
-      <p:sp>
-        <p:nvSpPr>
-          <p:cNvPr id="10" name="Text 7"/>
-          <p:cNvSpPr txBox="1"/>
-          <p:nvPr/>
-        </p:nvSpPr>
-        <p:spPr>
-          <a:xfrm>
-            <a:off x="4434840" y="2697480"/>
-            <a:ext cx="1143000" cy="1645920"/>
-          </a:xfrm>
-          <a:prstGeom prst="rect">
-            <a:avLst/>
-          </a:prstGeom>
-          <a:noFill/>
-          <a:ln/>
-        </p:spPr>
-        <p:txBody>
-          <a:bodyPr wrap="square" lIns="0" tIns="0" rIns="0" bIns="0" rtlCol="0" anchor="ctr"/>
-          <a:lstStyle/>
-          <a:p>
-            <a:pPr algn="ctr" indent="0" marL="0">
-              <a:buNone/>
-            </a:pPr>
-            <a:r>
-              <a:rPr lang="en-US" sz="3800" b="1" dirty="0">
-                <a:solidFill>
-                  <a:schemeClr val="accent2"/>
-                </a:solidFill>
-              </a:rPr>
-              <a:t>0.5</a:t>
-            </a:r>
-            <a:endParaRPr lang="en-US" sz="3800" dirty="0"/>
-          </a:p>
-        </p:txBody>
-      </p:sp>
-      <p:sp>
-        <p:nvSpPr>
-          <p:cNvPr id="11" name="Text 8"/>
-          <p:cNvSpPr txBox="1"/>
-          <p:nvPr/>
-        </p:nvSpPr>
-        <p:spPr>
-          <a:xfrm>
-            <a:off x="5623560" y="2788920"/>
-            <a:ext cx="1920240" cy="1463040"/>
-          </a:xfrm>
-          <a:prstGeom prst="rect">
-            <a:avLst/>
-          </a:prstGeom>
-          <a:noFill/>
-          <a:ln/>
-        </p:spPr>
-        <p:txBody>
-          <a:bodyPr wrap="square" lIns="0" tIns="0" rIns="0" bIns="0" rtlCol="0" anchor="ctr"/>
-          <a:lstStyle/>
-          <a:p>
-            <a:pPr indent="0" marL="0">
-              <a:spcAft>
-                <a:spcPts val="400"/>
-              </a:spcAft>
-              <a:buNone/>
-            </a:pPr>
-            <a:r>
-              <a:rPr lang="en-US" sz="1800" b="1" dirty="0">
-                <a:solidFill>
-                  <a:schemeClr val="tx1"/>
-                </a:solidFill>
-              </a:rPr>
-              <a:t>BCE · clase</a:t>
-            </a:r>
-            <a:endParaRPr lang="en-US" sz="1400" dirty="0"/>
-          </a:p>
-          <a:p>
-            <a:pPr indent="0" marL="0">
-              <a:spcAft>
-                <a:spcPts val="400"/>
-              </a:spcAft>
-              <a:buNone/>
-            </a:pPr>
-            <a:r>
-              <a:rPr lang="en-US" sz="1400" dirty="0">
-                <a:solidFill>
-                  <a:schemeClr val="tx2"/>
-                </a:solidFill>
-              </a:rPr>
-              <a:t>Entropía cruzada binaria por clase.</a:t>
-            </a:r>
-            <a:endParaRPr lang="en-US" sz="1400" dirty="0"/>
-          </a:p>
-        </p:txBody>
-      </p:sp>
-      <p:sp>
-        <p:nvSpPr>
-          <p:cNvPr id="12" name="Shape 9"/>
-          <p:cNvSpPr/>
-          <p:nvPr/>
-        </p:nvSpPr>
-        <p:spPr>
-          <a:xfrm>
-            <a:off x="7863840" y="2697480"/>
-            <a:ext cx="3291840" cy="1645920"/>
-          </a:xfrm>
-          <a:prstGeom prst="roundRect">
-            <a:avLst>
-              <a:gd name="adj" fmla="val 6667"/>
-            </a:avLst>
-          </a:prstGeom>
-          <a:solidFill>
-            <a:schemeClr val="bg1"/>
-          </a:solidFill>
-          <a:ln w="15875">
-            <a:solidFill>
-              <a:schemeClr val="accent1"/>
-            </a:solidFill>
-            <a:prstDash val="solid"/>
-          </a:ln>
-          <a:effectLst>
-            <a:outerShdw sx="100000" sy="100000" kx="0" ky="0" algn="bl" rotWithShape="0" blurRad="76200" dist="25400" dir="5400000">
-              <a:srgbClr val="000000">
-                <a:alpha val="12000"/>
-              </a:srgbClr>
-            </a:outerShdw>
-          </a:effectLst>
-        </p:spPr>
-      </p:sp>
-      <p:sp>
-        <p:nvSpPr>
-          <p:cNvPr id="13" name="Text 10"/>
-          <p:cNvSpPr txBox="1"/>
-          <p:nvPr/>
-        </p:nvSpPr>
-        <p:spPr>
-          <a:xfrm>
-            <a:off x="7955280" y="2697480"/>
-            <a:ext cx="1143000" cy="1645920"/>
-          </a:xfrm>
-          <a:prstGeom prst="rect">
-            <a:avLst/>
-          </a:prstGeom>
-          <a:noFill/>
-          <a:ln/>
-        </p:spPr>
-        <p:txBody>
-          <a:bodyPr wrap="square" lIns="0" tIns="0" rIns="0" bIns="0" rtlCol="0" anchor="ctr"/>
-          <a:lstStyle/>
-          <a:p>
-            <a:pPr algn="ctr" indent="0" marL="0">
-              <a:buNone/>
-            </a:pPr>
-            <a:r>
-              <a:rPr lang="en-US" sz="3800" b="1" dirty="0">
-                <a:solidFill>
-                  <a:schemeClr val="accent2"/>
-                </a:solidFill>
-              </a:rPr>
-              <a:t>1.5</a:t>
-            </a:r>
-            <a:endParaRPr lang="en-US" sz="3800" dirty="0"/>
-          </a:p>
-        </p:txBody>
-      </p:sp>
-      <p:sp>
-        <p:nvSpPr>
-          <p:cNvPr id="14" name="Text 11"/>
-          <p:cNvSpPr txBox="1"/>
-          <p:nvPr/>
-        </p:nvSpPr>
-        <p:spPr>
-          <a:xfrm>
-            <a:off x="9144000" y="2788920"/>
-            <a:ext cx="1920240" cy="1463040"/>
-          </a:xfrm>
-          <a:prstGeom prst="rect">
-            <a:avLst/>
-          </a:prstGeom>
-          <a:noFill/>
-          <a:ln/>
-        </p:spPr>
-        <p:txBody>
-          <a:bodyPr wrap="square" lIns="0" tIns="0" rIns="0" bIns="0" rtlCol="0" anchor="ctr"/>
-          <a:lstStyle/>
-          <a:p>
-            <a:pPr indent="0" marL="0">
-              <a:spcAft>
-                <a:spcPts val="400"/>
-              </a:spcAft>
-              <a:buNone/>
-            </a:pPr>
-            <a:r>
-              <a:rPr lang="en-US" sz="1800" b="1" dirty="0">
-                <a:solidFill>
-                  <a:schemeClr val="tx1"/>
-                </a:solidFill>
-              </a:rPr>
-              <a:t>DFL · bordes</a:t>
-            </a:r>
-            <a:endParaRPr lang="en-US" sz="1400" dirty="0"/>
-          </a:p>
-          <a:p>
-            <a:pPr indent="0" marL="0">
-              <a:spcAft>
-                <a:spcPts val="400"/>
-              </a:spcAft>
-              <a:buNone/>
-            </a:pPr>
-            <a:r>
-              <a:rPr lang="en-US" sz="1400" dirty="0">
-                <a:solidFill>
-                  <a:schemeClr val="tx2"/>
-                </a:solidFill>
-              </a:rPr>
-              <a:t>Afina los bordes de la caja.</a:t>
-            </a:r>
-            <a:endParaRPr lang="en-US" sz="1400" dirty="0"/>
-          </a:p>
-        </p:txBody>
-      </p:sp>
-      <p:sp>
-        <p:nvSpPr>
-          <p:cNvPr id="15" name="Shape 12"/>
-          <p:cNvSpPr/>
-          <p:nvPr/>
-        </p:nvSpPr>
-        <p:spPr>
-          <a:xfrm>
-            <a:off x="822960" y="4617720"/>
-            <a:ext cx="1600200" cy="1325880"/>
-          </a:xfrm>
-          <a:prstGeom prst="roundRect">
-            <a:avLst>
-              <a:gd name="adj" fmla="val 8276"/>
-            </a:avLst>
-          </a:prstGeom>
-          <a:solidFill>
-            <a:schemeClr val="bg1"/>
-          </a:solidFill>
-          <a:ln w="15875">
-            <a:solidFill>
-              <a:schemeClr val="accent1"/>
-            </a:solidFill>
-            <a:prstDash val="solid"/>
-          </a:ln>
-          <a:effectLst>
-            <a:outerShdw sx="100000" sy="100000" kx="0" ky="0" algn="bl" rotWithShape="0" blurRad="76200" dist="25400" dir="5400000">
-              <a:srgbClr val="000000">
-                <a:alpha val="12000"/>
-              </a:srgbClr>
-            </a:outerShdw>
-          </a:effectLst>
-        </p:spPr>
-      </p:sp>
-      <p:sp>
-        <p:nvSpPr>
-          <p:cNvPr id="16" name="Text 13"/>
-          <p:cNvSpPr txBox="1"/>
-          <p:nvPr/>
-        </p:nvSpPr>
-        <p:spPr>
-          <a:xfrm>
-            <a:off x="822960" y="4709160"/>
-            <a:ext cx="1600200" cy="685800"/>
-          </a:xfrm>
-          <a:prstGeom prst="rect">
-            <a:avLst/>
-          </a:prstGeom>
-          <a:noFill/>
-          <a:ln/>
-        </p:spPr>
-        <p:txBody>
-          <a:bodyPr wrap="square" lIns="0" tIns="0" rIns="0" bIns="0" rtlCol="0" anchor="ctr"/>
-          <a:lstStyle/>
-          <a:p>
-            <a:pPr algn="ctr" indent="0" marL="0">
-              <a:buNone/>
-            </a:pPr>
-            <a:r>
-              <a:rPr lang="en-US" sz="2600" b="1" dirty="0">
-                <a:solidFill>
-                  <a:schemeClr val="accent2"/>
-                </a:solidFill>
-              </a:rPr>
-              <a:t>100</a:t>
-            </a:r>
-            <a:endParaRPr lang="en-US" sz="2600" dirty="0"/>
-          </a:p>
-        </p:txBody>
-      </p:sp>
-      <p:sp>
-        <p:nvSpPr>
-          <p:cNvPr id="17" name="Text 14"/>
-          <p:cNvSpPr txBox="1"/>
-          <p:nvPr/>
-        </p:nvSpPr>
-        <p:spPr>
-          <a:xfrm>
-            <a:off x="822960" y="5440680"/>
-            <a:ext cx="1600200" cy="320040"/>
-          </a:xfrm>
-          <a:prstGeom prst="rect">
-            <a:avLst/>
-          </a:prstGeom>
-          <a:noFill/>
-          <a:ln/>
-        </p:spPr>
-        <p:txBody>
-          <a:bodyPr wrap="square" lIns="0" tIns="0" rIns="0" bIns="0" rtlCol="0" anchor="t"/>
-          <a:lstStyle/>
-          <a:p>
-            <a:pPr algn="ctr" indent="0" marL="0">
-              <a:buNone/>
-            </a:pPr>
-            <a:r>
-              <a:rPr lang="en-US" sz="1400" dirty="0">
-                <a:solidFill>
-                  <a:schemeClr val="tx2"/>
-                </a:solidFill>
-              </a:rPr>
-              <a:t>épocas máx.</a:t>
-            </a:r>
-            <a:endParaRPr lang="en-US" sz="1400" dirty="0"/>
-          </a:p>
-        </p:txBody>
-      </p:sp>
-      <p:sp>
-        <p:nvSpPr>
-          <p:cNvPr id="18" name="Shape 15"/>
-          <p:cNvSpPr/>
-          <p:nvPr/>
-        </p:nvSpPr>
-        <p:spPr>
-          <a:xfrm>
-            <a:off x="2569464" y="4617720"/>
-            <a:ext cx="1600200" cy="1325880"/>
-          </a:xfrm>
-          <a:prstGeom prst="roundRect">
-            <a:avLst>
-              <a:gd name="adj" fmla="val 8276"/>
-            </a:avLst>
-          </a:prstGeom>
-          <a:solidFill>
-            <a:schemeClr val="bg1"/>
-          </a:solidFill>
-          <a:ln w="15875">
-            <a:solidFill>
-              <a:schemeClr val="accent1"/>
-            </a:solidFill>
-            <a:prstDash val="solid"/>
-          </a:ln>
-          <a:effectLst>
-            <a:outerShdw sx="100000" sy="100000" kx="0" ky="0" algn="bl" rotWithShape="0" blurRad="76200" dist="25400" dir="5400000">
-              <a:srgbClr val="000000">
-                <a:alpha val="12000"/>
-              </a:srgbClr>
-            </a:outerShdw>
-          </a:effectLst>
-        </p:spPr>
-      </p:sp>
-      <p:sp>
-        <p:nvSpPr>
-          <p:cNvPr id="19" name="Text 16"/>
-          <p:cNvSpPr txBox="1"/>
-          <p:nvPr/>
-        </p:nvSpPr>
-        <p:spPr>
-          <a:xfrm>
-            <a:off x="2569464" y="4709160"/>
-            <a:ext cx="1600200" cy="685800"/>
-          </a:xfrm>
-          <a:prstGeom prst="rect">
-            <a:avLst/>
-          </a:prstGeom>
-          <a:noFill/>
-          <a:ln/>
-        </p:spPr>
-        <p:txBody>
-          <a:bodyPr wrap="square" lIns="0" tIns="0" rIns="0" bIns="0" rtlCol="0" anchor="ctr"/>
-          <a:lstStyle/>
-          <a:p>
-            <a:pPr algn="ctr" indent="0" marL="0">
-              <a:buNone/>
-            </a:pPr>
-            <a:r>
-              <a:rPr lang="en-US" sz="2600" b="1" dirty="0">
-                <a:solidFill>
-                  <a:schemeClr val="accent2"/>
-                </a:solidFill>
-              </a:rPr>
-              <a:t>16</a:t>
-            </a:r>
-            <a:endParaRPr lang="en-US" sz="2600" dirty="0"/>
-          </a:p>
-        </p:txBody>
-      </p:sp>
-      <p:sp>
-        <p:nvSpPr>
-          <p:cNvPr id="20" name="Text 17"/>
-          <p:cNvSpPr txBox="1"/>
-          <p:nvPr/>
-        </p:nvSpPr>
-        <p:spPr>
-          <a:xfrm>
-            <a:off x="2569464" y="5440680"/>
-            <a:ext cx="1600200" cy="320040"/>
-          </a:xfrm>
-          <a:prstGeom prst="rect">
-            <a:avLst/>
-          </a:prstGeom>
-          <a:noFill/>
-          <a:ln/>
-        </p:spPr>
-        <p:txBody>
-          <a:bodyPr wrap="square" lIns="0" tIns="0" rIns="0" bIns="0" rtlCol="0" anchor="t"/>
-          <a:lstStyle/>
-          <a:p>
-            <a:pPr algn="ctr" indent="0" marL="0">
-              <a:buNone/>
-            </a:pPr>
-            <a:r>
-              <a:rPr lang="en-US" sz="1400" dirty="0">
-                <a:solidFill>
-                  <a:schemeClr val="tx2"/>
-                </a:solidFill>
-              </a:rPr>
-              <a:t>lote</a:t>
-            </a:r>
-            <a:endParaRPr lang="en-US" sz="1400" dirty="0"/>
-          </a:p>
-        </p:txBody>
-      </p:sp>
-      <p:sp>
-        <p:nvSpPr>
-          <p:cNvPr id="21" name="Shape 18"/>
-          <p:cNvSpPr/>
-          <p:nvPr/>
-        </p:nvSpPr>
-        <p:spPr>
-          <a:xfrm>
-            <a:off x="4315968" y="4617720"/>
-            <a:ext cx="1600200" cy="1325880"/>
-          </a:xfrm>
-          <a:prstGeom prst="roundRect">
-            <a:avLst>
-              <a:gd name="adj" fmla="val 8276"/>
-            </a:avLst>
-          </a:prstGeom>
-          <a:solidFill>
-            <a:schemeClr val="bg1"/>
-          </a:solidFill>
-          <a:ln w="15875">
-            <a:solidFill>
-              <a:schemeClr val="accent1"/>
-            </a:solidFill>
-            <a:prstDash val="solid"/>
-          </a:ln>
-          <a:effectLst>
-            <a:outerShdw sx="100000" sy="100000" kx="0" ky="0" algn="bl" rotWithShape="0" blurRad="76200" dist="25400" dir="5400000">
-              <a:srgbClr val="000000">
-                <a:alpha val="12000"/>
-              </a:srgbClr>
-            </a:outerShdw>
-          </a:effectLst>
-        </p:spPr>
-      </p:sp>
-      <p:sp>
-        <p:nvSpPr>
-          <p:cNvPr id="22" name="Text 19"/>
-          <p:cNvSpPr txBox="1"/>
-          <p:nvPr/>
-        </p:nvSpPr>
-        <p:spPr>
-          <a:xfrm>
-            <a:off x="4315968" y="4709160"/>
-            <a:ext cx="1600200" cy="685800"/>
-          </a:xfrm>
-          <a:prstGeom prst="rect">
-            <a:avLst/>
-          </a:prstGeom>
-          <a:noFill/>
-          <a:ln/>
-        </p:spPr>
-        <p:txBody>
-          <a:bodyPr wrap="square" lIns="0" tIns="0" rIns="0" bIns="0" rtlCol="0" anchor="ctr"/>
-          <a:lstStyle/>
-          <a:p>
-            <a:pPr algn="ctr" indent="0" marL="0">
-              <a:buNone/>
-            </a:pPr>
-            <a:r>
-              <a:rPr lang="en-US" sz="2600" b="1" dirty="0">
-                <a:solidFill>
-                  <a:schemeClr val="accent2"/>
-                </a:solidFill>
-              </a:rPr>
-              <a:t>640 px</a:t>
-            </a:r>
-            <a:endParaRPr lang="en-US" sz="2600" dirty="0"/>
-          </a:p>
-        </p:txBody>
-      </p:sp>
-      <p:sp>
-        <p:nvSpPr>
-          <p:cNvPr id="23" name="Text 20"/>
-          <p:cNvSpPr txBox="1"/>
-          <p:nvPr/>
-        </p:nvSpPr>
-        <p:spPr>
-          <a:xfrm>
-            <a:off x="4315968" y="5440680"/>
-            <a:ext cx="1600200" cy="320040"/>
-          </a:xfrm>
-          <a:prstGeom prst="rect">
-            <a:avLst/>
-          </a:prstGeom>
-          <a:noFill/>
-          <a:ln/>
-        </p:spPr>
-        <p:txBody>
-          <a:bodyPr wrap="square" lIns="0" tIns="0" rIns="0" bIns="0" rtlCol="0" anchor="t"/>
-          <a:lstStyle/>
-          <a:p>
-            <a:pPr algn="ctr" indent="0" marL="0">
-              <a:buNone/>
-            </a:pPr>
-            <a:r>
-              <a:rPr lang="en-US" sz="1400" dirty="0">
-                <a:solidFill>
-                  <a:schemeClr val="tx2"/>
-                </a:solidFill>
-              </a:rPr>
-              <a:t>imagen</a:t>
-            </a:r>
-            <a:endParaRPr lang="en-US" sz="1400" dirty="0"/>
-          </a:p>
-        </p:txBody>
-      </p:sp>
-      <p:sp>
-        <p:nvSpPr>
-          <p:cNvPr id="24" name="Shape 21"/>
-          <p:cNvSpPr/>
-          <p:nvPr/>
-        </p:nvSpPr>
-        <p:spPr>
-          <a:xfrm>
-            <a:off x="6062472" y="4617720"/>
-            <a:ext cx="1600200" cy="1325880"/>
-          </a:xfrm>
-          <a:prstGeom prst="roundRect">
-            <a:avLst>
-              <a:gd name="adj" fmla="val 8276"/>
-            </a:avLst>
-          </a:prstGeom>
-          <a:solidFill>
-            <a:schemeClr val="bg1"/>
-          </a:solidFill>
-          <a:ln w="15875">
-            <a:solidFill>
-              <a:schemeClr val="accent1"/>
-            </a:solidFill>
-            <a:prstDash val="solid"/>
-          </a:ln>
-          <a:effectLst>
-            <a:outerShdw sx="100000" sy="100000" kx="0" ky="0" algn="bl" rotWithShape="0" blurRad="76200" dist="25400" dir="5400000">
-              <a:srgbClr val="000000">
-                <a:alpha val="12000"/>
-              </a:srgbClr>
-            </a:outerShdw>
-          </a:effectLst>
-        </p:spPr>
-      </p:sp>
-      <p:sp>
-        <p:nvSpPr>
-          <p:cNvPr id="25" name="Text 22"/>
-          <p:cNvSpPr txBox="1"/>
-          <p:nvPr/>
-        </p:nvSpPr>
-        <p:spPr>
-          <a:xfrm>
-            <a:off x="6062472" y="4709160"/>
-            <a:ext cx="1600200" cy="685800"/>
-          </a:xfrm>
-          <a:prstGeom prst="rect">
-            <a:avLst/>
-          </a:prstGeom>
-          <a:noFill/>
-          <a:ln/>
-        </p:spPr>
-        <p:txBody>
-          <a:bodyPr wrap="square" lIns="0" tIns="0" rIns="0" bIns="0" rtlCol="0" anchor="ctr"/>
-          <a:lstStyle/>
-          <a:p>
-            <a:pPr algn="ctr" indent="0" marL="0">
-              <a:buNone/>
-            </a:pPr>
-            <a:r>
-              <a:rPr lang="en-US" sz="2600" b="1" dirty="0">
-                <a:solidFill>
-                  <a:schemeClr val="accent2"/>
-                </a:solidFill>
-              </a:rPr>
-              <a:t>20</a:t>
-            </a:r>
-            <a:endParaRPr lang="en-US" sz="2600" dirty="0"/>
-          </a:p>
-        </p:txBody>
-      </p:sp>
-      <p:sp>
-        <p:nvSpPr>
-          <p:cNvPr id="26" name="Text 23"/>
-          <p:cNvSpPr txBox="1"/>
-          <p:nvPr/>
-        </p:nvSpPr>
-        <p:spPr>
-          <a:xfrm>
-            <a:off x="6062472" y="5440680"/>
-            <a:ext cx="1600200" cy="320040"/>
-          </a:xfrm>
-          <a:prstGeom prst="rect">
-            <a:avLst/>
-          </a:prstGeom>
-          <a:noFill/>
-          <a:ln/>
-        </p:spPr>
-        <p:txBody>
-          <a:bodyPr wrap="square" lIns="0" tIns="0" rIns="0" bIns="0" rtlCol="0" anchor="t"/>
-          <a:lstStyle/>
-          <a:p>
-            <a:pPr algn="ctr" indent="0" marL="0">
-              <a:buNone/>
-            </a:pPr>
-            <a:r>
-              <a:rPr lang="en-US" sz="1400" dirty="0">
-                <a:solidFill>
-                  <a:schemeClr val="tx2"/>
-                </a:solidFill>
-              </a:rPr>
-              <a:t>patience</a:t>
-            </a:r>
-            <a:endParaRPr lang="en-US" sz="1400" dirty="0"/>
-          </a:p>
-        </p:txBody>
-      </p:sp>
-      <p:sp>
-        <p:nvSpPr>
-          <p:cNvPr id="27" name="Shape 24"/>
-          <p:cNvSpPr/>
-          <p:nvPr/>
-        </p:nvSpPr>
-        <p:spPr>
-          <a:xfrm>
-            <a:off x="7808976" y="4617720"/>
-            <a:ext cx="1600200" cy="1325880"/>
-          </a:xfrm>
-          <a:prstGeom prst="roundRect">
-            <a:avLst>
-              <a:gd name="adj" fmla="val 8276"/>
-            </a:avLst>
-          </a:prstGeom>
-          <a:solidFill>
-            <a:schemeClr val="bg1"/>
-          </a:solidFill>
-          <a:ln w="15875">
-            <a:solidFill>
-              <a:schemeClr val="accent1"/>
-            </a:solidFill>
-            <a:prstDash val="solid"/>
-          </a:ln>
-          <a:effectLst>
-            <a:outerShdw sx="100000" sy="100000" kx="0" ky="0" algn="bl" rotWithShape="0" blurRad="76200" dist="25400" dir="5400000">
-              <a:srgbClr val="000000">
-                <a:alpha val="12000"/>
-              </a:srgbClr>
-            </a:outerShdw>
-          </a:effectLst>
-        </p:spPr>
-      </p:sp>
-      <p:sp>
-        <p:nvSpPr>
-          <p:cNvPr id="28" name="Text 25"/>
-          <p:cNvSpPr txBox="1"/>
-          <p:nvPr/>
-        </p:nvSpPr>
-        <p:spPr>
-          <a:xfrm>
-            <a:off x="7808976" y="4709160"/>
-            <a:ext cx="1600200" cy="685800"/>
-          </a:xfrm>
-          <a:prstGeom prst="rect">
-            <a:avLst/>
-          </a:prstGeom>
-          <a:noFill/>
-          <a:ln/>
-        </p:spPr>
-        <p:txBody>
-          <a:bodyPr wrap="square" lIns="0" tIns="0" rIns="0" bIns="0" rtlCol="0" anchor="ctr"/>
-          <a:lstStyle/>
-          <a:p>
-            <a:pPr algn="ctr" indent="0" marL="0">
-              <a:buNone/>
-            </a:pPr>
-            <a:r>
-              <a:rPr lang="en-US" sz="2600" b="1" dirty="0">
-                <a:solidFill>
-                  <a:schemeClr val="accent2"/>
-                </a:solidFill>
-              </a:rPr>
-              <a:t>0.01</a:t>
-            </a:r>
-            <a:endParaRPr lang="en-US" sz="2600" dirty="0"/>
-          </a:p>
-        </p:txBody>
-      </p:sp>
-      <p:sp>
-        <p:nvSpPr>
-          <p:cNvPr id="29" name="Text 26"/>
-          <p:cNvSpPr txBox="1"/>
-          <p:nvPr/>
-        </p:nvSpPr>
-        <p:spPr>
-          <a:xfrm>
-            <a:off x="7808976" y="5440680"/>
-            <a:ext cx="1600200" cy="320040"/>
-          </a:xfrm>
-          <a:prstGeom prst="rect">
-            <a:avLst/>
-          </a:prstGeom>
-          <a:noFill/>
-          <a:ln/>
-        </p:spPr>
-        <p:txBody>
-          <a:bodyPr wrap="square" lIns="0" tIns="0" rIns="0" bIns="0" rtlCol="0" anchor="t"/>
-          <a:lstStyle/>
-          <a:p>
-            <a:pPr algn="ctr" indent="0" marL="0">
-              <a:buNone/>
-            </a:pPr>
-            <a:r>
-              <a:rPr lang="en-US" sz="1400" dirty="0">
-                <a:solidFill>
-                  <a:schemeClr val="tx2"/>
-                </a:solidFill>
-              </a:rPr>
-              <a:t>lr inicial</a:t>
-            </a:r>
-            <a:endParaRPr lang="en-US" sz="1400" dirty="0"/>
-          </a:p>
-        </p:txBody>
-      </p:sp>
-      <p:sp>
-        <p:nvSpPr>
-          <p:cNvPr id="30" name="Shape 27"/>
-          <p:cNvSpPr/>
-          <p:nvPr/>
-        </p:nvSpPr>
-        <p:spPr>
-          <a:xfrm>
-            <a:off x="9555480" y="4617720"/>
-            <a:ext cx="1600200" cy="1325880"/>
-          </a:xfrm>
-          <a:prstGeom prst="roundRect">
-            <a:avLst>
-              <a:gd name="adj" fmla="val 8276"/>
-            </a:avLst>
-          </a:prstGeom>
-          <a:solidFill>
-            <a:schemeClr val="bg1"/>
-          </a:solidFill>
-          <a:ln w="15875">
-            <a:solidFill>
-              <a:schemeClr val="accent1"/>
-            </a:solidFill>
-            <a:prstDash val="solid"/>
-          </a:ln>
-          <a:effectLst>
-            <a:outerShdw sx="100000" sy="100000" kx="0" ky="0" algn="bl" rotWithShape="0" blurRad="76200" dist="25400" dir="5400000">
-              <a:srgbClr val="000000">
-                <a:alpha val="12000"/>
-              </a:srgbClr>
-            </a:outerShdw>
-          </a:effectLst>
-        </p:spPr>
-      </p:sp>
-      <p:sp>
-        <p:nvSpPr>
-          <p:cNvPr id="31" name="Text 28"/>
-          <p:cNvSpPr txBox="1"/>
-          <p:nvPr/>
-        </p:nvSpPr>
-        <p:spPr>
-          <a:xfrm>
-            <a:off x="9555480" y="4709160"/>
-            <a:ext cx="1600200" cy="685800"/>
-          </a:xfrm>
-          <a:prstGeom prst="rect">
-            <a:avLst/>
-          </a:prstGeom>
-          <a:noFill/>
-          <a:ln/>
-        </p:spPr>
-        <p:txBody>
-          <a:bodyPr wrap="square" lIns="0" tIns="0" rIns="0" bIns="0" rtlCol="0" anchor="ctr"/>
-          <a:lstStyle/>
-          <a:p>
-            <a:pPr algn="ctr" indent="0" marL="0">
-              <a:buNone/>
-            </a:pPr>
-            <a:r>
-              <a:rPr lang="en-US" sz="2600" b="1" dirty="0">
-                <a:solidFill>
-                  <a:schemeClr val="accent2"/>
-                </a:solidFill>
-              </a:rPr>
-              <a:t>auto</a:t>
-            </a:r>
-            <a:endParaRPr lang="en-US" sz="2600" dirty="0"/>
-          </a:p>
-        </p:txBody>
-      </p:sp>
-      <p:sp>
-        <p:nvSpPr>
-          <p:cNvPr id="32" name="Text 29"/>
-          <p:cNvSpPr txBox="1"/>
-          <p:nvPr/>
-        </p:nvSpPr>
-        <p:spPr>
-          <a:xfrm>
-            <a:off x="9555480" y="5440680"/>
-            <a:ext cx="1600200" cy="320040"/>
-          </a:xfrm>
-          <a:prstGeom prst="rect">
-            <a:avLst/>
-          </a:prstGeom>
-          <a:noFill/>
-          <a:ln/>
-        </p:spPr>
-        <p:txBody>
-          <a:bodyPr wrap="square" lIns="0" tIns="0" rIns="0" bIns="0" rtlCol="0" anchor="t"/>
-          <a:lstStyle/>
-          <a:p>
-            <a:pPr algn="ctr" indent="0" marL="0">
-              <a:buNone/>
-            </a:pPr>
-            <a:r>
-              <a:rPr lang="en-US" sz="1400" dirty="0">
-                <a:solidFill>
-                  <a:schemeClr val="tx2"/>
-                </a:solidFill>
-              </a:rPr>
-              <a:t>optimizador</a:t>
-            </a:r>
-            <a:endParaRPr lang="en-US" sz="1400" dirty="0"/>
-          </a:p>
-        </p:txBody>
-      </p:sp>
-    </p:spTree>
-  </p:cSld>
-  <p:clrMapOvr>
-    <a:masterClrMapping/>
-  </p:clrMapOvr>
-</p:sld>
-</file>
-
-<file path=ppt/slides/slide7.xml><?xml version="1.0" encoding="utf-8"?>
-<p:sld xmlns:a="http://schemas.openxmlformats.org/drawingml/2006/main" xmlns:r="http://schemas.openxmlformats.org/officeDocument/2006/relationships" xmlns:p="http://schemas.openxmlformats.org/presentationml/2006/main">
-  <p:cSld name="Slide 7">
     <p:spTree>
       <p:nvGrpSpPr>
         <p:cNvPr id="1" name=""/>

--- a/docs/presentacion/PrintWatch_YOLO11.pptx
+++ b/docs/presentacion/PrintWatch_YOLO11.pptx
@@ -112,18 +112,18 @@
   <p:extLst>
     <p:ext uri="{521415D9-36F7-43E2-AB2F-B90AF26B5E84}">
       <p14:sectionLst xmlns:p14="http://schemas.microsoft.com/office/powerpoint/2010/main">
-        <p14:section name="Portada" id="{284843d3-4642-467f-cde3-24282e9f1e83}">
+        <p14:section name="Portada" id="{014115c3-5c72-2463-dc59-ee7e47550ec5}">
           <p14:sldIdLst>
             <p14:sldId id="256"/>
           </p14:sldIdLst>
         </p14:section>
-        <p14:section name="Modelo YOLO11s" id="{b79d263f-57d7-e36e-d5e4-b425a00a0432}">
+        <p14:section name="Modelo YOLO11s" id="{74a1c044-b619-22ac-9364-56a6699425d3}">
           <p14:sldIdLst>
             <p14:sldId id="257"/>
             <p14:sldId id="258"/>
           </p14:sldIdLst>
         </p14:section>
-        <p14:section name="Datos y entrenamiento" id="{d024e762-a8d1-dd1e-0917-9a66c5b25a6f}">
+        <p14:section name="Datos y entrenamiento" id="{61f5033a-835c-4cb5-78f9-24ba7a507c3b}">
           <p14:sldIdLst>
             <p14:sldId id="259"/>
             <p14:sldId id="260"/>
@@ -2421,7 +2421,7 @@
           <a:p>
             <a:r>
               <a:rPr lang="en-US" dirty="0"/>
-              <a:t>Continuación de la parte de mi compañero: el tensor (1, 3, 640, 640) ya normalizado es lo que entra a la red. YOLO es un detector de una sola etapa: la misma pasada hacia adelante localiza y clasifica. La imagen se reparte en celdas en tres escalas, cada celda propone una caja y probabilidades de clase, y el NMS limpia los duplicados.</a:t>
+              <a:t>El tensor (1, 3, 640, 640) ya normalizado es lo que entra a la red. YOLO es un detector de una sola etapa: la misma pasada hacia adelante localiza y clasifica. La imagen se reparte en celdas en tres escalas, cada celda propone una caja y probabilidades de clase, y el NMS limpia los duplicados.</a:t>
             </a:r>
             <a:endParaRPr lang="en-US" dirty="0"/>
           </a:p>
@@ -2597,7 +2597,7 @@
           <a:p>
             <a:r>
               <a:rPr lang="en-US" dirty="0"/>
-              <a:t>Combinamos tres datasets públicos de Roboflow Universe: 3612, 1002 y 999 imágenes, 5613 en total, mapeados a nuestras seis clases. Dividimos 70, 15 y 15 por ciento por secuencia de video y no por fotograma, porque frames consecutivos son casi idénticos y, si quedaran repartidos entre entrenamiento y prueba, las métricas saldrían infladas: eso es data leakage. El conjunto de prueba real quedó en 841 imágenes porque la división por secuencia no es exacta.</a:t>
+              <a:t>Aquí cambia el expositor: se pasa de cómo funciona YOLO a cómo se entrenó. Combinamos tres datasets públicos de Roboflow Universe: 3612, 1002 y 999 imágenes, 5613 en total, mapeados a nuestras seis clases. Dividimos 70, 15 y 15 por ciento por secuencia de video y no por fotograma, porque frames consecutivos son casi idénticos y, si quedaran repartidos entre entrenamiento y prueba, las métricas saldrían infladas: eso es data leakage. El conjunto de prueba real quedó en 841 imágenes porque la división por secuencia no es exacta.</a:t>
             </a:r>
             <a:endParaRPr lang="en-US" dirty="0"/>
           </a:p>
